--- a/Bases de Datos II/Clases/Clase 1 - Revision BD I y arranque VetCare/Presentacion.pptx
+++ b/Bases de Datos II/Clases/Clase 1 - Revision BD I y arranque VetCare/Presentacion.pptx
@@ -21,8 +21,6 @@
     <p:sldId id="269" r:id="rId20"/>
     <p:sldId id="270" r:id="rId21"/>
     <p:sldId id="271" r:id="rId22"/>
-    <p:sldId id="272" r:id="rId23"/>
-    <p:sldId id="273" r:id="rId24"/>
   </p:sldIdLst>
   <p:sldSz cx="12191695" cy="6858000" type="screen4x3"/>
   <p:notesSz cx="6858000" cy="9144000"/>
@@ -6553,1017 +6551,6 @@
         <p:spPr>
           <a:xfrm>
             <a:off x="0" y="0"/>
-            <a:ext cx="12191695" cy="1170432"/>
-          </a:xfrm>
-          <a:prstGeom prst="rect">
-            <a:avLst/>
-          </a:prstGeom>
-          <a:solidFill>
-            <a:srgbClr val="095292"/>
-          </a:solidFill>
-          <a:ln>
-            <a:noFill/>
-          </a:ln>
-        </p:spPr>
-        <p:style>
-          <a:lnRef idx="1">
-            <a:schemeClr val="accent1"/>
-          </a:lnRef>
-          <a:fillRef idx="3">
-            <a:schemeClr val="accent1"/>
-          </a:fillRef>
-          <a:effectRef idx="2">
-            <a:schemeClr val="accent1"/>
-          </a:effectRef>
-          <a:fontRef idx="minor">
-            <a:schemeClr val="lt1"/>
-          </a:fontRef>
-        </p:style>
-        <p:txBody>
-          <a:bodyPr rtlCol="0" anchor="ctr"/>
-          <a:lstStyle/>
-          <a:p>
-            <a:pPr algn="ctr"/>
-          </a:p>
-        </p:txBody>
-      </p:sp>
-      <p:sp>
-        <p:nvSpPr>
-          <p:cNvPr id="3" name="Rectangle 2"/>
-          <p:cNvSpPr/>
-          <p:nvPr/>
-        </p:nvSpPr>
-        <p:spPr>
-          <a:xfrm>
-            <a:off x="0" y="1170432"/>
-            <a:ext cx="12191695" cy="41148"/>
-          </a:xfrm>
-          <a:prstGeom prst="rect">
-            <a:avLst/>
-          </a:prstGeom>
-          <a:solidFill>
-            <a:srgbClr val="FFD000"/>
-          </a:solidFill>
-          <a:ln>
-            <a:noFill/>
-          </a:ln>
-        </p:spPr>
-        <p:style>
-          <a:lnRef idx="1">
-            <a:schemeClr val="accent1"/>
-          </a:lnRef>
-          <a:fillRef idx="3">
-            <a:schemeClr val="accent1"/>
-          </a:fillRef>
-          <a:effectRef idx="2">
-            <a:schemeClr val="accent1"/>
-          </a:effectRef>
-          <a:fontRef idx="minor">
-            <a:schemeClr val="lt1"/>
-          </a:fontRef>
-        </p:style>
-        <p:txBody>
-          <a:bodyPr rtlCol="0" anchor="ctr"/>
-          <a:lstStyle/>
-          <a:p>
-            <a:pPr algn="ctr"/>
-          </a:p>
-        </p:txBody>
-      </p:sp>
-      <p:sp>
-        <p:nvSpPr>
-          <p:cNvPr id="4" name="TextBox 3"/>
-          <p:cNvSpPr txBox="1"/>
-          <p:nvPr/>
-        </p:nvSpPr>
-        <p:spPr>
-          <a:xfrm>
-            <a:off x="457200" y="164592"/>
-            <a:ext cx="11277295" cy="384048"/>
-          </a:xfrm>
-          <a:prstGeom prst="rect">
-            <a:avLst/>
-          </a:prstGeom>
-          <a:noFill/>
-        </p:spPr>
-        <p:txBody>
-          <a:bodyPr wrap="square">
-            <a:spAutoFit/>
-          </a:bodyPr>
-          <a:lstStyle/>
-          <a:p>
-            <a:r>
-              <a:rPr sz="2600" b="1" i="0">
-                <a:solidFill>
-                  <a:srgbClr val="FFFFFF"/>
-                </a:solidFill>
-                <a:latin typeface="Calibri"/>
-              </a:rPr>
-              <a:t>Quiz rapido (cierre)</a:t>
-            </a:r>
-          </a:p>
-        </p:txBody>
-      </p:sp>
-      <p:sp>
-        <p:nvSpPr>
-          <p:cNvPr id="5" name="TextBox 4"/>
-          <p:cNvSpPr txBox="1"/>
-          <p:nvPr/>
-        </p:nvSpPr>
-        <p:spPr>
-          <a:xfrm>
-            <a:off x="457200" y="566928"/>
-            <a:ext cx="11277295" cy="411480"/>
-          </a:xfrm>
-          <a:prstGeom prst="rect">
-            <a:avLst/>
-          </a:prstGeom>
-          <a:noFill/>
-        </p:spPr>
-        <p:txBody>
-          <a:bodyPr wrap="square">
-            <a:spAutoFit/>
-          </a:bodyPr>
-          <a:lstStyle/>
-          <a:p>
-            <a:r>
-              <a:rPr sz="1400" b="0" i="0">
-                <a:solidFill>
-                  <a:srgbClr val="B8D8EE"/>
-                </a:solidFill>
-                <a:latin typeface="Calibri"/>
-              </a:rPr>
-              <a:t>Individual · 8–10 min</a:t>
-            </a:r>
-          </a:p>
-        </p:txBody>
-      </p:sp>
-      <p:sp>
-        <p:nvSpPr>
-          <p:cNvPr id="6" name="TextBox 5"/>
-          <p:cNvSpPr txBox="1"/>
-          <p:nvPr/>
-        </p:nvSpPr>
-        <p:spPr>
-          <a:xfrm>
-            <a:off x="457200" y="1380744"/>
-            <a:ext cx="11277295" cy="5020056"/>
-          </a:xfrm>
-          <a:prstGeom prst="rect">
-            <a:avLst/>
-          </a:prstGeom>
-          <a:noFill/>
-        </p:spPr>
-        <p:txBody>
-          <a:bodyPr wrap="square">
-            <a:spAutoFit/>
-          </a:bodyPr>
-          <a:lstStyle/>
-          <a:p>
-            <a:pPr>
-              <a:spcAft>
-                <a:spcPts val="800"/>
-              </a:spcAft>
-            </a:pPr>
-            <a:r>
-              <a:rPr sz="1200" b="1" i="0">
-                <a:solidFill>
-                  <a:srgbClr val="333333"/>
-                </a:solidFill>
-                <a:latin typeface="Calibri"/>
-              </a:rPr>
-              <a:t>1.</a:t>
-            </a:r>
-            <a:r>
-              <a:rPr sz="1200" b="0" i="0">
-                <a:solidFill>
-                  <a:srgbClr val="333333"/>
-                </a:solidFill>
-                <a:latin typeface="Calibri"/>
-              </a:rPr>
-              <a:t> En el modelo VetCare, ¿qué diferencia PK de FK?</a:t>
-            </a:r>
-          </a:p>
-          <a:p>
-            <a:pPr>
-              <a:spcAft>
-                <a:spcPts val="800"/>
-              </a:spcAft>
-            </a:pPr>
-            <a:r>
-              <a:rPr sz="1200" b="0" i="0">
-                <a:solidFill>
-                  <a:srgbClr val="333333"/>
-                </a:solidFill>
-                <a:latin typeface="Calibri"/>
-              </a:rPr>
-              <a:t>–   ('A) No hay diferencia', 1)</a:t>
-            </a:r>
-          </a:p>
-          <a:p>
-            <a:pPr>
-              <a:spcAft>
-                <a:spcPts val="800"/>
-              </a:spcAft>
-            </a:pPr>
-            <a:r>
-              <a:rPr sz="1200" b="0" i="0">
-                <a:solidFill>
-                  <a:srgbClr val="333333"/>
-                </a:solidFill>
-                <a:latin typeface="Calibri"/>
-              </a:rPr>
-              <a:t>–   ('B) PK identifica la fila; FK referencia otra PK', 1)</a:t>
-            </a:r>
-          </a:p>
-          <a:p>
-            <a:pPr>
-              <a:spcAft>
-                <a:spcPts val="800"/>
-              </a:spcAft>
-            </a:pPr>
-            <a:r>
-              <a:rPr sz="1200" b="0" i="0">
-                <a:solidFill>
-                  <a:srgbClr val="333333"/>
-                </a:solidFill>
-                <a:latin typeface="Calibri"/>
-              </a:rPr>
-              <a:t>–   ('C) FK solo sirve para índices', 1)</a:t>
-            </a:r>
-          </a:p>
-          <a:p>
-            <a:pPr>
-              <a:spcAft>
-                <a:spcPts val="800"/>
-              </a:spcAft>
-            </a:pPr>
-            <a:r>
-              <a:rPr sz="1200" b="0" i="0">
-                <a:solidFill>
-                  <a:srgbClr val="333333"/>
-                </a:solidFill>
-                <a:latin typeface="Calibri"/>
-              </a:rPr>
-              <a:t>–   ('D) PK es solo texto', 1)</a:t>
-            </a:r>
-          </a:p>
-          <a:p>
-            <a:pPr>
-              <a:spcAft>
-                <a:spcPts val="800"/>
-              </a:spcAft>
-            </a:pPr>
-            <a:r>
-              <a:rPr sz="1200" b="0" i="0">
-                <a:solidFill>
-                  <a:srgbClr val="333333"/>
-                </a:solidFill>
-                <a:latin typeface="Calibri"/>
-              </a:rPr>
-              <a:t>–   </a:t>
-            </a:r>
-            <a:r>
-              <a:rPr sz="1200" b="1" i="0">
-                <a:solidFill>
-                  <a:srgbClr val="333333"/>
-                </a:solidFill>
-                <a:latin typeface="Calibri"/>
-              </a:rPr>
-              <a:t>2.</a:t>
-            </a:r>
-            <a:r>
-              <a:rPr sz="1200" b="0" i="0">
-                <a:solidFill>
-                  <a:srgbClr val="333333"/>
-                </a:solidFill>
-                <a:latin typeface="Calibri"/>
-              </a:rPr>
-              <a:t> ¿Cuáles son entidades mínimas típicas del PI VetCare?</a:t>
-            </a:r>
-          </a:p>
-          <a:p>
-            <a:pPr>
-              <a:spcAft>
-                <a:spcPts val="800"/>
-              </a:spcAft>
-            </a:pPr>
-            <a:r>
-              <a:rPr sz="1200" b="0" i="0">
-                <a:solidFill>
-                  <a:srgbClr val="333333"/>
-                </a:solidFill>
-                <a:latin typeface="Calibri"/>
-              </a:rPr>
-              <a:t>–   ('A) Solo Factura', 1)</a:t>
-            </a:r>
-          </a:p>
-          <a:p>
-            <a:pPr>
-              <a:spcAft>
-                <a:spcPts val="800"/>
-              </a:spcAft>
-            </a:pPr>
-            <a:r>
-              <a:rPr sz="1200" b="0" i="0">
-                <a:solidFill>
-                  <a:srgbClr val="333333"/>
-                </a:solidFill>
-                <a:latin typeface="Calibri"/>
-              </a:rPr>
-              <a:t>–   ('B) Dueño, Mascota, Cita (y relacionadas)', 1)</a:t>
-            </a:r>
-          </a:p>
-          <a:p>
-            <a:pPr>
-              <a:spcAft>
-                <a:spcPts val="800"/>
-              </a:spcAft>
-            </a:pPr>
-            <a:r>
-              <a:rPr sz="1200" b="0" i="0">
-                <a:solidFill>
-                  <a:srgbClr val="333333"/>
-                </a:solidFill>
-                <a:latin typeface="Calibri"/>
-              </a:rPr>
-              <a:t>–   ('C) Solo logs de servidor', 1)</a:t>
-            </a:r>
-          </a:p>
-          <a:p>
-            <a:pPr>
-              <a:spcAft>
-                <a:spcPts val="800"/>
-              </a:spcAft>
-            </a:pPr>
-            <a:r>
-              <a:rPr sz="1200" b="0" i="0">
-                <a:solidFill>
-                  <a:srgbClr val="333333"/>
-                </a:solidFill>
-                <a:latin typeface="Calibri"/>
-              </a:rPr>
-              <a:t>–   ('D) Solo usuarios LMS', 1)</a:t>
-            </a:r>
-          </a:p>
-          <a:p>
-            <a:pPr>
-              <a:spcAft>
-                <a:spcPts val="800"/>
-              </a:spcAft>
-            </a:pPr>
-            <a:r>
-              <a:rPr sz="1200" b="0" i="0">
-                <a:solidFill>
-                  <a:srgbClr val="333333"/>
-                </a:solidFill>
-                <a:latin typeface="Calibri"/>
-              </a:rPr>
-              <a:t>–   </a:t>
-            </a:r>
-            <a:r>
-              <a:rPr sz="1200" b="1" i="0">
-                <a:solidFill>
-                  <a:srgbClr val="333333"/>
-                </a:solidFill>
-                <a:latin typeface="Calibri"/>
-              </a:rPr>
-              <a:t>3.</a:t>
-            </a:r>
-            <a:r>
-              <a:rPr sz="1200" b="0" i="0">
-                <a:solidFill>
-                  <a:srgbClr val="333333"/>
-                </a:solidFill>
-                <a:latin typeface="Calibri"/>
-              </a:rPr>
-              <a:t> El ER del PI se entrega en draw.io (PNG/SVG) como evidencia visual, no solo como párrafo.</a:t>
-            </a:r>
-          </a:p>
-          <a:p>
-            <a:pPr>
-              <a:spcAft>
-                <a:spcPts val="800"/>
-              </a:spcAft>
-            </a:pPr>
-            <a:r>
-              <a:rPr sz="1200" b="0" i="0">
-                <a:solidFill>
-                  <a:srgbClr val="333333"/>
-                </a:solidFill>
-                <a:latin typeface="Calibri"/>
-              </a:rPr>
-              <a:t>–   ('( ) Verdadero    ( ) Falso', 1)</a:t>
-            </a:r>
-          </a:p>
-          <a:p>
-            <a:pPr>
-              <a:spcAft>
-                <a:spcPts val="800"/>
-              </a:spcAft>
-            </a:pPr>
-            <a:r>
-              <a:rPr sz="1200" b="0" i="0">
-                <a:solidFill>
-                  <a:srgbClr val="333333"/>
-                </a:solidFill>
-                <a:latin typeface="Calibri"/>
-              </a:rPr>
-              <a:t>–   </a:t>
-            </a:r>
-            <a:r>
-              <a:rPr sz="1200" b="1" i="0">
-                <a:solidFill>
-                  <a:srgbClr val="333333"/>
-                </a:solidFill>
-                <a:latin typeface="Calibri"/>
-              </a:rPr>
-              <a:t>4.</a:t>
-            </a:r>
-            <a:r>
-              <a:rPr sz="1200" b="0" i="0">
-                <a:solidFill>
-                  <a:srgbClr val="333333"/>
-                </a:solidFill>
-                <a:latin typeface="Calibri"/>
-              </a:rPr>
-              <a:t> Normalización 1–3FN se aplica en el PI solo donde aporta al modelo VetCare (no teoría aislada).</a:t>
-            </a:r>
-          </a:p>
-          <a:p>
-            <a:pPr>
-              <a:spcAft>
-                <a:spcPts val="800"/>
-              </a:spcAft>
-            </a:pPr>
-            <a:r>
-              <a:rPr sz="1200" b="0" i="0">
-                <a:solidFill>
-                  <a:srgbClr val="333333"/>
-                </a:solidFill>
-                <a:latin typeface="Calibri"/>
-              </a:rPr>
-              <a:t>–   ('( ) Verdadero    ( ) Falso', 1)</a:t>
-            </a:r>
-          </a:p>
-        </p:txBody>
-      </p:sp>
-      <p:sp>
-        <p:nvSpPr>
-          <p:cNvPr id="7" name="TextBox 6"/>
-          <p:cNvSpPr txBox="1"/>
-          <p:nvPr/>
-        </p:nvSpPr>
-        <p:spPr>
-          <a:xfrm>
-            <a:off x="11185855" y="6473952"/>
-            <a:ext cx="640080" cy="274320"/>
-          </a:xfrm>
-          <a:prstGeom prst="rect">
-            <a:avLst/>
-          </a:prstGeom>
-          <a:noFill/>
-        </p:spPr>
-        <p:txBody>
-          <a:bodyPr wrap="square">
-            <a:spAutoFit/>
-          </a:bodyPr>
-          <a:lstStyle/>
-          <a:p>
-            <a:pPr algn="r"/>
-            <a:r>
-              <a:rPr sz="1100" b="0" i="0">
-                <a:solidFill>
-                  <a:srgbClr val="666666"/>
-                </a:solidFill>
-                <a:latin typeface="Calibri"/>
-              </a:rPr>
-              <a:t>16</a:t>
-            </a:r>
-          </a:p>
-        </p:txBody>
-      </p:sp>
-    </p:spTree>
-  </p:cSld>
-  <p:clrMapOvr>
-    <a:masterClrMapping/>
-  </p:clrMapOvr>
-</p:sld>
-</file>
-
-<file path=ppt/slides/slide17.xml><?xml version="1.0" encoding="utf-8"?>
-<p:sld xmlns:a="http://schemas.openxmlformats.org/drawingml/2006/main" xmlns:p="http://schemas.openxmlformats.org/presentationml/2006/main" xmlns:r="http://schemas.openxmlformats.org/officeDocument/2006/relationships">
-  <p:cSld>
-    <p:bg>
-      <p:bgPr>
-        <a:solidFill>
-          <a:srgbClr val="FFFFFF"/>
-        </a:solidFill>
-        <a:effectLst/>
-      </p:bgPr>
-    </p:bg>
-    <p:spTree>
-      <p:nvGrpSpPr>
-        <p:cNvPr id="1" name=""/>
-        <p:cNvGrpSpPr/>
-        <p:nvPr/>
-      </p:nvGrpSpPr>
-      <p:grpSpPr/>
-      <p:sp>
-        <p:nvSpPr>
-          <p:cNvPr id="2" name="Rectangle 1"/>
-          <p:cNvSpPr/>
-          <p:nvPr/>
-        </p:nvSpPr>
-        <p:spPr>
-          <a:xfrm>
-            <a:off x="0" y="0"/>
-            <a:ext cx="12191695" cy="1170432"/>
-          </a:xfrm>
-          <a:prstGeom prst="rect">
-            <a:avLst/>
-          </a:prstGeom>
-          <a:solidFill>
-            <a:srgbClr val="095292"/>
-          </a:solidFill>
-          <a:ln>
-            <a:noFill/>
-          </a:ln>
-        </p:spPr>
-        <p:style>
-          <a:lnRef idx="1">
-            <a:schemeClr val="accent1"/>
-          </a:lnRef>
-          <a:fillRef idx="3">
-            <a:schemeClr val="accent1"/>
-          </a:fillRef>
-          <a:effectRef idx="2">
-            <a:schemeClr val="accent1"/>
-          </a:effectRef>
-          <a:fontRef idx="minor">
-            <a:schemeClr val="lt1"/>
-          </a:fontRef>
-        </p:style>
-        <p:txBody>
-          <a:bodyPr rtlCol="0" anchor="ctr"/>
-          <a:lstStyle/>
-          <a:p>
-            <a:pPr algn="ctr"/>
-          </a:p>
-        </p:txBody>
-      </p:sp>
-      <p:sp>
-        <p:nvSpPr>
-          <p:cNvPr id="3" name="Rectangle 2"/>
-          <p:cNvSpPr/>
-          <p:nvPr/>
-        </p:nvSpPr>
-        <p:spPr>
-          <a:xfrm>
-            <a:off x="0" y="1170432"/>
-            <a:ext cx="12191695" cy="41148"/>
-          </a:xfrm>
-          <a:prstGeom prst="rect">
-            <a:avLst/>
-          </a:prstGeom>
-          <a:solidFill>
-            <a:srgbClr val="FFD000"/>
-          </a:solidFill>
-          <a:ln>
-            <a:noFill/>
-          </a:ln>
-        </p:spPr>
-        <p:style>
-          <a:lnRef idx="1">
-            <a:schemeClr val="accent1"/>
-          </a:lnRef>
-          <a:fillRef idx="3">
-            <a:schemeClr val="accent1"/>
-          </a:fillRef>
-          <a:effectRef idx="2">
-            <a:schemeClr val="accent1"/>
-          </a:effectRef>
-          <a:fontRef idx="minor">
-            <a:schemeClr val="lt1"/>
-          </a:fontRef>
-        </p:style>
-        <p:txBody>
-          <a:bodyPr rtlCol="0" anchor="ctr"/>
-          <a:lstStyle/>
-          <a:p>
-            <a:pPr algn="ctr"/>
-          </a:p>
-        </p:txBody>
-      </p:sp>
-      <p:sp>
-        <p:nvSpPr>
-          <p:cNvPr id="4" name="TextBox 3"/>
-          <p:cNvSpPr txBox="1"/>
-          <p:nvPr/>
-        </p:nvSpPr>
-        <p:spPr>
-          <a:xfrm>
-            <a:off x="457200" y="164592"/>
-            <a:ext cx="11277295" cy="384048"/>
-          </a:xfrm>
-          <a:prstGeom prst="rect">
-            <a:avLst/>
-          </a:prstGeom>
-          <a:noFill/>
-        </p:spPr>
-        <p:txBody>
-          <a:bodyPr wrap="square">
-            <a:spAutoFit/>
-          </a:bodyPr>
-          <a:lstStyle/>
-          <a:p>
-            <a:r>
-              <a:rPr sz="2600" b="1" i="0">
-                <a:solidFill>
-                  <a:srgbClr val="FFFFFF"/>
-                </a:solidFill>
-                <a:latin typeface="Calibri"/>
-              </a:rPr>
-              <a:t>Quiz rapido (cierre) · cont. 2</a:t>
-            </a:r>
-          </a:p>
-        </p:txBody>
-      </p:sp>
-      <p:sp>
-        <p:nvSpPr>
-          <p:cNvPr id="5" name="TextBox 4"/>
-          <p:cNvSpPr txBox="1"/>
-          <p:nvPr/>
-        </p:nvSpPr>
-        <p:spPr>
-          <a:xfrm>
-            <a:off x="457200" y="566928"/>
-            <a:ext cx="11277295" cy="411480"/>
-          </a:xfrm>
-          <a:prstGeom prst="rect">
-            <a:avLst/>
-          </a:prstGeom>
-          <a:noFill/>
-        </p:spPr>
-        <p:txBody>
-          <a:bodyPr wrap="square">
-            <a:spAutoFit/>
-          </a:bodyPr>
-          <a:lstStyle/>
-          <a:p>
-            <a:r>
-              <a:rPr sz="1400" b="0" i="0">
-                <a:solidFill>
-                  <a:srgbClr val="B8D8EE"/>
-                </a:solidFill>
-                <a:latin typeface="Calibri"/>
-              </a:rPr>
-              <a:t>Individual · 8–10 min</a:t>
-            </a:r>
-          </a:p>
-        </p:txBody>
-      </p:sp>
-      <p:sp>
-        <p:nvSpPr>
-          <p:cNvPr id="6" name="TextBox 5"/>
-          <p:cNvSpPr txBox="1"/>
-          <p:nvPr/>
-        </p:nvSpPr>
-        <p:spPr>
-          <a:xfrm>
-            <a:off x="457200" y="1380744"/>
-            <a:ext cx="11277295" cy="5020056"/>
-          </a:xfrm>
-          <a:prstGeom prst="rect">
-            <a:avLst/>
-          </a:prstGeom>
-          <a:noFill/>
-        </p:spPr>
-        <p:txBody>
-          <a:bodyPr wrap="square">
-            <a:spAutoFit/>
-          </a:bodyPr>
-          <a:lstStyle/>
-          <a:p>
-            <a:pPr>
-              <a:spcAft>
-                <a:spcPts val="800"/>
-              </a:spcAft>
-            </a:pPr>
-            <a:r>
-              <a:rPr sz="1200" b="0" i="0">
-                <a:solidFill>
-                  <a:srgbClr val="333333"/>
-                </a:solidFill>
-                <a:latin typeface="Calibri"/>
-              </a:rPr>
-              <a:t>–   </a:t>
-            </a:r>
-            <a:r>
-              <a:rPr sz="1200" b="1" i="0">
-                <a:solidFill>
-                  <a:srgbClr val="333333"/>
-                </a:solidFill>
-                <a:latin typeface="Calibri"/>
-              </a:rPr>
-              <a:t>5.</a:t>
-            </a:r>
-            <a:r>
-              <a:rPr sz="1200" b="0" i="0">
-                <a:solidFill>
-                  <a:srgbClr val="333333"/>
-                </a:solidFill>
-                <a:latin typeface="Calibri"/>
-              </a:rPr>
-              <a:t> Regla de negocio típica VetCare:</a:t>
-            </a:r>
-          </a:p>
-          <a:p>
-            <a:pPr>
-              <a:spcAft>
-                <a:spcPts val="800"/>
-              </a:spcAft>
-            </a:pPr>
-            <a:r>
-              <a:rPr sz="1200" b="0" i="0">
-                <a:solidFill>
-                  <a:srgbClr val="333333"/>
-                </a:solidFill>
-                <a:latin typeface="Calibri"/>
-              </a:rPr>
-              <a:t>–   ('A) Mascota inactiva puede agendar sin control', 1)</a:t>
-            </a:r>
-          </a:p>
-          <a:p>
-            <a:pPr>
-              <a:spcAft>
-                <a:spcPts val="800"/>
-              </a:spcAft>
-            </a:pPr>
-            <a:r>
-              <a:rPr sz="1200" b="0" i="0">
-                <a:solidFill>
-                  <a:srgbClr val="333333"/>
-                </a:solidFill>
-                <a:latin typeface="Calibri"/>
-              </a:rPr>
-              <a:t>–   ('B) Stock puede ser negativo sin auditar', 1)</a:t>
-            </a:r>
-          </a:p>
-          <a:p>
-            <a:pPr>
-              <a:spcAft>
-                <a:spcPts val="800"/>
-              </a:spcAft>
-            </a:pPr>
-            <a:r>
-              <a:rPr sz="1200" b="0" i="0">
-                <a:solidFill>
-                  <a:srgbClr val="333333"/>
-                </a:solidFill>
-                <a:latin typeface="Calibri"/>
-              </a:rPr>
-              <a:t>–   ('C) Mascota inactiva no agenda; stock ≥ 0; auditoría sensible', 1)</a:t>
-            </a:r>
-          </a:p>
-          <a:p>
-            <a:pPr>
-              <a:spcAft>
-                <a:spcPts val="800"/>
-              </a:spcAft>
-            </a:pPr>
-            <a:r>
-              <a:rPr sz="1200" b="0" i="0">
-                <a:solidFill>
-                  <a:srgbClr val="333333"/>
-                </a:solidFill>
-                <a:latin typeface="Calibri"/>
-              </a:rPr>
-              <a:t>–   ('D) Sin reglas', 1)</a:t>
-            </a:r>
-          </a:p>
-          <a:p>
-            <a:pPr>
-              <a:spcAft>
-                <a:spcPts val="800"/>
-              </a:spcAft>
-            </a:pPr>
-            <a:r>
-              <a:rPr sz="1200" b="0" i="0">
-                <a:solidFill>
-                  <a:srgbClr val="333333"/>
-                </a:solidFill>
-                <a:latin typeface="Calibri"/>
-              </a:rPr>
-              <a:t>–   </a:t>
-            </a:r>
-            <a:r>
-              <a:rPr sz="1200" b="1" i="0">
-                <a:solidFill>
-                  <a:srgbClr val="333333"/>
-                </a:solidFill>
-                <a:latin typeface="Calibri"/>
-              </a:rPr>
-              <a:t>6.</a:t>
-            </a:r>
-            <a:r>
-              <a:rPr sz="1200" b="0" i="0">
-                <a:solidFill>
-                  <a:srgbClr val="333333"/>
-                </a:solidFill>
-                <a:latin typeface="Calibri"/>
-              </a:rPr>
-              <a:t> El diagnóstico de Clase 1 evalúa logística del Campus Virtual, no saberes previos de BD I.</a:t>
-            </a:r>
-          </a:p>
-          <a:p>
-            <a:pPr>
-              <a:spcAft>
-                <a:spcPts val="800"/>
-              </a:spcAft>
-            </a:pPr>
-            <a:r>
-              <a:rPr sz="1200" b="0" i="0">
-                <a:solidFill>
-                  <a:srgbClr val="333333"/>
-                </a:solidFill>
-                <a:latin typeface="Calibri"/>
-              </a:rPr>
-              <a:t>–   ('( ) Verdadero    ( ) Falso', 1)</a:t>
-            </a:r>
-          </a:p>
-          <a:p>
-            <a:pPr>
-              <a:spcAft>
-                <a:spcPts val="800"/>
-              </a:spcAft>
-            </a:pPr>
-            <a:r>
-              <a:rPr sz="1200" b="0" i="0">
-                <a:solidFill>
-                  <a:srgbClr val="333333"/>
-                </a:solidFill>
-                <a:latin typeface="Calibri"/>
-              </a:rPr>
-              <a:t>–   </a:t>
-            </a:r>
-            <a:r>
-              <a:rPr sz="1200" b="1" i="0">
-                <a:solidFill>
-                  <a:srgbClr val="333333"/>
-                </a:solidFill>
-                <a:latin typeface="Calibri"/>
-              </a:rPr>
-              <a:t>7.</a:t>
-            </a:r>
-            <a:r>
-              <a:rPr sz="1200" b="0" i="0">
-                <a:solidFill>
-                  <a:srgbClr val="333333"/>
-                </a:solidFill>
-                <a:latin typeface="Calibri"/>
-              </a:rPr>
-              <a:t> Nombre 3 entidades de su ER VetCare y una FK entre dos de ellas.</a:t>
-            </a:r>
-          </a:p>
-          <a:p>
-            <a:pPr>
-              <a:spcAft>
-                <a:spcPts val="800"/>
-              </a:spcAft>
-            </a:pPr>
-            <a:r>
-              <a:rPr sz="1200" b="0" i="0">
-                <a:solidFill>
-                  <a:srgbClr val="333333"/>
-                </a:solidFill>
-                <a:latin typeface="Calibri"/>
-              </a:rPr>
-              <a:t>–   ('Respuesta corta: ____________________________', 1)</a:t>
-            </a:r>
-          </a:p>
-          <a:p>
-            <a:pPr>
-              <a:spcAft>
-                <a:spcPts val="800"/>
-              </a:spcAft>
-            </a:pPr>
-            <a:r>
-              <a:rPr sz="1200" b="0" i="0">
-                <a:solidFill>
-                  <a:srgbClr val="333333"/>
-                </a:solidFill>
-                <a:latin typeface="Calibri"/>
-              </a:rPr>
-              <a:t>–   </a:t>
-            </a:r>
-            <a:r>
-              <a:rPr sz="1200" b="1" i="0">
-                <a:solidFill>
-                  <a:srgbClr val="333333"/>
-                </a:solidFill>
-                <a:latin typeface="Calibri"/>
-              </a:rPr>
-              <a:t>8.</a:t>
-            </a:r>
-            <a:r>
-              <a:rPr sz="1200" b="0" i="0">
-                <a:solidFill>
-                  <a:srgbClr val="333333"/>
-                </a:solidFill>
-                <a:latin typeface="Calibri"/>
-              </a:rPr>
-              <a:t> Escriba en una frase el alcance SI / NO de su PI esta semana.</a:t>
-            </a:r>
-          </a:p>
-          <a:p>
-            <a:pPr>
-              <a:spcAft>
-                <a:spcPts val="800"/>
-              </a:spcAft>
-            </a:pPr>
-            <a:r>
-              <a:rPr sz="1200" b="0" i="0">
-                <a:solidFill>
-                  <a:srgbClr val="333333"/>
-                </a:solidFill>
-                <a:latin typeface="Calibri"/>
-              </a:rPr>
-              <a:t>–   ('Respuesta corta: ____________________________', 1)</a:t>
-            </a:r>
-          </a:p>
-        </p:txBody>
-      </p:sp>
-      <p:sp>
-        <p:nvSpPr>
-          <p:cNvPr id="7" name="TextBox 6"/>
-          <p:cNvSpPr txBox="1"/>
-          <p:nvPr/>
-        </p:nvSpPr>
-        <p:spPr>
-          <a:xfrm>
-            <a:off x="11185855" y="6473952"/>
-            <a:ext cx="640080" cy="274320"/>
-          </a:xfrm>
-          <a:prstGeom prst="rect">
-            <a:avLst/>
-          </a:prstGeom>
-          <a:noFill/>
-        </p:spPr>
-        <p:txBody>
-          <a:bodyPr wrap="square">
-            <a:spAutoFit/>
-          </a:bodyPr>
-          <a:lstStyle/>
-          <a:p>
-            <a:pPr algn="r"/>
-            <a:r>
-              <a:rPr sz="1100" b="0" i="0">
-                <a:solidFill>
-                  <a:srgbClr val="666666"/>
-                </a:solidFill>
-                <a:latin typeface="Calibri"/>
-              </a:rPr>
-              <a:t>17</a:t>
-            </a:r>
-          </a:p>
-        </p:txBody>
-      </p:sp>
-    </p:spTree>
-  </p:cSld>
-  <p:clrMapOvr>
-    <a:masterClrMapping/>
-  </p:clrMapOvr>
-</p:sld>
-</file>
-
-<file path=ppt/slides/slide18.xml><?xml version="1.0" encoding="utf-8"?>
-<p:sld xmlns:a="http://schemas.openxmlformats.org/drawingml/2006/main" xmlns:p="http://schemas.openxmlformats.org/presentationml/2006/main" xmlns:r="http://schemas.openxmlformats.org/officeDocument/2006/relationships">
-  <p:cSld>
-    <p:bg>
-      <p:bgPr>
-        <a:solidFill>
-          <a:srgbClr val="FFFFFF"/>
-        </a:solidFill>
-        <a:effectLst/>
-      </p:bgPr>
-    </p:bg>
-    <p:spTree>
-      <p:nvGrpSpPr>
-        <p:cNvPr id="1" name=""/>
-        <p:cNvGrpSpPr/>
-        <p:nvPr/>
-      </p:nvGrpSpPr>
-      <p:grpSpPr/>
-      <p:sp>
-        <p:nvSpPr>
-          <p:cNvPr id="2" name="Rectangle 1"/>
-          <p:cNvSpPr/>
-          <p:nvPr/>
-        </p:nvSpPr>
-        <p:spPr>
-          <a:xfrm>
-            <a:off x="0" y="0"/>
             <a:ext cx="12191695" cy="164592"/>
           </a:xfrm>
           <a:prstGeom prst="rect">
@@ -8892,7 +7879,7 @@
                 </a:solidFill>
                 <a:latin typeface="Calibri"/>
               </a:rPr>
-              <a:t>Criterios · quiz/cierre · duda PI</a:t>
+              <a:t>Criterios de exito · cierre · dudas del PI</a:t>
             </a:r>
           </a:p>
         </p:txBody>

--- a/Bases de Datos II/Clases/Clase 1 - Revision BD I y arranque VetCare/Presentacion.pptx
+++ b/Bases de Datos II/Clases/Clase 1 - Revision BD I y arranque VetCare/Presentacion.pptx
@@ -5881,7 +5881,7 @@
                 </a:solidFill>
                 <a:latin typeface="Calibri"/>
               </a:rPr>
-              <a:t> (Talleres) — domingo 23:59 cuando aplique taller.</a:t>
+              <a:t> (https://examlab.lovable.app/) — domingo 23:59 cuando aplique taller.</a:t>
             </a:r>
           </a:p>
         </p:txBody>
@@ -6476,7 +6476,7 @@
                 </a:solidFill>
                 <a:latin typeface="Calibri"/>
               </a:rPr>
-              <a:t>Taller de la semana en ExamLab: domingo 23:59 (regla del Acuerdo) cuando aplique.</a:t>
+              <a:t>Taller de la semana en ExamLab (https://examlab.lovable.app/): domingo 23:59 (regla del Acuerdo) cuando aplique.</a:t>
             </a:r>
           </a:p>
         </p:txBody>

--- a/Bases de Datos II/Clases/Clase 1 - Revision BD I y arranque VetCare/Presentacion.pptx
+++ b/Bases de Datos II/Clases/Clase 1 - Revision BD I y arranque VetCare/Presentacion.pptx
@@ -8217,22 +8217,6 @@
                 <a:latin typeface="Calibri"/>
               </a:rPr>
               <a:t>–   Dominio VetCare y sus relaciones: Dueno 1-N Mascota, Mascota 1-N Cita, Veterinario 1-N Cita, Consulta 1-1…</a:t>
-            </a:r>
-          </a:p>
-          <a:p>
-            <a:pPr>
-              <a:spcAft>
-                <a:spcPts val="800"/>
-              </a:spcAft>
-            </a:pPr>
-            <a:r>
-              <a:rPr sz="1500" b="0" i="0">
-                <a:solidFill>
-                  <a:srgbClr val="333333"/>
-                </a:solidFill>
-                <a:latin typeface="Calibri"/>
-              </a:rPr>
-              <a:t>–   Reglas de negocio del PI que ya anticipan clases futuras: mascota inactiva no puede tener cita nueva (se…</a:t>
             </a:r>
           </a:p>
         </p:txBody>

--- a/Bases de Datos II/Clases/Clase 1 - Revision BD I y arranque VetCare/Presentacion.pptx
+++ b/Bases de Datos II/Clases/Clase 1 - Revision BD I y arranque VetCare/Presentacion.pptx
@@ -3712,7 +3712,7 @@
                 </a:solidFill>
                 <a:latin typeface="Calibri"/>
               </a:rPr>
-              <a:t> Equipo 2-3 nombrado.</a:t>
+              <a:t> Proyecto nombrado y registrado.</a:t>
             </a:r>
           </a:p>
           <a:p>
@@ -4436,7 +4436,7 @@
                 </a:solidFill>
                 <a:latin typeface="Calibri"/>
               </a:rPr>
-              <a:t>Formar equipo (2-3) y nombrar el proyecto VetCare DB.</a:t>
+              <a:t>Nombrar y registrar su proyecto VetCare DB (trabajo individual por defecto; equipo de 2-3 solo si el docente lo autoriza).</a:t>
             </a:r>
           </a:p>
         </p:txBody>
@@ -5815,7 +5815,7 @@
                 </a:solidFill>
                 <a:latin typeface="Calibri"/>
               </a:rPr>
-              <a:t> Ficha de equipo + ER borrador (PNG) + lista de entidades/reglas</a:t>
+              <a:t> Ficha del proyecto + ER borrador (PNG) + lista de entidades/reglas</a:t>
             </a:r>
           </a:p>
           <a:p>
@@ -5831,7 +5831,7 @@
                 </a:solidFill>
                 <a:latin typeface="Calibri"/>
               </a:rPr>
-              <a:t>–   Evidencia en playground (enlace) o archivo SQL/PNG del equipo.</a:t>
+              <a:t>–   Evidencia en playground (enlace) o archivo SQL/PNG propio.</a:t>
             </a:r>
           </a:p>
           <a:p>
@@ -6692,7 +6692,7 @@
                 </a:solidFill>
                 <a:latin typeface="Calibri"/>
               </a:rPr>
-              <a:t>Entregable: Ficha de equipo + ER borrador (PNG) + lista de entidades/reglas</a:t>
+              <a:t>Entregable: Ficha del proyecto + ER borrador (PNG) + lista de entidades/reglas</a:t>
             </a:r>
           </a:p>
           <a:p>
@@ -7032,7 +7032,7 @@
                 </a:solidFill>
                 <a:latin typeface="Calibri"/>
               </a:rPr>
-              <a:t> Ficha de equipo + ER borrador (PNG) + lista de entidades/reglas</a:t>
+              <a:t> Ficha del proyecto + ER borrador (PNG) + lista de entidades/reglas</a:t>
             </a:r>
           </a:p>
           <a:p>
@@ -7080,7 +7080,7 @@
                 </a:solidFill>
                 <a:latin typeface="Calibri"/>
               </a:rPr>
-              <a:t>–   Al salir: avance concreto en el paquete VetCare del equipo.</a:t>
+              <a:t>–   Al salir: avance concreto en su paquete VetCare.</a:t>
             </a:r>
           </a:p>
         </p:txBody>
@@ -9694,7 +9694,7 @@
                 </a:solidFill>
                 <a:latin typeface="Calibri"/>
               </a:rPr>
-              <a:t>–   Al final de la demo: dejar enlace/script compartible al equipo.</a:t>
+              <a:t>–   Al final de la demo: dejar enlace/script compartible al grupo.</a:t>
             </a:r>
           </a:p>
         </p:txBody>
@@ -10725,7 +10725,7 @@
                 </a:solidFill>
                 <a:latin typeface="Calibri"/>
               </a:rPr>
-              <a:t>Ficha equipo</a:t>
+              <a:t>Ficha del PI</a:t>
             </a:r>
           </a:p>
         </p:txBody>
@@ -10979,7 +10979,7 @@
                 </a:solidFill>
                 <a:latin typeface="Calibri"/>
               </a:rPr>
-              <a:t>–   Hoy cierran dominio + entidades mínimas + reglas de negocio del equipo.</a:t>
+              <a:t>–   Hoy cierras dominio + entidades mínimas + reglas de negocio propias.</a:t>
             </a:r>
           </a:p>
           <a:p>
@@ -10995,7 +10995,7 @@
                 </a:solidFill>
                 <a:latin typeface="Calibri"/>
               </a:rPr>
-              <a:t>–   El DDL demo (Codigo/) es semilla; el ER del equipo manda.</a:t>
+              <a:t>–   El DDL demo (Codigo/) es semilla; tu ER manda.</a:t>
             </a:r>
           </a:p>
         </p:txBody>

--- a/Bases de Datos II/Clases/Clase 1 - Revision BD I y arranque VetCare/Presentacion.pptx
+++ b/Bases de Datos II/Clases/Clase 1 - Revision BD I y arranque VetCare/Presentacion.pptx
@@ -5881,7 +5881,7 @@
                 </a:solidFill>
                 <a:latin typeface="Calibri"/>
               </a:rPr>
-              <a:t> (https://examlab.lovable.app/) — domingo 23:59 cuando aplique taller.</a:t>
+              <a:t> (https://uniaj.examlab.workers.dev/) — domingo 23:59 cuando aplique taller.</a:t>
             </a:r>
           </a:p>
         </p:txBody>
@@ -6476,7 +6476,7 @@
                 </a:solidFill>
                 <a:latin typeface="Calibri"/>
               </a:rPr>
-              <a:t>Taller de la semana en ExamLab (https://examlab.lovable.app/): domingo 23:59 (regla del Acuerdo) cuando aplique.</a:t>
+              <a:t>Taller de la semana en ExamLab (https://uniaj.examlab.workers.dev/): domingo 23:59 (regla del Acuerdo) cuando aplique.</a:t>
             </a:r>
           </a:p>
         </p:txBody>

--- a/Bases de Datos II/Clases/Clase 1 - Revision BD I y arranque VetCare/Presentacion.pptx
+++ b/Bases de Datos II/Clases/Clase 1 - Revision BD I y arranque VetCare/Presentacion.pptx
@@ -21,6 +21,7 @@
     <p:sldId id="269" r:id="rId20"/>
     <p:sldId id="270" r:id="rId21"/>
     <p:sldId id="271" r:id="rId22"/>
+    <p:sldId id="272" r:id="rId23"/>
   </p:sldIdLst>
   <p:sldSz cx="12191695" cy="6858000" type="screen4x3"/>
   <p:notesSz cx="6858000" cy="9144000"/>
@@ -3621,7 +3622,7 @@
                 </a:solidFill>
                 <a:latin typeface="Calibri"/>
               </a:rPr>
-              <a:t>Taller PI VetCare — objetivo y criterios</a:t>
+              <a:t>Taller PI VetCare — contexto / por que importa</a:t>
             </a:r>
           </a:p>
         </p:txBody>
@@ -3654,7 +3655,7 @@
               </a:spcAft>
             </a:pPr>
             <a:r>
-              <a:rPr sz="1500" b="0" i="0">
+              <a:rPr sz="1600" b="0" i="0">
                 <a:solidFill>
                   <a:srgbClr val="333333"/>
                 </a:solidFill>
@@ -3663,22 +3664,22 @@
               <a:t>–   </a:t>
             </a:r>
             <a:r>
-              <a:rPr sz="1500" b="1" i="0">
+              <a:rPr sz="1600" b="1" i="0">
                 <a:solidFill>
                   <a:srgbClr val="333333"/>
                 </a:solidFill>
                 <a:latin typeface="Calibri"/>
               </a:rPr>
-              <a:t>Objetivo:</a:t>
-            </a:r>
-            <a:r>
-              <a:rPr sz="1500" b="0" i="0">
+              <a:t>Por qué importa al PI VetCare:</a:t>
+            </a:r>
+            <a:r>
+              <a:rPr sz="1600" b="0" i="0">
                 <a:solidFill>
                   <a:srgbClr val="333333"/>
                 </a:solidFill>
                 <a:latin typeface="Calibri"/>
               </a:rPr>
-              <a:t> Arrancar VetCare: ficha + ER borrador + entidades/reglas.</a:t>
+              <a:t> sin ER/alcance no hay base para procs ni seguridad.</a:t>
             </a:r>
           </a:p>
           <a:p>
@@ -3688,31 +3689,13 @@
               </a:spcAft>
             </a:pPr>
             <a:r>
-              <a:rPr sz="1500" b="0" i="0">
+              <a:rPr sz="1600" b="0" i="0">
                 <a:solidFill>
                   <a:srgbClr val="333333"/>
                 </a:solidFill>
                 <a:latin typeface="Calibri"/>
               </a:rPr>
-              <a:t>–   </a:t>
-            </a:r>
-            <a:r>
-              <a:rPr sz="1500" b="1" i="0">
-                <a:solidFill>
-                  <a:srgbClr val="333333"/>
-                </a:solidFill>
-                <a:latin typeface="Calibri"/>
-              </a:rPr>
-              <a:t>Exito:</a:t>
-            </a:r>
-            <a:r>
-              <a:rPr sz="1500" b="0" i="0">
-                <a:solidFill>
-                  <a:srgbClr val="333333"/>
-                </a:solidFill>
-                <a:latin typeface="Calibri"/>
-              </a:rPr>
-              <a:t> Proyecto nombrado y registrado.</a:t>
+              <a:t>–   Hoy cierras dominio + entidades mínimas + reglas de negocio propias.</a:t>
             </a:r>
           </a:p>
           <a:p>
@@ -3722,133 +3705,13 @@
               </a:spcAft>
             </a:pPr>
             <a:r>
-              <a:rPr sz="1500" b="0" i="0">
+              <a:rPr sz="1600" b="0" i="0">
                 <a:solidFill>
                   <a:srgbClr val="333333"/>
                 </a:solidFill>
                 <a:latin typeface="Calibri"/>
               </a:rPr>
-              <a:t>–   </a:t>
-            </a:r>
-            <a:r>
-              <a:rPr sz="1500" b="1" i="0">
-                <a:solidFill>
-                  <a:srgbClr val="333333"/>
-                </a:solidFill>
-                <a:latin typeface="Calibri"/>
-              </a:rPr>
-              <a:t>Exito:</a:t>
-            </a:r>
-            <a:r>
-              <a:rPr sz="1500" b="0" i="0">
-                <a:solidFill>
-                  <a:srgbClr val="333333"/>
-                </a:solidFill>
-                <a:latin typeface="Calibri"/>
-              </a:rPr>
-              <a:t> ER PNG con entidades mínimas.</a:t>
-            </a:r>
-          </a:p>
-          <a:p>
-            <a:pPr>
-              <a:spcAft>
-                <a:spcPts val="800"/>
-              </a:spcAft>
-            </a:pPr>
-            <a:r>
-              <a:rPr sz="1500" b="0" i="0">
-                <a:solidFill>
-                  <a:srgbClr val="333333"/>
-                </a:solidFill>
-                <a:latin typeface="Calibri"/>
-              </a:rPr>
-              <a:t>–   </a:t>
-            </a:r>
-            <a:r>
-              <a:rPr sz="1500" b="1" i="0">
-                <a:solidFill>
-                  <a:srgbClr val="333333"/>
-                </a:solidFill>
-                <a:latin typeface="Calibri"/>
-              </a:rPr>
-              <a:t>Exito:</a:t>
-            </a:r>
-            <a:r>
-              <a:rPr sz="1500" b="0" i="0">
-                <a:solidFill>
-                  <a:srgbClr val="333333"/>
-                </a:solidFill>
-                <a:latin typeface="Calibri"/>
-              </a:rPr>
-              <a:t> 3 reglas de negocio propias.</a:t>
-            </a:r>
-          </a:p>
-          <a:p>
-            <a:pPr>
-              <a:spcAft>
-                <a:spcPts val="800"/>
-              </a:spcAft>
-            </a:pPr>
-            <a:r>
-              <a:rPr sz="1500" b="0" i="0">
-                <a:solidFill>
-                  <a:srgbClr val="333333"/>
-                </a:solidFill>
-                <a:latin typeface="Calibri"/>
-              </a:rPr>
-              <a:t>–   </a:t>
-            </a:r>
-            <a:r>
-              <a:rPr sz="1500" b="1" i="0">
-                <a:solidFill>
-                  <a:srgbClr val="333333"/>
-                </a:solidFill>
-                <a:latin typeface="Calibri"/>
-              </a:rPr>
-              <a:t>Exito:</a:t>
-            </a:r>
-            <a:r>
-              <a:rPr sz="1500" b="0" i="0">
-                <a:solidFill>
-                  <a:srgbClr val="333333"/>
-                </a:solidFill>
-                <a:latin typeface="Calibri"/>
-              </a:rPr>
-              <a:t> Alcance SI/NO 5-8 lineas.</a:t>
-            </a:r>
-          </a:p>
-          <a:p>
-            <a:pPr>
-              <a:spcAft>
-                <a:spcPts val="800"/>
-              </a:spcAft>
-            </a:pPr>
-            <a:r>
-              <a:rPr sz="1500" b="0" i="0">
-                <a:solidFill>
-                  <a:srgbClr val="333333"/>
-                </a:solidFill>
-                <a:latin typeface="Calibri"/>
-              </a:rPr>
-              <a:t>–   </a:t>
-            </a:r>
-            <a:r>
-              <a:rPr sz="1500" b="1" i="0">
-                <a:solidFill>
-                  <a:srgbClr val="333333"/>
-                </a:solidFill>
-                <a:latin typeface="Calibri"/>
-              </a:rPr>
-              <a:t>Exito:</a:t>
-            </a:r>
-            <a:r>
-              <a:rPr sz="1500" b="0" i="0">
-                <a:solidFill>
-                  <a:srgbClr val="333333"/>
-                </a:solidFill>
-                <a:latin typeface="Calibri"/>
-              </a:rPr>
-              <a:t> Entrega domingo 23:59.</a:t>
+              <a:t>–   El DDL demo (Codigo/) es semilla; tu ER manda.</a:t>
             </a:r>
           </a:p>
         </p:txBody>
@@ -4029,7 +3892,7 @@
                 </a:solidFill>
                 <a:latin typeface="Calibri"/>
               </a:rPr>
-              <a:t>Taller PI VetCare — escenario / datos de partida</a:t>
+              <a:t>Taller PI VetCare — objetivo y criterios</a:t>
             </a:r>
           </a:p>
         </p:txBody>
@@ -4062,13 +3925,31 @@
               </a:spcAft>
             </a:pPr>
             <a:r>
-              <a:rPr sz="1600" b="0" i="0">
+              <a:rPr sz="1500" b="0" i="0">
                 <a:solidFill>
                   <a:srgbClr val="333333"/>
                 </a:solidFill>
                 <a:latin typeface="Calibri"/>
               </a:rPr>
-              <a:t>–   Dominio: clínica veterinaria VetCare.</a:t>
+              <a:t>–   </a:t>
+            </a:r>
+            <a:r>
+              <a:rPr sz="1500" b="1" i="0">
+                <a:solidFill>
+                  <a:srgbClr val="333333"/>
+                </a:solidFill>
+                <a:latin typeface="Calibri"/>
+              </a:rPr>
+              <a:t>Objetivo:</a:t>
+            </a:r>
+            <a:r>
+              <a:rPr sz="1500" b="0" i="0">
+                <a:solidFill>
+                  <a:srgbClr val="333333"/>
+                </a:solidFill>
+                <a:latin typeface="Calibri"/>
+              </a:rPr>
+              <a:t> Arrancar VetCare: ficha + ER borrador + entidades/reglas.</a:t>
             </a:r>
           </a:p>
           <a:p>
@@ -4078,13 +3959,31 @@
               </a:spcAft>
             </a:pPr>
             <a:r>
-              <a:rPr sz="1600" b="0" i="0">
+              <a:rPr sz="1500" b="0" i="0">
                 <a:solidFill>
                   <a:srgbClr val="333333"/>
                 </a:solidFill>
                 <a:latin typeface="Calibri"/>
               </a:rPr>
-              <a:t>–   Herramientas: draw.io + DB Fiddle.</a:t>
+              <a:t>–   </a:t>
+            </a:r>
+            <a:r>
+              <a:rPr sz="1500" b="1" i="0">
+                <a:solidFill>
+                  <a:srgbClr val="333333"/>
+                </a:solidFill>
+                <a:latin typeface="Calibri"/>
+              </a:rPr>
+              <a:t>Exito:</a:t>
+            </a:r>
+            <a:r>
+              <a:rPr sz="1500" b="0" i="0">
+                <a:solidFill>
+                  <a:srgbClr val="333333"/>
+                </a:solidFill>
+                <a:latin typeface="Calibri"/>
+              </a:rPr>
+              <a:t> Proyecto nombrado y registrado.</a:t>
             </a:r>
           </a:p>
           <a:p>
@@ -4094,13 +3993,133 @@
               </a:spcAft>
             </a:pPr>
             <a:r>
-              <a:rPr sz="1600" b="0" i="0">
+              <a:rPr sz="1500" b="0" i="0">
                 <a:solidFill>
                   <a:srgbClr val="333333"/>
                 </a:solidFill>
                 <a:latin typeface="Calibri"/>
               </a:rPr>
-              <a:t>–   Reutilizar nombres del enunciado PI.</a:t>
+              <a:t>–   </a:t>
+            </a:r>
+            <a:r>
+              <a:rPr sz="1500" b="1" i="0">
+                <a:solidFill>
+                  <a:srgbClr val="333333"/>
+                </a:solidFill>
+                <a:latin typeface="Calibri"/>
+              </a:rPr>
+              <a:t>Exito:</a:t>
+            </a:r>
+            <a:r>
+              <a:rPr sz="1500" b="0" i="0">
+                <a:solidFill>
+                  <a:srgbClr val="333333"/>
+                </a:solidFill>
+                <a:latin typeface="Calibri"/>
+              </a:rPr>
+              <a:t> ER PNG con entidades mínimas.</a:t>
+            </a:r>
+          </a:p>
+          <a:p>
+            <a:pPr>
+              <a:spcAft>
+                <a:spcPts val="800"/>
+              </a:spcAft>
+            </a:pPr>
+            <a:r>
+              <a:rPr sz="1500" b="0" i="0">
+                <a:solidFill>
+                  <a:srgbClr val="333333"/>
+                </a:solidFill>
+                <a:latin typeface="Calibri"/>
+              </a:rPr>
+              <a:t>–   </a:t>
+            </a:r>
+            <a:r>
+              <a:rPr sz="1500" b="1" i="0">
+                <a:solidFill>
+                  <a:srgbClr val="333333"/>
+                </a:solidFill>
+                <a:latin typeface="Calibri"/>
+              </a:rPr>
+              <a:t>Exito:</a:t>
+            </a:r>
+            <a:r>
+              <a:rPr sz="1500" b="0" i="0">
+                <a:solidFill>
+                  <a:srgbClr val="333333"/>
+                </a:solidFill>
+                <a:latin typeface="Calibri"/>
+              </a:rPr>
+              <a:t> 3 reglas de negocio propias.</a:t>
+            </a:r>
+          </a:p>
+          <a:p>
+            <a:pPr>
+              <a:spcAft>
+                <a:spcPts val="800"/>
+              </a:spcAft>
+            </a:pPr>
+            <a:r>
+              <a:rPr sz="1500" b="0" i="0">
+                <a:solidFill>
+                  <a:srgbClr val="333333"/>
+                </a:solidFill>
+                <a:latin typeface="Calibri"/>
+              </a:rPr>
+              <a:t>–   </a:t>
+            </a:r>
+            <a:r>
+              <a:rPr sz="1500" b="1" i="0">
+                <a:solidFill>
+                  <a:srgbClr val="333333"/>
+                </a:solidFill>
+                <a:latin typeface="Calibri"/>
+              </a:rPr>
+              <a:t>Exito:</a:t>
+            </a:r>
+            <a:r>
+              <a:rPr sz="1500" b="0" i="0">
+                <a:solidFill>
+                  <a:srgbClr val="333333"/>
+                </a:solidFill>
+                <a:latin typeface="Calibri"/>
+              </a:rPr>
+              <a:t> Alcance SI/NO 5-8 lineas.</a:t>
+            </a:r>
+          </a:p>
+          <a:p>
+            <a:pPr>
+              <a:spcAft>
+                <a:spcPts val="800"/>
+              </a:spcAft>
+            </a:pPr>
+            <a:r>
+              <a:rPr sz="1500" b="0" i="0">
+                <a:solidFill>
+                  <a:srgbClr val="333333"/>
+                </a:solidFill>
+                <a:latin typeface="Calibri"/>
+              </a:rPr>
+              <a:t>–   </a:t>
+            </a:r>
+            <a:r>
+              <a:rPr sz="1500" b="1" i="0">
+                <a:solidFill>
+                  <a:srgbClr val="333333"/>
+                </a:solidFill>
+                <a:latin typeface="Calibri"/>
+              </a:rPr>
+              <a:t>Exito:</a:t>
+            </a:r>
+            <a:r>
+              <a:rPr sz="1500" b="0" i="0">
+                <a:solidFill>
+                  <a:srgbClr val="333333"/>
+                </a:solidFill>
+                <a:latin typeface="Calibri"/>
+              </a:rPr>
+              <a:t> Entrega domingo 23:59.</a:t>
             </a:r>
           </a:p>
         </p:txBody>
@@ -4281,111 +4300,21 @@
                 </a:solidFill>
                 <a:latin typeface="Calibri"/>
               </a:rPr>
-              <a:t>Taller PI VetCare — pasos guiados</a:t>
-            </a:r>
-          </a:p>
-        </p:txBody>
-      </p:sp>
-      <p:sp>
-        <p:nvSpPr>
-          <p:cNvPr id="5" name="Rounded Rectangle 4"/>
-          <p:cNvSpPr/>
-          <p:nvPr/>
-        </p:nvSpPr>
-        <p:spPr>
-          <a:xfrm>
-            <a:off x="457200" y="1234440"/>
-            <a:ext cx="11277295" cy="777240"/>
-          </a:xfrm>
-          <a:prstGeom prst="roundRect">
-            <a:avLst>
-              <a:gd name="adj" fmla="val 12000"/>
-            </a:avLst>
-          </a:prstGeom>
-          <a:solidFill>
-            <a:srgbClr val="F2F2F2"/>
-          </a:solidFill>
-          <a:ln>
-            <a:noFill/>
-          </a:ln>
-        </p:spPr>
-        <p:style>
-          <a:lnRef idx="1">
-            <a:schemeClr val="accent1"/>
-          </a:lnRef>
-          <a:fillRef idx="3">
-            <a:schemeClr val="accent1"/>
-          </a:fillRef>
-          <a:effectRef idx="2">
-            <a:schemeClr val="accent1"/>
-          </a:effectRef>
-          <a:fontRef idx="minor">
-            <a:schemeClr val="lt1"/>
-          </a:fontRef>
-        </p:style>
-        <p:txBody>
-          <a:bodyPr rtlCol="0" anchor="ctr"/>
-          <a:lstStyle/>
-          <a:p>
-            <a:pPr algn="ctr"/>
-          </a:p>
-        </p:txBody>
-      </p:sp>
-      <p:sp>
-        <p:nvSpPr>
-          <p:cNvPr id="6" name="Rounded Rectangle 5"/>
-          <p:cNvSpPr/>
-          <p:nvPr/>
-        </p:nvSpPr>
-        <p:spPr>
-          <a:xfrm>
-            <a:off x="594360" y="1403604"/>
-            <a:ext cx="438912" cy="438912"/>
-          </a:xfrm>
-          <a:prstGeom prst="roundRect">
-            <a:avLst>
-              <a:gd name="adj" fmla="val 12000"/>
-            </a:avLst>
-          </a:prstGeom>
-          <a:solidFill>
-            <a:srgbClr val="095292"/>
-          </a:solidFill>
-          <a:ln>
-            <a:noFill/>
-          </a:ln>
-        </p:spPr>
-        <p:style>
-          <a:lnRef idx="1">
-            <a:schemeClr val="accent1"/>
-          </a:lnRef>
-          <a:fillRef idx="3">
-            <a:schemeClr val="accent1"/>
-          </a:fillRef>
-          <a:effectRef idx="2">
-            <a:schemeClr val="accent1"/>
-          </a:effectRef>
-          <a:fontRef idx="minor">
-            <a:schemeClr val="lt1"/>
-          </a:fontRef>
-        </p:style>
-        <p:txBody>
-          <a:bodyPr rtlCol="0" anchor="ctr"/>
-          <a:lstStyle/>
-          <a:p>
-            <a:pPr algn="ctr"/>
-          </a:p>
-        </p:txBody>
-      </p:sp>
-      <p:sp>
-        <p:nvSpPr>
-          <p:cNvPr id="7" name="TextBox 6"/>
+              <a:t>Taller PI VetCare — escenario / datos de partida</a:t>
+            </a:r>
+          </a:p>
+        </p:txBody>
+      </p:sp>
+      <p:sp>
+        <p:nvSpPr>
+          <p:cNvPr id="5" name="TextBox 4"/>
           <p:cNvSpPr txBox="1"/>
           <p:nvPr/>
         </p:nvSpPr>
         <p:spPr>
           <a:xfrm>
-            <a:off x="594360" y="1403604"/>
-            <a:ext cx="438912" cy="438912"/>
+            <a:off x="457200" y="1170432"/>
+            <a:ext cx="11277295" cy="5230368"/>
           </a:xfrm>
           <a:prstGeom prst="rect">
             <a:avLst/>
@@ -4393,522 +4322,79 @@
           <a:noFill/>
         </p:spPr>
         <p:txBody>
-          <a:bodyPr wrap="square" anchor="ctr"/>
-          <a:lstStyle/>
-          <a:p>
-            <a:pPr algn="ctr"/>
-            <a:r>
-              <a:rPr sz="1600" b="1" i="0">
-                <a:solidFill>
-                  <a:srgbClr val="FFFFFF"/>
-                </a:solidFill>
-                <a:latin typeface="Calibri"/>
-              </a:rPr>
-              <a:t>1</a:t>
-            </a:r>
-          </a:p>
-        </p:txBody>
-      </p:sp>
-      <p:sp>
-        <p:nvSpPr>
-          <p:cNvPr id="8" name="TextBox 7"/>
-          <p:cNvSpPr txBox="1"/>
-          <p:nvPr/>
-        </p:nvSpPr>
-        <p:spPr>
-          <a:xfrm>
-            <a:off x="1188720" y="1325880"/>
-            <a:ext cx="10271455" cy="612647"/>
-          </a:xfrm>
-          <a:prstGeom prst="rect">
-            <a:avLst/>
-          </a:prstGeom>
-          <a:noFill/>
-        </p:spPr>
-        <p:txBody>
-          <a:bodyPr wrap="square" anchor="ctr"/>
-          <a:lstStyle/>
-          <a:p>
-            <a:r>
-              <a:rPr sz="1500" b="1" i="0">
-                <a:solidFill>
-                  <a:srgbClr val="095292"/>
-                </a:solidFill>
-                <a:latin typeface="Calibri"/>
-              </a:rPr>
-              <a:t>Nombrar y registrar su proyecto VetCare DB (trabajo individual por defecto; equipo de 2-3 solo si el docente lo autoriza).</a:t>
-            </a:r>
-          </a:p>
-        </p:txBody>
-      </p:sp>
-      <p:sp>
-        <p:nvSpPr>
-          <p:cNvPr id="9" name="Rounded Rectangle 8"/>
-          <p:cNvSpPr/>
-          <p:nvPr/>
-        </p:nvSpPr>
-        <p:spPr>
-          <a:xfrm>
-            <a:off x="457200" y="2103120"/>
-            <a:ext cx="11277295" cy="777240"/>
-          </a:xfrm>
-          <a:prstGeom prst="roundRect">
-            <a:avLst>
-              <a:gd name="adj" fmla="val 12000"/>
-            </a:avLst>
-          </a:prstGeom>
-          <a:solidFill>
-            <a:srgbClr val="E8F4FA"/>
-          </a:solidFill>
-          <a:ln>
-            <a:noFill/>
-          </a:ln>
-        </p:spPr>
-        <p:style>
-          <a:lnRef idx="1">
-            <a:schemeClr val="accent1"/>
-          </a:lnRef>
-          <a:fillRef idx="3">
-            <a:schemeClr val="accent1"/>
-          </a:fillRef>
-          <a:effectRef idx="2">
-            <a:schemeClr val="accent1"/>
-          </a:effectRef>
-          <a:fontRef idx="minor">
-            <a:schemeClr val="lt1"/>
-          </a:fontRef>
-        </p:style>
-        <p:txBody>
-          <a:bodyPr rtlCol="0" anchor="ctr"/>
-          <a:lstStyle/>
-          <a:p>
-            <a:pPr algn="ctr"/>
-          </a:p>
-        </p:txBody>
-      </p:sp>
-      <p:sp>
-        <p:nvSpPr>
-          <p:cNvPr id="10" name="Rounded Rectangle 9"/>
-          <p:cNvSpPr/>
-          <p:nvPr/>
-        </p:nvSpPr>
-        <p:spPr>
-          <a:xfrm>
-            <a:off x="594360" y="2272284"/>
-            <a:ext cx="438912" cy="438912"/>
-          </a:xfrm>
-          <a:prstGeom prst="roundRect">
-            <a:avLst>
-              <a:gd name="adj" fmla="val 12000"/>
-            </a:avLst>
-          </a:prstGeom>
-          <a:solidFill>
-            <a:srgbClr val="095292"/>
-          </a:solidFill>
-          <a:ln>
-            <a:noFill/>
-          </a:ln>
-        </p:spPr>
-        <p:style>
-          <a:lnRef idx="1">
-            <a:schemeClr val="accent1"/>
-          </a:lnRef>
-          <a:fillRef idx="3">
-            <a:schemeClr val="accent1"/>
-          </a:fillRef>
-          <a:effectRef idx="2">
-            <a:schemeClr val="accent1"/>
-          </a:effectRef>
-          <a:fontRef idx="minor">
-            <a:schemeClr val="lt1"/>
-          </a:fontRef>
-        </p:style>
-        <p:txBody>
-          <a:bodyPr rtlCol="0" anchor="ctr"/>
-          <a:lstStyle/>
-          <a:p>
-            <a:pPr algn="ctr"/>
-          </a:p>
-        </p:txBody>
-      </p:sp>
-      <p:sp>
-        <p:nvSpPr>
-          <p:cNvPr id="11" name="TextBox 10"/>
-          <p:cNvSpPr txBox="1"/>
-          <p:nvPr/>
-        </p:nvSpPr>
-        <p:spPr>
-          <a:xfrm>
-            <a:off x="594360" y="2272284"/>
-            <a:ext cx="438912" cy="438912"/>
-          </a:xfrm>
-          <a:prstGeom prst="rect">
-            <a:avLst/>
-          </a:prstGeom>
-          <a:noFill/>
-        </p:spPr>
-        <p:txBody>
-          <a:bodyPr wrap="square" anchor="ctr"/>
-          <a:lstStyle/>
-          <a:p>
-            <a:pPr algn="ctr"/>
-            <a:r>
-              <a:rPr sz="1600" b="1" i="0">
-                <a:solidFill>
-                  <a:srgbClr val="FFFFFF"/>
-                </a:solidFill>
-                <a:latin typeface="Calibri"/>
-              </a:rPr>
-              <a:t>2</a:t>
-            </a:r>
-          </a:p>
-        </p:txBody>
-      </p:sp>
-      <p:sp>
-        <p:nvSpPr>
-          <p:cNvPr id="12" name="TextBox 11"/>
-          <p:cNvSpPr txBox="1"/>
-          <p:nvPr/>
-        </p:nvSpPr>
-        <p:spPr>
-          <a:xfrm>
-            <a:off x="1188720" y="2194560"/>
-            <a:ext cx="10271455" cy="612647"/>
-          </a:xfrm>
-          <a:prstGeom prst="rect">
-            <a:avLst/>
-          </a:prstGeom>
-          <a:noFill/>
-        </p:spPr>
-        <p:txBody>
-          <a:bodyPr wrap="square" anchor="ctr"/>
-          <a:lstStyle/>
-          <a:p>
-            <a:r>
-              <a:rPr sz="1500" b="1" i="0">
-                <a:solidFill>
-                  <a:srgbClr val="095292"/>
-                </a:solidFill>
-                <a:latin typeface="Calibri"/>
-              </a:rPr>
-              <a:t>Listar entidades minimas + 3 reglas de negocio propias.</a:t>
-            </a:r>
-          </a:p>
-        </p:txBody>
-      </p:sp>
-      <p:sp>
-        <p:nvSpPr>
-          <p:cNvPr id="13" name="Rounded Rectangle 12"/>
-          <p:cNvSpPr/>
-          <p:nvPr/>
-        </p:nvSpPr>
-        <p:spPr>
-          <a:xfrm>
-            <a:off x="457200" y="2971800"/>
-            <a:ext cx="11277295" cy="777240"/>
-          </a:xfrm>
-          <a:prstGeom prst="roundRect">
-            <a:avLst>
-              <a:gd name="adj" fmla="val 12000"/>
-            </a:avLst>
-          </a:prstGeom>
-          <a:solidFill>
-            <a:srgbClr val="F2F2F2"/>
-          </a:solidFill>
-          <a:ln>
-            <a:noFill/>
-          </a:ln>
-        </p:spPr>
-        <p:style>
-          <a:lnRef idx="1">
-            <a:schemeClr val="accent1"/>
-          </a:lnRef>
-          <a:fillRef idx="3">
-            <a:schemeClr val="accent1"/>
-          </a:fillRef>
-          <a:effectRef idx="2">
-            <a:schemeClr val="accent1"/>
-          </a:effectRef>
-          <a:fontRef idx="minor">
-            <a:schemeClr val="lt1"/>
-          </a:fontRef>
-        </p:style>
-        <p:txBody>
-          <a:bodyPr rtlCol="0" anchor="ctr"/>
-          <a:lstStyle/>
-          <a:p>
-            <a:pPr algn="ctr"/>
-          </a:p>
-        </p:txBody>
-      </p:sp>
-      <p:sp>
-        <p:nvSpPr>
-          <p:cNvPr id="14" name="Rounded Rectangle 13"/>
-          <p:cNvSpPr/>
-          <p:nvPr/>
-        </p:nvSpPr>
-        <p:spPr>
-          <a:xfrm>
-            <a:off x="594360" y="3140964"/>
-            <a:ext cx="438912" cy="438912"/>
-          </a:xfrm>
-          <a:prstGeom prst="roundRect">
-            <a:avLst>
-              <a:gd name="adj" fmla="val 12000"/>
-            </a:avLst>
-          </a:prstGeom>
-          <a:solidFill>
-            <a:srgbClr val="095292"/>
-          </a:solidFill>
-          <a:ln>
-            <a:noFill/>
-          </a:ln>
-        </p:spPr>
-        <p:style>
-          <a:lnRef idx="1">
-            <a:schemeClr val="accent1"/>
-          </a:lnRef>
-          <a:fillRef idx="3">
-            <a:schemeClr val="accent1"/>
-          </a:fillRef>
-          <a:effectRef idx="2">
-            <a:schemeClr val="accent1"/>
-          </a:effectRef>
-          <a:fontRef idx="minor">
-            <a:schemeClr val="lt1"/>
-          </a:fontRef>
-        </p:style>
-        <p:txBody>
-          <a:bodyPr rtlCol="0" anchor="ctr"/>
-          <a:lstStyle/>
-          <a:p>
-            <a:pPr algn="ctr"/>
-          </a:p>
-        </p:txBody>
-      </p:sp>
-      <p:sp>
-        <p:nvSpPr>
-          <p:cNvPr id="15" name="TextBox 14"/>
-          <p:cNvSpPr txBox="1"/>
-          <p:nvPr/>
-        </p:nvSpPr>
-        <p:spPr>
-          <a:xfrm>
-            <a:off x="594360" y="3140964"/>
-            <a:ext cx="438912" cy="438912"/>
-          </a:xfrm>
-          <a:prstGeom prst="rect">
-            <a:avLst/>
-          </a:prstGeom>
-          <a:noFill/>
-        </p:spPr>
-        <p:txBody>
-          <a:bodyPr wrap="square" anchor="ctr"/>
-          <a:lstStyle/>
-          <a:p>
-            <a:pPr algn="ctr"/>
-            <a:r>
-              <a:rPr sz="1600" b="1" i="0">
-                <a:solidFill>
-                  <a:srgbClr val="FFFFFF"/>
-                </a:solidFill>
-                <a:latin typeface="Calibri"/>
-              </a:rPr>
-              <a:t>3</a:t>
-            </a:r>
-          </a:p>
-        </p:txBody>
-      </p:sp>
-      <p:sp>
-        <p:nvSpPr>
-          <p:cNvPr id="16" name="TextBox 15"/>
-          <p:cNvSpPr txBox="1"/>
-          <p:nvPr/>
-        </p:nvSpPr>
-        <p:spPr>
-          <a:xfrm>
-            <a:off x="1188720" y="3063240"/>
-            <a:ext cx="10271455" cy="612647"/>
-          </a:xfrm>
-          <a:prstGeom prst="rect">
-            <a:avLst/>
-          </a:prstGeom>
-          <a:noFill/>
-        </p:spPr>
-        <p:txBody>
-          <a:bodyPr wrap="square" anchor="ctr"/>
-          <a:lstStyle/>
-          <a:p>
-            <a:r>
-              <a:rPr sz="1500" b="1" i="0">
-                <a:solidFill>
-                  <a:srgbClr val="095292"/>
-                </a:solidFill>
-                <a:latin typeface="Calibri"/>
-              </a:rPr>
-              <a:t>Dibujar ER borrador en draw.io/Excalidraw y exportar PNG.</a:t>
-            </a:r>
-          </a:p>
-        </p:txBody>
-      </p:sp>
-      <p:sp>
-        <p:nvSpPr>
-          <p:cNvPr id="17" name="Rounded Rectangle 16"/>
-          <p:cNvSpPr/>
-          <p:nvPr/>
-        </p:nvSpPr>
-        <p:spPr>
-          <a:xfrm>
-            <a:off x="457200" y="3840479"/>
-            <a:ext cx="11277295" cy="777240"/>
-          </a:xfrm>
-          <a:prstGeom prst="roundRect">
-            <a:avLst>
-              <a:gd name="adj" fmla="val 12000"/>
-            </a:avLst>
-          </a:prstGeom>
-          <a:solidFill>
-            <a:srgbClr val="E8F4FA"/>
-          </a:solidFill>
-          <a:ln>
-            <a:noFill/>
-          </a:ln>
-        </p:spPr>
-        <p:style>
-          <a:lnRef idx="1">
-            <a:schemeClr val="accent1"/>
-          </a:lnRef>
-          <a:fillRef idx="3">
-            <a:schemeClr val="accent1"/>
-          </a:fillRef>
-          <a:effectRef idx="2">
-            <a:schemeClr val="accent1"/>
-          </a:effectRef>
-          <a:fontRef idx="minor">
-            <a:schemeClr val="lt1"/>
-          </a:fontRef>
-        </p:style>
-        <p:txBody>
-          <a:bodyPr rtlCol="0" anchor="ctr"/>
-          <a:lstStyle/>
-          <a:p>
-            <a:pPr algn="ctr"/>
-          </a:p>
-        </p:txBody>
-      </p:sp>
-      <p:sp>
-        <p:nvSpPr>
-          <p:cNvPr id="18" name="Rounded Rectangle 17"/>
-          <p:cNvSpPr/>
-          <p:nvPr/>
-        </p:nvSpPr>
-        <p:spPr>
-          <a:xfrm>
-            <a:off x="594360" y="4009643"/>
-            <a:ext cx="438912" cy="438912"/>
-          </a:xfrm>
-          <a:prstGeom prst="roundRect">
-            <a:avLst>
-              <a:gd name="adj" fmla="val 12000"/>
-            </a:avLst>
-          </a:prstGeom>
-          <a:solidFill>
-            <a:srgbClr val="095292"/>
-          </a:solidFill>
-          <a:ln>
-            <a:noFill/>
-          </a:ln>
-        </p:spPr>
-        <p:style>
-          <a:lnRef idx="1">
-            <a:schemeClr val="accent1"/>
-          </a:lnRef>
-          <a:fillRef idx="3">
-            <a:schemeClr val="accent1"/>
-          </a:fillRef>
-          <a:effectRef idx="2">
-            <a:schemeClr val="accent1"/>
-          </a:effectRef>
-          <a:fontRef idx="minor">
-            <a:schemeClr val="lt1"/>
-          </a:fontRef>
-        </p:style>
-        <p:txBody>
-          <a:bodyPr rtlCol="0" anchor="ctr"/>
-          <a:lstStyle/>
-          <a:p>
-            <a:pPr algn="ctr"/>
-          </a:p>
-        </p:txBody>
-      </p:sp>
-      <p:sp>
-        <p:nvSpPr>
-          <p:cNvPr id="19" name="TextBox 18"/>
-          <p:cNvSpPr txBox="1"/>
-          <p:nvPr/>
-        </p:nvSpPr>
-        <p:spPr>
-          <a:xfrm>
-            <a:off x="594360" y="4009643"/>
-            <a:ext cx="438912" cy="438912"/>
-          </a:xfrm>
-          <a:prstGeom prst="rect">
-            <a:avLst/>
-          </a:prstGeom>
-          <a:noFill/>
-        </p:spPr>
-        <p:txBody>
-          <a:bodyPr wrap="square" anchor="ctr"/>
-          <a:lstStyle/>
-          <a:p>
-            <a:pPr algn="ctr"/>
-            <a:r>
-              <a:rPr sz="1600" b="1" i="0">
-                <a:solidFill>
-                  <a:srgbClr val="FFFFFF"/>
-                </a:solidFill>
-                <a:latin typeface="Calibri"/>
-              </a:rPr>
-              <a:t>4</a:t>
-            </a:r>
-          </a:p>
-        </p:txBody>
-      </p:sp>
-      <p:sp>
-        <p:nvSpPr>
-          <p:cNvPr id="20" name="TextBox 19"/>
-          <p:cNvSpPr txBox="1"/>
-          <p:nvPr/>
-        </p:nvSpPr>
-        <p:spPr>
-          <a:xfrm>
-            <a:off x="1188720" y="3931919"/>
-            <a:ext cx="10271455" cy="612647"/>
-          </a:xfrm>
-          <a:prstGeom prst="rect">
-            <a:avLst/>
-          </a:prstGeom>
-          <a:noFill/>
-        </p:spPr>
-        <p:txBody>
-          <a:bodyPr wrap="square" anchor="ctr"/>
-          <a:lstStyle/>
-          <a:p>
-            <a:r>
-              <a:rPr sz="1500" b="1" i="0">
-                <a:solidFill>
-                  <a:srgbClr val="095292"/>
-                </a:solidFill>
-                <a:latin typeface="Calibri"/>
-              </a:rPr>
-              <a:t>Escribir 5-8 lineas de alcance (que SI / que NO hara el PI).</a:t>
-            </a:r>
-          </a:p>
-        </p:txBody>
-      </p:sp>
-      <p:sp>
-        <p:nvSpPr>
-          <p:cNvPr id="21" name="TextBox 20"/>
+          <a:bodyPr wrap="square">
+            <a:spAutoFit/>
+          </a:bodyPr>
+          <a:lstStyle/>
+          <a:p>
+            <a:pPr>
+              <a:spcAft>
+                <a:spcPts val="800"/>
+              </a:spcAft>
+            </a:pPr>
+            <a:r>
+              <a:rPr sz="1600" b="0" i="0">
+                <a:solidFill>
+                  <a:srgbClr val="333333"/>
+                </a:solidFill>
+                <a:latin typeface="Calibri"/>
+              </a:rPr>
+              <a:t>–   Dominio: clínica veterinaria VetCare.</a:t>
+            </a:r>
+          </a:p>
+          <a:p>
+            <a:pPr>
+              <a:spcAft>
+                <a:spcPts val="800"/>
+              </a:spcAft>
+            </a:pPr>
+            <a:r>
+              <a:rPr sz="1600" b="0" i="0">
+                <a:solidFill>
+                  <a:srgbClr val="333333"/>
+                </a:solidFill>
+                <a:latin typeface="Calibri"/>
+              </a:rPr>
+              <a:t>–   Ficha con plantilla fija: VetCare - [Apellido], alcance SI / NO y 3 reglas Condición → Acción.</a:t>
+            </a:r>
+          </a:p>
+          <a:p>
+            <a:pPr>
+              <a:spcAft>
+                <a:spcPts val="800"/>
+              </a:spcAft>
+            </a:pPr>
+            <a:r>
+              <a:rPr sz="1600" b="0" i="0">
+                <a:solidFill>
+                  <a:srgbClr val="333333"/>
+                </a:solidFill>
+                <a:latin typeface="Calibri"/>
+              </a:rPr>
+              <a:t>–   Diagrama: boceto visual en Excalidraw o draw.io → código Mermaid (erDiagram) → ExamLab.</a:t>
+            </a:r>
+          </a:p>
+          <a:p>
+            <a:pPr>
+              <a:spcAft>
+                <a:spcPts val="800"/>
+              </a:spcAft>
+            </a:pPr>
+            <a:r>
+              <a:rPr sz="1600" b="0" i="0">
+                <a:solidFill>
+                  <a:srgbClr val="333333"/>
+                </a:solidFill>
+                <a:latin typeface="Calibri"/>
+              </a:rPr>
+              <a:t>–   Nombres en minúscula y singular (dueno, mascota, cita) con id_&lt;entidad&gt;: iguales en ER, DDL y Mermaid.</a:t>
+            </a:r>
+          </a:p>
+        </p:txBody>
+      </p:sp>
+      <p:sp>
+        <p:nvSpPr>
+          <p:cNvPr id="6" name="TextBox 5"/>
           <p:cNvSpPr txBox="1"/>
           <p:nvPr/>
         </p:nvSpPr>
@@ -5082,7 +4568,7 @@
                 </a:solidFill>
                 <a:latin typeface="Calibri"/>
               </a:rPr>
-              <a:t>Taller PI VetCare — pistas (checklist vacio)</a:t>
+              <a:t>Taller PI VetCare — pasos guiados</a:t>
             </a:r>
           </a:p>
         </p:txBody>
@@ -5095,8 +4581,8 @@
         </p:nvSpPr>
         <p:spPr>
           <a:xfrm>
-            <a:off x="457200" y="1261872"/>
-            <a:ext cx="11277295" cy="566928"/>
+            <a:off x="457200" y="1554480"/>
+            <a:ext cx="11277295" cy="1051560"/>
           </a:xfrm>
           <a:prstGeom prst="roundRect">
             <a:avLst>
@@ -5134,25 +4620,25 @@
       </p:sp>
       <p:sp>
         <p:nvSpPr>
-          <p:cNvPr id="6" name="Rectangle 5"/>
+          <p:cNvPr id="6" name="Rounded Rectangle 5"/>
           <p:cNvSpPr/>
           <p:nvPr/>
         </p:nvSpPr>
         <p:spPr>
           <a:xfrm>
-            <a:off x="640080" y="1408175"/>
-            <a:ext cx="274320" cy="274320"/>
-          </a:xfrm>
-          <a:prstGeom prst="rect">
-            <a:avLst/>
+            <a:off x="594360" y="1860804"/>
+            <a:ext cx="438912" cy="438912"/>
+          </a:xfrm>
+          <a:prstGeom prst="roundRect">
+            <a:avLst>
+              <a:gd name="adj" fmla="val 12000"/>
+            </a:avLst>
           </a:prstGeom>
           <a:solidFill>
-            <a:srgbClr val="FFFFFF"/>
+            <a:srgbClr val="095292"/>
           </a:solidFill>
           <a:ln>
-            <a:solidFill>
-              <a:srgbClr val="333333"/>
-            </a:solidFill>
+            <a:noFill/>
           </a:ln>
         </p:spPr>
         <p:style>
@@ -5179,20 +4665,87 @@
       </p:sp>
       <p:sp>
         <p:nvSpPr>
-          <p:cNvPr id="7" name="Rectangle 6"/>
+          <p:cNvPr id="7" name="TextBox 6"/>
+          <p:cNvSpPr txBox="1"/>
+          <p:nvPr/>
+        </p:nvSpPr>
+        <p:spPr>
+          <a:xfrm>
+            <a:off x="594360" y="1860804"/>
+            <a:ext cx="438912" cy="438912"/>
+          </a:xfrm>
+          <a:prstGeom prst="rect">
+            <a:avLst/>
+          </a:prstGeom>
+          <a:noFill/>
+        </p:spPr>
+        <p:txBody>
+          <a:bodyPr wrap="square" anchor="ctr"/>
+          <a:lstStyle/>
+          <a:p>
+            <a:pPr algn="ctr"/>
+            <a:r>
+              <a:rPr sz="1600" b="1" i="0">
+                <a:solidFill>
+                  <a:srgbClr val="FFFFFF"/>
+                </a:solidFill>
+                <a:latin typeface="Calibri"/>
+              </a:rPr>
+              <a:t>1</a:t>
+            </a:r>
+          </a:p>
+        </p:txBody>
+      </p:sp>
+      <p:sp>
+        <p:nvSpPr>
+          <p:cNvPr id="8" name="TextBox 7"/>
+          <p:cNvSpPr txBox="1"/>
+          <p:nvPr/>
+        </p:nvSpPr>
+        <p:spPr>
+          <a:xfrm>
+            <a:off x="1188720" y="1645920"/>
+            <a:ext cx="10271455" cy="886968"/>
+          </a:xfrm>
+          <a:prstGeom prst="rect">
+            <a:avLst/>
+          </a:prstGeom>
+          <a:noFill/>
+        </p:spPr>
+        <p:txBody>
+          <a:bodyPr wrap="square" anchor="ctr"/>
+          <a:lstStyle/>
+          <a:p>
+            <a:r>
+              <a:rPr sz="1500" b="1" i="0">
+                <a:solidFill>
+                  <a:srgbClr val="095292"/>
+                </a:solidFill>
+                <a:latin typeface="Calibri"/>
+              </a:rPr>
+              <a:t>Registrar el proyecto con el nombre exacto VetCare - [Apellido] (trabajo individual por defecto; equipo de 2-3 solo si el docente lo autoriza).</a:t>
+            </a:r>
+          </a:p>
+        </p:txBody>
+      </p:sp>
+      <p:sp>
+        <p:nvSpPr>
+          <p:cNvPr id="9" name="Rounded Rectangle 8"/>
           <p:cNvSpPr/>
           <p:nvPr/>
         </p:nvSpPr>
         <p:spPr>
           <a:xfrm>
-            <a:off x="640080" y="1408175"/>
-            <a:ext cx="73152" cy="274320"/>
-          </a:xfrm>
-          <a:prstGeom prst="rect">
-            <a:avLst/>
+            <a:off x="457200" y="2697480"/>
+            <a:ext cx="11277295" cy="1051560"/>
+          </a:xfrm>
+          <a:prstGeom prst="roundRect">
+            <a:avLst>
+              <a:gd name="adj" fmla="val 12000"/>
+            </a:avLst>
           </a:prstGeom>
           <a:solidFill>
-            <a:srgbClr val="269CCB"/>
+            <a:srgbClr val="E8F4FA"/>
           </a:solidFill>
           <a:ln>
             <a:noFill/>
@@ -5222,14 +4775,59 @@
       </p:sp>
       <p:sp>
         <p:nvSpPr>
-          <p:cNvPr id="8" name="TextBox 7"/>
+          <p:cNvPr id="10" name="Rounded Rectangle 9"/>
+          <p:cNvSpPr/>
+          <p:nvPr/>
+        </p:nvSpPr>
+        <p:spPr>
+          <a:xfrm>
+            <a:off x="594360" y="3003804"/>
+            <a:ext cx="438912" cy="438912"/>
+          </a:xfrm>
+          <a:prstGeom prst="roundRect">
+            <a:avLst>
+              <a:gd name="adj" fmla="val 12000"/>
+            </a:avLst>
+          </a:prstGeom>
+          <a:solidFill>
+            <a:srgbClr val="095292"/>
+          </a:solidFill>
+          <a:ln>
+            <a:noFill/>
+          </a:ln>
+        </p:spPr>
+        <p:style>
+          <a:lnRef idx="1">
+            <a:schemeClr val="accent1"/>
+          </a:lnRef>
+          <a:fillRef idx="3">
+            <a:schemeClr val="accent1"/>
+          </a:fillRef>
+          <a:effectRef idx="2">
+            <a:schemeClr val="accent1"/>
+          </a:effectRef>
+          <a:fontRef idx="minor">
+            <a:schemeClr val="lt1"/>
+          </a:fontRef>
+        </p:style>
+        <p:txBody>
+          <a:bodyPr rtlCol="0" anchor="ctr"/>
+          <a:lstStyle/>
+          <a:p>
+            <a:pPr algn="ctr"/>
+          </a:p>
+        </p:txBody>
+      </p:sp>
+      <p:sp>
+        <p:nvSpPr>
+          <p:cNvPr id="11" name="TextBox 10"/>
           <p:cNvSpPr txBox="1"/>
           <p:nvPr/>
         </p:nvSpPr>
         <p:spPr>
           <a:xfrm>
-            <a:off x="1097280" y="1353312"/>
-            <a:ext cx="10362895" cy="402336"/>
+            <a:off x="594360" y="3003804"/>
+            <a:ext cx="438912" cy="438912"/>
           </a:xfrm>
           <a:prstGeom prst="rect">
             <a:avLst/>
@@ -5240,28 +4838,61 @@
           <a:bodyPr wrap="square" anchor="ctr"/>
           <a:lstStyle/>
           <a:p>
-            <a:r>
-              <a:rPr sz="1500" b="0" i="0">
-                <a:solidFill>
-                  <a:srgbClr val="333333"/>
-                </a:solidFill>
-                <a:latin typeface="Calibri"/>
-              </a:rPr>
-              <a:t>□ Hay PK/FK visibles en el ER?</a:t>
-            </a:r>
-          </a:p>
-        </p:txBody>
-      </p:sp>
-      <p:sp>
-        <p:nvSpPr>
-          <p:cNvPr id="9" name="Rounded Rectangle 8"/>
+            <a:pPr algn="ctr"/>
+            <a:r>
+              <a:rPr sz="1600" b="1" i="0">
+                <a:solidFill>
+                  <a:srgbClr val="FFFFFF"/>
+                </a:solidFill>
+                <a:latin typeface="Calibri"/>
+              </a:rPr>
+              <a:t>2</a:t>
+            </a:r>
+          </a:p>
+        </p:txBody>
+      </p:sp>
+      <p:sp>
+        <p:nvSpPr>
+          <p:cNvPr id="12" name="TextBox 11"/>
+          <p:cNvSpPr txBox="1"/>
+          <p:nvPr/>
+        </p:nvSpPr>
+        <p:spPr>
+          <a:xfrm>
+            <a:off x="1188720" y="2788920"/>
+            <a:ext cx="10271455" cy="886968"/>
+          </a:xfrm>
+          <a:prstGeom prst="rect">
+            <a:avLst/>
+          </a:prstGeom>
+          <a:noFill/>
+        </p:spPr>
+        <p:txBody>
+          <a:bodyPr wrap="square" anchor="ctr"/>
+          <a:lstStyle/>
+          <a:p>
+            <a:r>
+              <a:rPr sz="1500" b="1" i="0">
+                <a:solidFill>
+                  <a:srgbClr val="095292"/>
+                </a:solidFill>
+                <a:latin typeface="Calibri"/>
+              </a:rPr>
+              <a:t>Llenar la plantilla de la ficha del PI: alcance SI / alcance NO y 3 reglas de negocio propias en formato Condicion -&gt; Accion.</a:t>
+            </a:r>
+          </a:p>
+        </p:txBody>
+      </p:sp>
+      <p:sp>
+        <p:nvSpPr>
+          <p:cNvPr id="13" name="Rounded Rectangle 12"/>
           <p:cNvSpPr/>
           <p:nvPr/>
         </p:nvSpPr>
         <p:spPr>
           <a:xfrm>
-            <a:off x="457200" y="1938528"/>
-            <a:ext cx="11277295" cy="566928"/>
+            <a:off x="457200" y="3840480"/>
+            <a:ext cx="11277295" cy="1051560"/>
           </a:xfrm>
           <a:prstGeom prst="roundRect">
             <a:avLst>
@@ -5299,25 +4930,25 @@
       </p:sp>
       <p:sp>
         <p:nvSpPr>
-          <p:cNvPr id="10" name="Rectangle 9"/>
+          <p:cNvPr id="14" name="Rounded Rectangle 13"/>
           <p:cNvSpPr/>
           <p:nvPr/>
         </p:nvSpPr>
         <p:spPr>
           <a:xfrm>
-            <a:off x="640080" y="2084832"/>
-            <a:ext cx="274320" cy="274320"/>
-          </a:xfrm>
-          <a:prstGeom prst="rect">
-            <a:avLst/>
+            <a:off x="594360" y="4146804"/>
+            <a:ext cx="438912" cy="438912"/>
+          </a:xfrm>
+          <a:prstGeom prst="roundRect">
+            <a:avLst>
+              <a:gd name="adj" fmla="val 12000"/>
+            </a:avLst>
           </a:prstGeom>
           <a:solidFill>
-            <a:srgbClr val="FFFFFF"/>
+            <a:srgbClr val="095292"/>
           </a:solidFill>
           <a:ln>
-            <a:solidFill>
-              <a:srgbClr val="333333"/>
-            </a:solidFill>
+            <a:noFill/>
           </a:ln>
         </p:spPr>
         <p:style>
@@ -5344,20 +4975,87 @@
       </p:sp>
       <p:sp>
         <p:nvSpPr>
-          <p:cNvPr id="11" name="Rectangle 10"/>
+          <p:cNvPr id="15" name="TextBox 14"/>
+          <p:cNvSpPr txBox="1"/>
+          <p:nvPr/>
+        </p:nvSpPr>
+        <p:spPr>
+          <a:xfrm>
+            <a:off x="594360" y="4146804"/>
+            <a:ext cx="438912" cy="438912"/>
+          </a:xfrm>
+          <a:prstGeom prst="rect">
+            <a:avLst/>
+          </a:prstGeom>
+          <a:noFill/>
+        </p:spPr>
+        <p:txBody>
+          <a:bodyPr wrap="square" anchor="ctr"/>
+          <a:lstStyle/>
+          <a:p>
+            <a:pPr algn="ctr"/>
+            <a:r>
+              <a:rPr sz="1600" b="1" i="0">
+                <a:solidFill>
+                  <a:srgbClr val="FFFFFF"/>
+                </a:solidFill>
+                <a:latin typeface="Calibri"/>
+              </a:rPr>
+              <a:t>3</a:t>
+            </a:r>
+          </a:p>
+        </p:txBody>
+      </p:sp>
+      <p:sp>
+        <p:nvSpPr>
+          <p:cNvPr id="16" name="TextBox 15"/>
+          <p:cNvSpPr txBox="1"/>
+          <p:nvPr/>
+        </p:nvSpPr>
+        <p:spPr>
+          <a:xfrm>
+            <a:off x="1188720" y="3931920"/>
+            <a:ext cx="10271455" cy="886968"/>
+          </a:xfrm>
+          <a:prstGeom prst="rect">
+            <a:avLst/>
+          </a:prstGeom>
+          <a:noFill/>
+        </p:spPr>
+        <p:txBody>
+          <a:bodyPr wrap="square" anchor="ctr"/>
+          <a:lstStyle/>
+          <a:p>
+            <a:r>
+              <a:rPr sz="1500" b="1" i="0">
+                <a:solidFill>
+                  <a:srgbClr val="095292"/>
+                </a:solidFill>
+                <a:latin typeface="Calibri"/>
+              </a:rPr>
+              <a:t>Dibujar el ER borrador en Excalidraw o draw.io, pasarlo a Mermaid (erDiagram) con ayuda de una IA y pegarlo renderizado en ExamLab.</a:t>
+            </a:r>
+          </a:p>
+        </p:txBody>
+      </p:sp>
+      <p:sp>
+        <p:nvSpPr>
+          <p:cNvPr id="17" name="Rounded Rectangle 16"/>
           <p:cNvSpPr/>
           <p:nvPr/>
         </p:nvSpPr>
         <p:spPr>
           <a:xfrm>
-            <a:off x="640080" y="2084832"/>
-            <a:ext cx="73152" cy="274320"/>
-          </a:xfrm>
-          <a:prstGeom prst="rect">
-            <a:avLst/>
+            <a:off x="457200" y="4983480"/>
+            <a:ext cx="11277295" cy="1051560"/>
+          </a:xfrm>
+          <a:prstGeom prst="roundRect">
+            <a:avLst>
+              <a:gd name="adj" fmla="val 12000"/>
+            </a:avLst>
           </a:prstGeom>
           <a:solidFill>
-            <a:srgbClr val="269CCB"/>
+            <a:srgbClr val="E8F4FA"/>
           </a:solidFill>
           <a:ln>
             <a:noFill/>
@@ -5387,46 +5085,14 @@
       </p:sp>
       <p:sp>
         <p:nvSpPr>
-          <p:cNvPr id="12" name="TextBox 11"/>
-          <p:cNvSpPr txBox="1"/>
-          <p:nvPr/>
-        </p:nvSpPr>
-        <p:spPr>
-          <a:xfrm>
-            <a:off x="1097280" y="2029968"/>
-            <a:ext cx="10362895" cy="402336"/>
-          </a:xfrm>
-          <a:prstGeom prst="rect">
-            <a:avLst/>
-          </a:prstGeom>
-          <a:noFill/>
-        </p:spPr>
-        <p:txBody>
-          <a:bodyPr wrap="square" anchor="ctr"/>
-          <a:lstStyle/>
-          <a:p>
-            <a:r>
-              <a:rPr sz="1500" b="0" i="0">
-                <a:solidFill>
-                  <a:srgbClr val="333333"/>
-                </a:solidFill>
-                <a:latin typeface="Calibri"/>
-              </a:rPr>
-              <a:t>□ Mascota inactiva / stock aparecen como regla?</a:t>
-            </a:r>
-          </a:p>
-        </p:txBody>
-      </p:sp>
-      <p:sp>
-        <p:nvSpPr>
-          <p:cNvPr id="13" name="Rounded Rectangle 12"/>
+          <p:cNvPr id="18" name="Rounded Rectangle 17"/>
           <p:cNvSpPr/>
           <p:nvPr/>
         </p:nvSpPr>
         <p:spPr>
           <a:xfrm>
-            <a:off x="457200" y="2615184"/>
-            <a:ext cx="11277295" cy="566928"/>
+            <a:off x="594360" y="5289804"/>
+            <a:ext cx="438912" cy="438912"/>
           </a:xfrm>
           <a:prstGeom prst="roundRect">
             <a:avLst>
@@ -5434,7 +5100,7 @@
             </a:avLst>
           </a:prstGeom>
           <a:solidFill>
-            <a:srgbClr val="F2F2F2"/>
+            <a:srgbClr val="095292"/>
           </a:solidFill>
           <a:ln>
             <a:noFill/>
@@ -5464,102 +5130,14 @@
       </p:sp>
       <p:sp>
         <p:nvSpPr>
-          <p:cNvPr id="14" name="Rectangle 13"/>
-          <p:cNvSpPr/>
-          <p:nvPr/>
-        </p:nvSpPr>
-        <p:spPr>
-          <a:xfrm>
-            <a:off x="640080" y="2761488"/>
-            <a:ext cx="274320" cy="274320"/>
-          </a:xfrm>
-          <a:prstGeom prst="rect">
-            <a:avLst/>
-          </a:prstGeom>
-          <a:solidFill>
-            <a:srgbClr val="FFFFFF"/>
-          </a:solidFill>
-          <a:ln>
-            <a:solidFill>
-              <a:srgbClr val="333333"/>
-            </a:solidFill>
-          </a:ln>
-        </p:spPr>
-        <p:style>
-          <a:lnRef idx="1">
-            <a:schemeClr val="accent1"/>
-          </a:lnRef>
-          <a:fillRef idx="3">
-            <a:schemeClr val="accent1"/>
-          </a:fillRef>
-          <a:effectRef idx="2">
-            <a:schemeClr val="accent1"/>
-          </a:effectRef>
-          <a:fontRef idx="minor">
-            <a:schemeClr val="lt1"/>
-          </a:fontRef>
-        </p:style>
-        <p:txBody>
-          <a:bodyPr rtlCol="0" anchor="ctr"/>
-          <a:lstStyle/>
-          <a:p>
-            <a:pPr algn="ctr"/>
-          </a:p>
-        </p:txBody>
-      </p:sp>
-      <p:sp>
-        <p:nvSpPr>
-          <p:cNvPr id="15" name="Rectangle 14"/>
-          <p:cNvSpPr/>
-          <p:nvPr/>
-        </p:nvSpPr>
-        <p:spPr>
-          <a:xfrm>
-            <a:off x="640080" y="2761488"/>
-            <a:ext cx="73152" cy="274320"/>
-          </a:xfrm>
-          <a:prstGeom prst="rect">
-            <a:avLst/>
-          </a:prstGeom>
-          <a:solidFill>
-            <a:srgbClr val="269CCB"/>
-          </a:solidFill>
-          <a:ln>
-            <a:noFill/>
-          </a:ln>
-        </p:spPr>
-        <p:style>
-          <a:lnRef idx="1">
-            <a:schemeClr val="accent1"/>
-          </a:lnRef>
-          <a:fillRef idx="3">
-            <a:schemeClr val="accent1"/>
-          </a:fillRef>
-          <a:effectRef idx="2">
-            <a:schemeClr val="accent1"/>
-          </a:effectRef>
-          <a:fontRef idx="minor">
-            <a:schemeClr val="lt1"/>
-          </a:fontRef>
-        </p:style>
-        <p:txBody>
-          <a:bodyPr rtlCol="0" anchor="ctr"/>
-          <a:lstStyle/>
-          <a:p>
-            <a:pPr algn="ctr"/>
-          </a:p>
-        </p:txBody>
-      </p:sp>
-      <p:sp>
-        <p:nvSpPr>
-          <p:cNvPr id="16" name="TextBox 15"/>
+          <p:cNvPr id="19" name="TextBox 18"/>
           <p:cNvSpPr txBox="1"/>
           <p:nvPr/>
         </p:nvSpPr>
         <p:spPr>
           <a:xfrm>
-            <a:off x="1097280" y="2706624"/>
-            <a:ext cx="10362895" cy="402336"/>
+            <a:off x="594360" y="5289804"/>
+            <a:ext cx="438912" cy="438912"/>
           </a:xfrm>
           <a:prstGeom prst="rect">
             <a:avLst/>
@@ -5570,21 +5148,54 @@
           <a:bodyPr wrap="square" anchor="ctr"/>
           <a:lstStyle/>
           <a:p>
-            <a:r>
-              <a:rPr sz="1500" b="0" i="0">
-                <a:solidFill>
-                  <a:srgbClr val="333333"/>
-                </a:solidFill>
-                <a:latin typeface="Calibri"/>
-              </a:rPr>
-              <a:t>□ El alcance evita scope infinito?</a:t>
-            </a:r>
-          </a:p>
-        </p:txBody>
-      </p:sp>
-      <p:sp>
-        <p:nvSpPr>
-          <p:cNvPr id="17" name="TextBox 16"/>
+            <a:pPr algn="ctr"/>
+            <a:r>
+              <a:rPr sz="1600" b="1" i="0">
+                <a:solidFill>
+                  <a:srgbClr val="FFFFFF"/>
+                </a:solidFill>
+                <a:latin typeface="Calibri"/>
+              </a:rPr>
+              <a:t>4</a:t>
+            </a:r>
+          </a:p>
+        </p:txBody>
+      </p:sp>
+      <p:sp>
+        <p:nvSpPr>
+          <p:cNvPr id="20" name="TextBox 19"/>
+          <p:cNvSpPr txBox="1"/>
+          <p:nvPr/>
+        </p:nvSpPr>
+        <p:spPr>
+          <a:xfrm>
+            <a:off x="1188720" y="5074920"/>
+            <a:ext cx="10271455" cy="886968"/>
+          </a:xfrm>
+          <a:prstGeom prst="rect">
+            <a:avLst/>
+          </a:prstGeom>
+          <a:noFill/>
+        </p:spPr>
+        <p:txBody>
+          <a:bodyPr wrap="square" anchor="ctr"/>
+          <a:lstStyle/>
+          <a:p>
+            <a:r>
+              <a:rPr sz="1500" b="1" i="0">
+                <a:solidFill>
+                  <a:srgbClr val="095292"/>
+                </a:solidFill>
+                <a:latin typeface="Calibri"/>
+              </a:rPr>
+              <a:t>Exportar tambien el PNG del ER a la carpeta del PI y verificar que los nombres coincidan con el DDL (minusculas, singular, id_&lt;entidad&gt;).</a:t>
+            </a:r>
+          </a:p>
+        </p:txBody>
+      </p:sp>
+      <p:sp>
+        <p:nvSpPr>
+          <p:cNvPr id="21" name="TextBox 20"/>
           <p:cNvSpPr txBox="1"/>
           <p:nvPr/>
         </p:nvSpPr>
@@ -5758,21 +5369,154 @@
                 </a:solidFill>
                 <a:latin typeface="Calibri"/>
               </a:rPr>
-              <a:t>Criterios de exito / entregable</a:t>
-            </a:r>
-          </a:p>
-        </p:txBody>
-      </p:sp>
-      <p:sp>
-        <p:nvSpPr>
-          <p:cNvPr id="5" name="TextBox 4"/>
+              <a:t>Taller PI VetCare — pistas (checklist vacio)</a:t>
+            </a:r>
+          </a:p>
+        </p:txBody>
+      </p:sp>
+      <p:sp>
+        <p:nvSpPr>
+          <p:cNvPr id="5" name="Rounded Rectangle 4"/>
+          <p:cNvSpPr/>
+          <p:nvPr/>
+        </p:nvSpPr>
+        <p:spPr>
+          <a:xfrm>
+            <a:off x="457200" y="1261872"/>
+            <a:ext cx="11277295" cy="566928"/>
+          </a:xfrm>
+          <a:prstGeom prst="roundRect">
+            <a:avLst>
+              <a:gd name="adj" fmla="val 12000"/>
+            </a:avLst>
+          </a:prstGeom>
+          <a:solidFill>
+            <a:srgbClr val="F2F2F2"/>
+          </a:solidFill>
+          <a:ln>
+            <a:noFill/>
+          </a:ln>
+        </p:spPr>
+        <p:style>
+          <a:lnRef idx="1">
+            <a:schemeClr val="accent1"/>
+          </a:lnRef>
+          <a:fillRef idx="3">
+            <a:schemeClr val="accent1"/>
+          </a:fillRef>
+          <a:effectRef idx="2">
+            <a:schemeClr val="accent1"/>
+          </a:effectRef>
+          <a:fontRef idx="minor">
+            <a:schemeClr val="lt1"/>
+          </a:fontRef>
+        </p:style>
+        <p:txBody>
+          <a:bodyPr rtlCol="0" anchor="ctr"/>
+          <a:lstStyle/>
+          <a:p>
+            <a:pPr algn="ctr"/>
+          </a:p>
+        </p:txBody>
+      </p:sp>
+      <p:sp>
+        <p:nvSpPr>
+          <p:cNvPr id="6" name="Rectangle 5"/>
+          <p:cNvSpPr/>
+          <p:nvPr/>
+        </p:nvSpPr>
+        <p:spPr>
+          <a:xfrm>
+            <a:off x="640080" y="1408175"/>
+            <a:ext cx="274320" cy="274320"/>
+          </a:xfrm>
+          <a:prstGeom prst="rect">
+            <a:avLst/>
+          </a:prstGeom>
+          <a:solidFill>
+            <a:srgbClr val="FFFFFF"/>
+          </a:solidFill>
+          <a:ln>
+            <a:solidFill>
+              <a:srgbClr val="333333"/>
+            </a:solidFill>
+          </a:ln>
+        </p:spPr>
+        <p:style>
+          <a:lnRef idx="1">
+            <a:schemeClr val="accent1"/>
+          </a:lnRef>
+          <a:fillRef idx="3">
+            <a:schemeClr val="accent1"/>
+          </a:fillRef>
+          <a:effectRef idx="2">
+            <a:schemeClr val="accent1"/>
+          </a:effectRef>
+          <a:fontRef idx="minor">
+            <a:schemeClr val="lt1"/>
+          </a:fontRef>
+        </p:style>
+        <p:txBody>
+          <a:bodyPr rtlCol="0" anchor="ctr"/>
+          <a:lstStyle/>
+          <a:p>
+            <a:pPr algn="ctr"/>
+          </a:p>
+        </p:txBody>
+      </p:sp>
+      <p:sp>
+        <p:nvSpPr>
+          <p:cNvPr id="7" name="Rectangle 6"/>
+          <p:cNvSpPr/>
+          <p:nvPr/>
+        </p:nvSpPr>
+        <p:spPr>
+          <a:xfrm>
+            <a:off x="640080" y="1408175"/>
+            <a:ext cx="73152" cy="274320"/>
+          </a:xfrm>
+          <a:prstGeom prst="rect">
+            <a:avLst/>
+          </a:prstGeom>
+          <a:solidFill>
+            <a:srgbClr val="269CCB"/>
+          </a:solidFill>
+          <a:ln>
+            <a:noFill/>
+          </a:ln>
+        </p:spPr>
+        <p:style>
+          <a:lnRef idx="1">
+            <a:schemeClr val="accent1"/>
+          </a:lnRef>
+          <a:fillRef idx="3">
+            <a:schemeClr val="accent1"/>
+          </a:fillRef>
+          <a:effectRef idx="2">
+            <a:schemeClr val="accent1"/>
+          </a:effectRef>
+          <a:fontRef idx="minor">
+            <a:schemeClr val="lt1"/>
+          </a:fontRef>
+        </p:style>
+        <p:txBody>
+          <a:bodyPr rtlCol="0" anchor="ctr"/>
+          <a:lstStyle/>
+          <a:p>
+            <a:pPr algn="ctr"/>
+          </a:p>
+        </p:txBody>
+      </p:sp>
+      <p:sp>
+        <p:nvSpPr>
+          <p:cNvPr id="8" name="TextBox 7"/>
           <p:cNvSpPr txBox="1"/>
           <p:nvPr/>
         </p:nvSpPr>
         <p:spPr>
           <a:xfrm>
-            <a:off x="457200" y="1170432"/>
-            <a:ext cx="11277295" cy="5230368"/>
+            <a:off x="1097280" y="1353312"/>
+            <a:ext cx="10362895" cy="402336"/>
           </a:xfrm>
           <a:prstGeom prst="rect">
             <a:avLst/>
@@ -5780,115 +5524,849 @@
           <a:noFill/>
         </p:spPr>
         <p:txBody>
-          <a:bodyPr wrap="square">
-            <a:spAutoFit/>
-          </a:bodyPr>
-          <a:lstStyle/>
-          <a:p>
-            <a:pPr>
-              <a:spcAft>
-                <a:spcPts val="800"/>
-              </a:spcAft>
-            </a:pPr>
-            <a:r>
-              <a:rPr sz="1600" b="0" i="0">
+          <a:bodyPr wrap="square" anchor="ctr"/>
+          <a:lstStyle/>
+          <a:p>
+            <a:r>
+              <a:rPr sz="1500" b="0" i="0">
                 <a:solidFill>
                   <a:srgbClr val="333333"/>
                 </a:solidFill>
                 <a:latin typeface="Calibri"/>
               </a:rPr>
-              <a:t>–   </a:t>
-            </a:r>
-            <a:r>
-              <a:rPr sz="1600" b="1" i="0">
+              <a:t>□ El proyecto se llama VetCare - [Apellido]?</a:t>
+            </a:r>
+          </a:p>
+        </p:txBody>
+      </p:sp>
+      <p:sp>
+        <p:nvSpPr>
+          <p:cNvPr id="9" name="Rounded Rectangle 8"/>
+          <p:cNvSpPr/>
+          <p:nvPr/>
+        </p:nvSpPr>
+        <p:spPr>
+          <a:xfrm>
+            <a:off x="457200" y="1938528"/>
+            <a:ext cx="11277295" cy="566928"/>
+          </a:xfrm>
+          <a:prstGeom prst="roundRect">
+            <a:avLst>
+              <a:gd name="adj" fmla="val 12000"/>
+            </a:avLst>
+          </a:prstGeom>
+          <a:solidFill>
+            <a:srgbClr val="F2F2F2"/>
+          </a:solidFill>
+          <a:ln>
+            <a:noFill/>
+          </a:ln>
+        </p:spPr>
+        <p:style>
+          <a:lnRef idx="1">
+            <a:schemeClr val="accent1"/>
+          </a:lnRef>
+          <a:fillRef idx="3">
+            <a:schemeClr val="accent1"/>
+          </a:fillRef>
+          <a:effectRef idx="2">
+            <a:schemeClr val="accent1"/>
+          </a:effectRef>
+          <a:fontRef idx="minor">
+            <a:schemeClr val="lt1"/>
+          </a:fontRef>
+        </p:style>
+        <p:txBody>
+          <a:bodyPr rtlCol="0" anchor="ctr"/>
+          <a:lstStyle/>
+          <a:p>
+            <a:pPr algn="ctr"/>
+          </a:p>
+        </p:txBody>
+      </p:sp>
+      <p:sp>
+        <p:nvSpPr>
+          <p:cNvPr id="10" name="Rectangle 9"/>
+          <p:cNvSpPr/>
+          <p:nvPr/>
+        </p:nvSpPr>
+        <p:spPr>
+          <a:xfrm>
+            <a:off x="640080" y="2084832"/>
+            <a:ext cx="274320" cy="274320"/>
+          </a:xfrm>
+          <a:prstGeom prst="rect">
+            <a:avLst/>
+          </a:prstGeom>
+          <a:solidFill>
+            <a:srgbClr val="FFFFFF"/>
+          </a:solidFill>
+          <a:ln>
+            <a:solidFill>
+              <a:srgbClr val="333333"/>
+            </a:solidFill>
+          </a:ln>
+        </p:spPr>
+        <p:style>
+          <a:lnRef idx="1">
+            <a:schemeClr val="accent1"/>
+          </a:lnRef>
+          <a:fillRef idx="3">
+            <a:schemeClr val="accent1"/>
+          </a:fillRef>
+          <a:effectRef idx="2">
+            <a:schemeClr val="accent1"/>
+          </a:effectRef>
+          <a:fontRef idx="minor">
+            <a:schemeClr val="lt1"/>
+          </a:fontRef>
+        </p:style>
+        <p:txBody>
+          <a:bodyPr rtlCol="0" anchor="ctr"/>
+          <a:lstStyle/>
+          <a:p>
+            <a:pPr algn="ctr"/>
+          </a:p>
+        </p:txBody>
+      </p:sp>
+      <p:sp>
+        <p:nvSpPr>
+          <p:cNvPr id="11" name="Rectangle 10"/>
+          <p:cNvSpPr/>
+          <p:nvPr/>
+        </p:nvSpPr>
+        <p:spPr>
+          <a:xfrm>
+            <a:off x="640080" y="2084832"/>
+            <a:ext cx="73152" cy="274320"/>
+          </a:xfrm>
+          <a:prstGeom prst="rect">
+            <a:avLst/>
+          </a:prstGeom>
+          <a:solidFill>
+            <a:srgbClr val="269CCB"/>
+          </a:solidFill>
+          <a:ln>
+            <a:noFill/>
+          </a:ln>
+        </p:spPr>
+        <p:style>
+          <a:lnRef idx="1">
+            <a:schemeClr val="accent1"/>
+          </a:lnRef>
+          <a:fillRef idx="3">
+            <a:schemeClr val="accent1"/>
+          </a:fillRef>
+          <a:effectRef idx="2">
+            <a:schemeClr val="accent1"/>
+          </a:effectRef>
+          <a:fontRef idx="minor">
+            <a:schemeClr val="lt1"/>
+          </a:fontRef>
+        </p:style>
+        <p:txBody>
+          <a:bodyPr rtlCol="0" anchor="ctr"/>
+          <a:lstStyle/>
+          <a:p>
+            <a:pPr algn="ctr"/>
+          </a:p>
+        </p:txBody>
+      </p:sp>
+      <p:sp>
+        <p:nvSpPr>
+          <p:cNvPr id="12" name="TextBox 11"/>
+          <p:cNvSpPr txBox="1"/>
+          <p:nvPr/>
+        </p:nvSpPr>
+        <p:spPr>
+          <a:xfrm>
+            <a:off x="1097280" y="2029968"/>
+            <a:ext cx="10362895" cy="402336"/>
+          </a:xfrm>
+          <a:prstGeom prst="rect">
+            <a:avLst/>
+          </a:prstGeom>
+          <a:noFill/>
+        </p:spPr>
+        <p:txBody>
+          <a:bodyPr wrap="square" anchor="ctr"/>
+          <a:lstStyle/>
+          <a:p>
+            <a:r>
+              <a:rPr sz="1500" b="0" i="0">
                 <a:solidFill>
                   <a:srgbClr val="333333"/>
                 </a:solidFill>
                 <a:latin typeface="Calibri"/>
               </a:rPr>
-              <a:t>Entregable:</a:t>
-            </a:r>
-            <a:r>
-              <a:rPr sz="1600" b="0" i="0">
+              <a:t>□ Las 3 reglas están escritas como Condición → Acción?</a:t>
+            </a:r>
+          </a:p>
+        </p:txBody>
+      </p:sp>
+      <p:sp>
+        <p:nvSpPr>
+          <p:cNvPr id="13" name="Rounded Rectangle 12"/>
+          <p:cNvSpPr/>
+          <p:nvPr/>
+        </p:nvSpPr>
+        <p:spPr>
+          <a:xfrm>
+            <a:off x="457200" y="2615184"/>
+            <a:ext cx="11277295" cy="566928"/>
+          </a:xfrm>
+          <a:prstGeom prst="roundRect">
+            <a:avLst>
+              <a:gd name="adj" fmla="val 12000"/>
+            </a:avLst>
+          </a:prstGeom>
+          <a:solidFill>
+            <a:srgbClr val="F2F2F2"/>
+          </a:solidFill>
+          <a:ln>
+            <a:noFill/>
+          </a:ln>
+        </p:spPr>
+        <p:style>
+          <a:lnRef idx="1">
+            <a:schemeClr val="accent1"/>
+          </a:lnRef>
+          <a:fillRef idx="3">
+            <a:schemeClr val="accent1"/>
+          </a:fillRef>
+          <a:effectRef idx="2">
+            <a:schemeClr val="accent1"/>
+          </a:effectRef>
+          <a:fontRef idx="minor">
+            <a:schemeClr val="lt1"/>
+          </a:fontRef>
+        </p:style>
+        <p:txBody>
+          <a:bodyPr rtlCol="0" anchor="ctr"/>
+          <a:lstStyle/>
+          <a:p>
+            <a:pPr algn="ctr"/>
+          </a:p>
+        </p:txBody>
+      </p:sp>
+      <p:sp>
+        <p:nvSpPr>
+          <p:cNvPr id="14" name="Rectangle 13"/>
+          <p:cNvSpPr/>
+          <p:nvPr/>
+        </p:nvSpPr>
+        <p:spPr>
+          <a:xfrm>
+            <a:off x="640080" y="2761488"/>
+            <a:ext cx="274320" cy="274320"/>
+          </a:xfrm>
+          <a:prstGeom prst="rect">
+            <a:avLst/>
+          </a:prstGeom>
+          <a:solidFill>
+            <a:srgbClr val="FFFFFF"/>
+          </a:solidFill>
+          <a:ln>
+            <a:solidFill>
+              <a:srgbClr val="333333"/>
+            </a:solidFill>
+          </a:ln>
+        </p:spPr>
+        <p:style>
+          <a:lnRef idx="1">
+            <a:schemeClr val="accent1"/>
+          </a:lnRef>
+          <a:fillRef idx="3">
+            <a:schemeClr val="accent1"/>
+          </a:fillRef>
+          <a:effectRef idx="2">
+            <a:schemeClr val="accent1"/>
+          </a:effectRef>
+          <a:fontRef idx="minor">
+            <a:schemeClr val="lt1"/>
+          </a:fontRef>
+        </p:style>
+        <p:txBody>
+          <a:bodyPr rtlCol="0" anchor="ctr"/>
+          <a:lstStyle/>
+          <a:p>
+            <a:pPr algn="ctr"/>
+          </a:p>
+        </p:txBody>
+      </p:sp>
+      <p:sp>
+        <p:nvSpPr>
+          <p:cNvPr id="15" name="Rectangle 14"/>
+          <p:cNvSpPr/>
+          <p:nvPr/>
+        </p:nvSpPr>
+        <p:spPr>
+          <a:xfrm>
+            <a:off x="640080" y="2761488"/>
+            <a:ext cx="73152" cy="274320"/>
+          </a:xfrm>
+          <a:prstGeom prst="rect">
+            <a:avLst/>
+          </a:prstGeom>
+          <a:solidFill>
+            <a:srgbClr val="269CCB"/>
+          </a:solidFill>
+          <a:ln>
+            <a:noFill/>
+          </a:ln>
+        </p:spPr>
+        <p:style>
+          <a:lnRef idx="1">
+            <a:schemeClr val="accent1"/>
+          </a:lnRef>
+          <a:fillRef idx="3">
+            <a:schemeClr val="accent1"/>
+          </a:fillRef>
+          <a:effectRef idx="2">
+            <a:schemeClr val="accent1"/>
+          </a:effectRef>
+          <a:fontRef idx="minor">
+            <a:schemeClr val="lt1"/>
+          </a:fontRef>
+        </p:style>
+        <p:txBody>
+          <a:bodyPr rtlCol="0" anchor="ctr"/>
+          <a:lstStyle/>
+          <a:p>
+            <a:pPr algn="ctr"/>
+          </a:p>
+        </p:txBody>
+      </p:sp>
+      <p:sp>
+        <p:nvSpPr>
+          <p:cNvPr id="16" name="TextBox 15"/>
+          <p:cNvSpPr txBox="1"/>
+          <p:nvPr/>
+        </p:nvSpPr>
+        <p:spPr>
+          <a:xfrm>
+            <a:off x="1097280" y="2706624"/>
+            <a:ext cx="10362895" cy="402336"/>
+          </a:xfrm>
+          <a:prstGeom prst="rect">
+            <a:avLst/>
+          </a:prstGeom>
+          <a:noFill/>
+        </p:spPr>
+        <p:txBody>
+          <a:bodyPr wrap="square" anchor="ctr"/>
+          <a:lstStyle/>
+          <a:p>
+            <a:r>
+              <a:rPr sz="1500" b="0" i="0">
                 <a:solidFill>
                   <a:srgbClr val="333333"/>
                 </a:solidFill>
                 <a:latin typeface="Calibri"/>
               </a:rPr>
-              <a:t> Ficha del proyecto + ER borrador (PNG) + lista de entidades/reglas</a:t>
-            </a:r>
-          </a:p>
-          <a:p>
-            <a:pPr>
-              <a:spcAft>
-                <a:spcPts val="800"/>
-              </a:spcAft>
-            </a:pPr>
-            <a:r>
-              <a:rPr sz="1600" b="0" i="0">
+              <a:t>□ El Mermaid renderiza dentro de ExamLab (no basta el PNG)?</a:t>
+            </a:r>
+          </a:p>
+        </p:txBody>
+      </p:sp>
+      <p:sp>
+        <p:nvSpPr>
+          <p:cNvPr id="17" name="Rounded Rectangle 16"/>
+          <p:cNvSpPr/>
+          <p:nvPr/>
+        </p:nvSpPr>
+        <p:spPr>
+          <a:xfrm>
+            <a:off x="457200" y="3291840"/>
+            <a:ext cx="11277295" cy="566928"/>
+          </a:xfrm>
+          <a:prstGeom prst="roundRect">
+            <a:avLst>
+              <a:gd name="adj" fmla="val 12000"/>
+            </a:avLst>
+          </a:prstGeom>
+          <a:solidFill>
+            <a:srgbClr val="F2F2F2"/>
+          </a:solidFill>
+          <a:ln>
+            <a:noFill/>
+          </a:ln>
+        </p:spPr>
+        <p:style>
+          <a:lnRef idx="1">
+            <a:schemeClr val="accent1"/>
+          </a:lnRef>
+          <a:fillRef idx="3">
+            <a:schemeClr val="accent1"/>
+          </a:fillRef>
+          <a:effectRef idx="2">
+            <a:schemeClr val="accent1"/>
+          </a:effectRef>
+          <a:fontRef idx="minor">
+            <a:schemeClr val="lt1"/>
+          </a:fontRef>
+        </p:style>
+        <p:txBody>
+          <a:bodyPr rtlCol="0" anchor="ctr"/>
+          <a:lstStyle/>
+          <a:p>
+            <a:pPr algn="ctr"/>
+          </a:p>
+        </p:txBody>
+      </p:sp>
+      <p:sp>
+        <p:nvSpPr>
+          <p:cNvPr id="18" name="Rectangle 17"/>
+          <p:cNvSpPr/>
+          <p:nvPr/>
+        </p:nvSpPr>
+        <p:spPr>
+          <a:xfrm>
+            <a:off x="640080" y="3438144"/>
+            <a:ext cx="274320" cy="274320"/>
+          </a:xfrm>
+          <a:prstGeom prst="rect">
+            <a:avLst/>
+          </a:prstGeom>
+          <a:solidFill>
+            <a:srgbClr val="FFFFFF"/>
+          </a:solidFill>
+          <a:ln>
+            <a:solidFill>
+              <a:srgbClr val="333333"/>
+            </a:solidFill>
+          </a:ln>
+        </p:spPr>
+        <p:style>
+          <a:lnRef idx="1">
+            <a:schemeClr val="accent1"/>
+          </a:lnRef>
+          <a:fillRef idx="3">
+            <a:schemeClr val="accent1"/>
+          </a:fillRef>
+          <a:effectRef idx="2">
+            <a:schemeClr val="accent1"/>
+          </a:effectRef>
+          <a:fontRef idx="minor">
+            <a:schemeClr val="lt1"/>
+          </a:fontRef>
+        </p:style>
+        <p:txBody>
+          <a:bodyPr rtlCol="0" anchor="ctr"/>
+          <a:lstStyle/>
+          <a:p>
+            <a:pPr algn="ctr"/>
+          </a:p>
+        </p:txBody>
+      </p:sp>
+      <p:sp>
+        <p:nvSpPr>
+          <p:cNvPr id="19" name="Rectangle 18"/>
+          <p:cNvSpPr/>
+          <p:nvPr/>
+        </p:nvSpPr>
+        <p:spPr>
+          <a:xfrm>
+            <a:off x="640080" y="3438144"/>
+            <a:ext cx="73152" cy="274320"/>
+          </a:xfrm>
+          <a:prstGeom prst="rect">
+            <a:avLst/>
+          </a:prstGeom>
+          <a:solidFill>
+            <a:srgbClr val="269CCB"/>
+          </a:solidFill>
+          <a:ln>
+            <a:noFill/>
+          </a:ln>
+        </p:spPr>
+        <p:style>
+          <a:lnRef idx="1">
+            <a:schemeClr val="accent1"/>
+          </a:lnRef>
+          <a:fillRef idx="3">
+            <a:schemeClr val="accent1"/>
+          </a:fillRef>
+          <a:effectRef idx="2">
+            <a:schemeClr val="accent1"/>
+          </a:effectRef>
+          <a:fontRef idx="minor">
+            <a:schemeClr val="lt1"/>
+          </a:fontRef>
+        </p:style>
+        <p:txBody>
+          <a:bodyPr rtlCol="0" anchor="ctr"/>
+          <a:lstStyle/>
+          <a:p>
+            <a:pPr algn="ctr"/>
+          </a:p>
+        </p:txBody>
+      </p:sp>
+      <p:sp>
+        <p:nvSpPr>
+          <p:cNvPr id="20" name="TextBox 19"/>
+          <p:cNvSpPr txBox="1"/>
+          <p:nvPr/>
+        </p:nvSpPr>
+        <p:spPr>
+          <a:xfrm>
+            <a:off x="1097280" y="3383280"/>
+            <a:ext cx="10362895" cy="402336"/>
+          </a:xfrm>
+          <a:prstGeom prst="rect">
+            <a:avLst/>
+          </a:prstGeom>
+          <a:noFill/>
+        </p:spPr>
+        <p:txBody>
+          <a:bodyPr wrap="square" anchor="ctr"/>
+          <a:lstStyle/>
+          <a:p>
+            <a:r>
+              <a:rPr sz="1500" b="0" i="0">
                 <a:solidFill>
                   <a:srgbClr val="333333"/>
                 </a:solidFill>
                 <a:latin typeface="Calibri"/>
               </a:rPr>
-              <a:t>–   Evidencia en playground (enlace) o archivo SQL/PNG propio.</a:t>
-            </a:r>
-          </a:p>
-          <a:p>
-            <a:pPr>
-              <a:spcAft>
-                <a:spcPts val="800"/>
-              </a:spcAft>
-            </a:pPr>
-            <a:r>
-              <a:rPr sz="1600" b="0" i="0">
+              <a:t>□ Hay PK/FK visibles en el ER?</a:t>
+            </a:r>
+          </a:p>
+        </p:txBody>
+      </p:sp>
+      <p:sp>
+        <p:nvSpPr>
+          <p:cNvPr id="21" name="Rounded Rectangle 20"/>
+          <p:cNvSpPr/>
+          <p:nvPr/>
+        </p:nvSpPr>
+        <p:spPr>
+          <a:xfrm>
+            <a:off x="457200" y="3968496"/>
+            <a:ext cx="11277295" cy="566928"/>
+          </a:xfrm>
+          <a:prstGeom prst="roundRect">
+            <a:avLst>
+              <a:gd name="adj" fmla="val 12000"/>
+            </a:avLst>
+          </a:prstGeom>
+          <a:solidFill>
+            <a:srgbClr val="F2F2F2"/>
+          </a:solidFill>
+          <a:ln>
+            <a:noFill/>
+          </a:ln>
+        </p:spPr>
+        <p:style>
+          <a:lnRef idx="1">
+            <a:schemeClr val="accent1"/>
+          </a:lnRef>
+          <a:fillRef idx="3">
+            <a:schemeClr val="accent1"/>
+          </a:fillRef>
+          <a:effectRef idx="2">
+            <a:schemeClr val="accent1"/>
+          </a:effectRef>
+          <a:fontRef idx="minor">
+            <a:schemeClr val="lt1"/>
+          </a:fontRef>
+        </p:style>
+        <p:txBody>
+          <a:bodyPr rtlCol="0" anchor="ctr"/>
+          <a:lstStyle/>
+          <a:p>
+            <a:pPr algn="ctr"/>
+          </a:p>
+        </p:txBody>
+      </p:sp>
+      <p:sp>
+        <p:nvSpPr>
+          <p:cNvPr id="22" name="Rectangle 21"/>
+          <p:cNvSpPr/>
+          <p:nvPr/>
+        </p:nvSpPr>
+        <p:spPr>
+          <a:xfrm>
+            <a:off x="640080" y="4114800"/>
+            <a:ext cx="274320" cy="274320"/>
+          </a:xfrm>
+          <a:prstGeom prst="rect">
+            <a:avLst/>
+          </a:prstGeom>
+          <a:solidFill>
+            <a:srgbClr val="FFFFFF"/>
+          </a:solidFill>
+          <a:ln>
+            <a:solidFill>
+              <a:srgbClr val="333333"/>
+            </a:solidFill>
+          </a:ln>
+        </p:spPr>
+        <p:style>
+          <a:lnRef idx="1">
+            <a:schemeClr val="accent1"/>
+          </a:lnRef>
+          <a:fillRef idx="3">
+            <a:schemeClr val="accent1"/>
+          </a:fillRef>
+          <a:effectRef idx="2">
+            <a:schemeClr val="accent1"/>
+          </a:effectRef>
+          <a:fontRef idx="minor">
+            <a:schemeClr val="lt1"/>
+          </a:fontRef>
+        </p:style>
+        <p:txBody>
+          <a:bodyPr rtlCol="0" anchor="ctr"/>
+          <a:lstStyle/>
+          <a:p>
+            <a:pPr algn="ctr"/>
+          </a:p>
+        </p:txBody>
+      </p:sp>
+      <p:sp>
+        <p:nvSpPr>
+          <p:cNvPr id="23" name="Rectangle 22"/>
+          <p:cNvSpPr/>
+          <p:nvPr/>
+        </p:nvSpPr>
+        <p:spPr>
+          <a:xfrm>
+            <a:off x="640080" y="4114800"/>
+            <a:ext cx="73152" cy="274320"/>
+          </a:xfrm>
+          <a:prstGeom prst="rect">
+            <a:avLst/>
+          </a:prstGeom>
+          <a:solidFill>
+            <a:srgbClr val="269CCB"/>
+          </a:solidFill>
+          <a:ln>
+            <a:noFill/>
+          </a:ln>
+        </p:spPr>
+        <p:style>
+          <a:lnRef idx="1">
+            <a:schemeClr val="accent1"/>
+          </a:lnRef>
+          <a:fillRef idx="3">
+            <a:schemeClr val="accent1"/>
+          </a:fillRef>
+          <a:effectRef idx="2">
+            <a:schemeClr val="accent1"/>
+          </a:effectRef>
+          <a:fontRef idx="minor">
+            <a:schemeClr val="lt1"/>
+          </a:fontRef>
+        </p:style>
+        <p:txBody>
+          <a:bodyPr rtlCol="0" anchor="ctr"/>
+          <a:lstStyle/>
+          <a:p>
+            <a:pPr algn="ctr"/>
+          </a:p>
+        </p:txBody>
+      </p:sp>
+      <p:sp>
+        <p:nvSpPr>
+          <p:cNvPr id="24" name="TextBox 23"/>
+          <p:cNvSpPr txBox="1"/>
+          <p:nvPr/>
+        </p:nvSpPr>
+        <p:spPr>
+          <a:xfrm>
+            <a:off x="1097280" y="4059936"/>
+            <a:ext cx="10362895" cy="402336"/>
+          </a:xfrm>
+          <a:prstGeom prst="rect">
+            <a:avLst/>
+          </a:prstGeom>
+          <a:noFill/>
+        </p:spPr>
+        <p:txBody>
+          <a:bodyPr wrap="square" anchor="ctr"/>
+          <a:lstStyle/>
+          <a:p>
+            <a:r>
+              <a:rPr sz="1500" b="0" i="0">
                 <a:solidFill>
                   <a:srgbClr val="333333"/>
                 </a:solidFill>
                 <a:latin typeface="Calibri"/>
               </a:rPr>
-              <a:t>–   Actualizar checklist PI (que criterio de rubrica avanzo).</a:t>
-            </a:r>
-          </a:p>
-          <a:p>
-            <a:pPr>
-              <a:spcAft>
-                <a:spcPts val="800"/>
-              </a:spcAft>
-            </a:pPr>
-            <a:r>
-              <a:rPr sz="1600" b="0" i="0">
+              <a:t>□ Mascota inactiva / stock aparecen como regla?</a:t>
+            </a:r>
+          </a:p>
+        </p:txBody>
+      </p:sp>
+      <p:sp>
+        <p:nvSpPr>
+          <p:cNvPr id="25" name="Rounded Rectangle 24"/>
+          <p:cNvSpPr/>
+          <p:nvPr/>
+        </p:nvSpPr>
+        <p:spPr>
+          <a:xfrm>
+            <a:off x="457200" y="4645152"/>
+            <a:ext cx="11277295" cy="566928"/>
+          </a:xfrm>
+          <a:prstGeom prst="roundRect">
+            <a:avLst>
+              <a:gd name="adj" fmla="val 12000"/>
+            </a:avLst>
+          </a:prstGeom>
+          <a:solidFill>
+            <a:srgbClr val="F2F2F2"/>
+          </a:solidFill>
+          <a:ln>
+            <a:noFill/>
+          </a:ln>
+        </p:spPr>
+        <p:style>
+          <a:lnRef idx="1">
+            <a:schemeClr val="accent1"/>
+          </a:lnRef>
+          <a:fillRef idx="3">
+            <a:schemeClr val="accent1"/>
+          </a:fillRef>
+          <a:effectRef idx="2">
+            <a:schemeClr val="accent1"/>
+          </a:effectRef>
+          <a:fontRef idx="minor">
+            <a:schemeClr val="lt1"/>
+          </a:fontRef>
+        </p:style>
+        <p:txBody>
+          <a:bodyPr rtlCol="0" anchor="ctr"/>
+          <a:lstStyle/>
+          <a:p>
+            <a:pPr algn="ctr"/>
+          </a:p>
+        </p:txBody>
+      </p:sp>
+      <p:sp>
+        <p:nvSpPr>
+          <p:cNvPr id="26" name="Rectangle 25"/>
+          <p:cNvSpPr/>
+          <p:nvPr/>
+        </p:nvSpPr>
+        <p:spPr>
+          <a:xfrm>
+            <a:off x="640080" y="4791456"/>
+            <a:ext cx="274320" cy="274320"/>
+          </a:xfrm>
+          <a:prstGeom prst="rect">
+            <a:avLst/>
+          </a:prstGeom>
+          <a:solidFill>
+            <a:srgbClr val="FFFFFF"/>
+          </a:solidFill>
+          <a:ln>
+            <a:solidFill>
+              <a:srgbClr val="333333"/>
+            </a:solidFill>
+          </a:ln>
+        </p:spPr>
+        <p:style>
+          <a:lnRef idx="1">
+            <a:schemeClr val="accent1"/>
+          </a:lnRef>
+          <a:fillRef idx="3">
+            <a:schemeClr val="accent1"/>
+          </a:fillRef>
+          <a:effectRef idx="2">
+            <a:schemeClr val="accent1"/>
+          </a:effectRef>
+          <a:fontRef idx="minor">
+            <a:schemeClr val="lt1"/>
+          </a:fontRef>
+        </p:style>
+        <p:txBody>
+          <a:bodyPr rtlCol="0" anchor="ctr"/>
+          <a:lstStyle/>
+          <a:p>
+            <a:pPr algn="ctr"/>
+          </a:p>
+        </p:txBody>
+      </p:sp>
+      <p:sp>
+        <p:nvSpPr>
+          <p:cNvPr id="27" name="Rectangle 26"/>
+          <p:cNvSpPr/>
+          <p:nvPr/>
+        </p:nvSpPr>
+        <p:spPr>
+          <a:xfrm>
+            <a:off x="640080" y="4791456"/>
+            <a:ext cx="73152" cy="274320"/>
+          </a:xfrm>
+          <a:prstGeom prst="rect">
+            <a:avLst/>
+          </a:prstGeom>
+          <a:solidFill>
+            <a:srgbClr val="269CCB"/>
+          </a:solidFill>
+          <a:ln>
+            <a:noFill/>
+          </a:ln>
+        </p:spPr>
+        <p:style>
+          <a:lnRef idx="1">
+            <a:schemeClr val="accent1"/>
+          </a:lnRef>
+          <a:fillRef idx="3">
+            <a:schemeClr val="accent1"/>
+          </a:fillRef>
+          <a:effectRef idx="2">
+            <a:schemeClr val="accent1"/>
+          </a:effectRef>
+          <a:fontRef idx="minor">
+            <a:schemeClr val="lt1"/>
+          </a:fontRef>
+        </p:style>
+        <p:txBody>
+          <a:bodyPr rtlCol="0" anchor="ctr"/>
+          <a:lstStyle/>
+          <a:p>
+            <a:pPr algn="ctr"/>
+          </a:p>
+        </p:txBody>
+      </p:sp>
+      <p:sp>
+        <p:nvSpPr>
+          <p:cNvPr id="28" name="TextBox 27"/>
+          <p:cNvSpPr txBox="1"/>
+          <p:nvPr/>
+        </p:nvSpPr>
+        <p:spPr>
+          <a:xfrm>
+            <a:off x="1097280" y="4736592"/>
+            <a:ext cx="10362895" cy="402336"/>
+          </a:xfrm>
+          <a:prstGeom prst="rect">
+            <a:avLst/>
+          </a:prstGeom>
+          <a:noFill/>
+        </p:spPr>
+        <p:txBody>
+          <a:bodyPr wrap="square" anchor="ctr"/>
+          <a:lstStyle/>
+          <a:p>
+            <a:r>
+              <a:rPr sz="1500" b="0" i="0">
                 <a:solidFill>
                   <a:srgbClr val="333333"/>
                 </a:solidFill>
                 <a:latin typeface="Calibri"/>
               </a:rPr>
-              <a:t>–   </a:t>
-            </a:r>
-            <a:r>
-              <a:rPr sz="1600" b="1" i="0">
-                <a:solidFill>
-                  <a:srgbClr val="333333"/>
-                </a:solidFill>
-                <a:latin typeface="Calibri"/>
-              </a:rPr>
-              <a:t>Entrega en ExamLab</a:t>
-            </a:r>
-            <a:r>
-              <a:rPr sz="1600" b="0" i="0">
-                <a:solidFill>
-                  <a:srgbClr val="333333"/>
-                </a:solidFill>
-                <a:latin typeface="Calibri"/>
-              </a:rPr>
-              <a:t> (https://uniaj.examlab.workers.dev/) — domingo 23:59 cuando aplique taller.</a:t>
-            </a:r>
-          </a:p>
-        </p:txBody>
-      </p:sp>
-      <p:sp>
-        <p:nvSpPr>
-          <p:cNvPr id="6" name="TextBox 5"/>
+              <a:t>□ El alcance evita scope infinito?</a:t>
+            </a:r>
+          </a:p>
+        </p:txBody>
+      </p:sp>
+      <p:sp>
+        <p:nvSpPr>
+          <p:cNvPr id="29" name="TextBox 28"/>
           <p:cNvSpPr txBox="1"/>
           <p:nvPr/>
         </p:nvSpPr>
@@ -6062,109 +6540,21 @@
                 </a:solidFill>
                 <a:latin typeface="Calibri"/>
               </a:rPr>
-              <a:t>Para el PI esta semana</a:t>
-            </a:r>
-          </a:p>
-        </p:txBody>
-      </p:sp>
-      <p:sp>
-        <p:nvSpPr>
-          <p:cNvPr id="5" name="Rounded Rectangle 4"/>
-          <p:cNvSpPr/>
-          <p:nvPr/>
-        </p:nvSpPr>
-        <p:spPr>
-          <a:xfrm>
-            <a:off x="457200" y="1261872"/>
-            <a:ext cx="11277295" cy="1051560"/>
-          </a:xfrm>
-          <a:prstGeom prst="roundRect">
-            <a:avLst>
-              <a:gd name="adj" fmla="val 12000"/>
-            </a:avLst>
-          </a:prstGeom>
-          <a:solidFill>
-            <a:srgbClr val="E8F4FA"/>
-          </a:solidFill>
-          <a:ln>
-            <a:noFill/>
-          </a:ln>
-        </p:spPr>
-        <p:style>
-          <a:lnRef idx="1">
-            <a:schemeClr val="accent1"/>
-          </a:lnRef>
-          <a:fillRef idx="3">
-            <a:schemeClr val="accent1"/>
-          </a:fillRef>
-          <a:effectRef idx="2">
-            <a:schemeClr val="accent1"/>
-          </a:effectRef>
-          <a:fontRef idx="minor">
-            <a:schemeClr val="lt1"/>
-          </a:fontRef>
-        </p:style>
-        <p:txBody>
-          <a:bodyPr rtlCol="0" anchor="ctr"/>
-          <a:lstStyle/>
-          <a:p>
-            <a:pPr algn="ctr"/>
-          </a:p>
-        </p:txBody>
-      </p:sp>
-      <p:sp>
-        <p:nvSpPr>
-          <p:cNvPr id="6" name="Rectangle 5"/>
-          <p:cNvSpPr/>
-          <p:nvPr/>
-        </p:nvSpPr>
-        <p:spPr>
-          <a:xfrm>
-            <a:off x="457200" y="1261872"/>
-            <a:ext cx="128016" cy="1051560"/>
-          </a:xfrm>
-          <a:prstGeom prst="rect">
-            <a:avLst/>
-          </a:prstGeom>
-          <a:solidFill>
-            <a:srgbClr val="269CCB"/>
-          </a:solidFill>
-          <a:ln>
-            <a:noFill/>
-          </a:ln>
-        </p:spPr>
-        <p:style>
-          <a:lnRef idx="1">
-            <a:schemeClr val="accent1"/>
-          </a:lnRef>
-          <a:fillRef idx="3">
-            <a:schemeClr val="accent1"/>
-          </a:fillRef>
-          <a:effectRef idx="2">
-            <a:schemeClr val="accent1"/>
-          </a:effectRef>
-          <a:fontRef idx="minor">
-            <a:schemeClr val="lt1"/>
-          </a:fontRef>
-        </p:style>
-        <p:txBody>
-          <a:bodyPr rtlCol="0" anchor="ctr"/>
-          <a:lstStyle/>
-          <a:p>
-            <a:pPr algn="ctr"/>
-          </a:p>
-        </p:txBody>
-      </p:sp>
-      <p:sp>
-        <p:nvSpPr>
-          <p:cNvPr id="7" name="TextBox 6"/>
+              <a:t>Criterios de exito / entregable</a:t>
+            </a:r>
+          </a:p>
+        </p:txBody>
+      </p:sp>
+      <p:sp>
+        <p:nvSpPr>
+          <p:cNvPr id="5" name="TextBox 4"/>
           <p:cNvSpPr txBox="1"/>
           <p:nvPr/>
         </p:nvSpPr>
         <p:spPr>
           <a:xfrm>
-            <a:off x="777240" y="1399031"/>
-            <a:ext cx="10774375" cy="822959"/>
+            <a:off x="457200" y="1170432"/>
+            <a:ext cx="11277295" cy="5230368"/>
           </a:xfrm>
           <a:prstGeom prst="rect">
             <a:avLst/>
@@ -6177,313 +6567,110 @@
           </a:bodyPr>
           <a:lstStyle/>
           <a:p>
-            <a:r>
-              <a:rPr sz="1200" b="1" i="0">
-                <a:solidFill>
-                  <a:srgbClr val="269CCB"/>
-                </a:solidFill>
-                <a:latin typeface="Calibri"/>
-              </a:rPr>
-              <a:t>Info</a:t>
-            </a:r>
-          </a:p>
-          <a:p>
             <a:pPr>
-              <a:spcBef>
-                <a:spcPts val="400"/>
-              </a:spcBef>
+              <a:spcAft>
+                <a:spcPts val="800"/>
+              </a:spcAft>
             </a:pPr>
             <a:r>
-              <a:rPr sz="1400" b="0" i="0">
+              <a:rPr sz="1600" b="0" i="0">
                 <a:solidFill>
                   <a:srgbClr val="333333"/>
                 </a:solidFill>
                 <a:latin typeface="Calibri"/>
               </a:rPr>
-              <a:t>Hito: Arranque PI: dominio, alcance y borrador ER de VetCare DB</a:t>
-            </a:r>
-          </a:p>
-        </p:txBody>
-      </p:sp>
-      <p:sp>
-        <p:nvSpPr>
-          <p:cNvPr id="8" name="Rounded Rectangle 7"/>
-          <p:cNvSpPr/>
-          <p:nvPr/>
-        </p:nvSpPr>
-        <p:spPr>
-          <a:xfrm>
-            <a:off x="457200" y="2478024"/>
-            <a:ext cx="11277295" cy="1051560"/>
-          </a:xfrm>
-          <a:prstGeom prst="roundRect">
-            <a:avLst>
-              <a:gd name="adj" fmla="val 12000"/>
-            </a:avLst>
-          </a:prstGeom>
-          <a:solidFill>
-            <a:srgbClr val="FFF8E1"/>
-          </a:solidFill>
-          <a:ln>
-            <a:noFill/>
-          </a:ln>
-        </p:spPr>
-        <p:style>
-          <a:lnRef idx="1">
-            <a:schemeClr val="accent1"/>
-          </a:lnRef>
-          <a:fillRef idx="3">
-            <a:schemeClr val="accent1"/>
-          </a:fillRef>
-          <a:effectRef idx="2">
-            <a:schemeClr val="accent1"/>
-          </a:effectRef>
-          <a:fontRef idx="minor">
-            <a:schemeClr val="lt1"/>
-          </a:fontRef>
-        </p:style>
-        <p:txBody>
-          <a:bodyPr rtlCol="0" anchor="ctr"/>
-          <a:lstStyle/>
-          <a:p>
-            <a:pPr algn="ctr"/>
-          </a:p>
-        </p:txBody>
-      </p:sp>
-      <p:sp>
-        <p:nvSpPr>
-          <p:cNvPr id="9" name="Rectangle 8"/>
-          <p:cNvSpPr/>
-          <p:nvPr/>
-        </p:nvSpPr>
-        <p:spPr>
-          <a:xfrm>
-            <a:off x="457200" y="2478024"/>
-            <a:ext cx="128016" cy="1051560"/>
-          </a:xfrm>
-          <a:prstGeom prst="rect">
-            <a:avLst/>
-          </a:prstGeom>
-          <a:solidFill>
-            <a:srgbClr val="FFD000"/>
-          </a:solidFill>
-          <a:ln>
-            <a:noFill/>
-          </a:ln>
-        </p:spPr>
-        <p:style>
-          <a:lnRef idx="1">
-            <a:schemeClr val="accent1"/>
-          </a:lnRef>
-          <a:fillRef idx="3">
-            <a:schemeClr val="accent1"/>
-          </a:fillRef>
-          <a:effectRef idx="2">
-            <a:schemeClr val="accent1"/>
-          </a:effectRef>
-          <a:fontRef idx="minor">
-            <a:schemeClr val="lt1"/>
-          </a:fontRef>
-        </p:style>
-        <p:txBody>
-          <a:bodyPr rtlCol="0" anchor="ctr"/>
-          <a:lstStyle/>
-          <a:p>
-            <a:pPr algn="ctr"/>
-          </a:p>
-        </p:txBody>
-      </p:sp>
-      <p:sp>
-        <p:nvSpPr>
-          <p:cNvPr id="10" name="TextBox 9"/>
-          <p:cNvSpPr txBox="1"/>
-          <p:nvPr/>
-        </p:nvSpPr>
-        <p:spPr>
-          <a:xfrm>
-            <a:off x="777240" y="2615184"/>
-            <a:ext cx="10774375" cy="822959"/>
-          </a:xfrm>
-          <a:prstGeom prst="rect">
-            <a:avLst/>
-          </a:prstGeom>
-          <a:noFill/>
-        </p:spPr>
-        <p:txBody>
-          <a:bodyPr wrap="square">
-            <a:spAutoFit/>
-          </a:bodyPr>
-          <a:lstStyle/>
-          <a:p>
-            <a:r>
-              <a:rPr sz="1200" b="1" i="0">
-                <a:solidFill>
-                  <a:srgbClr val="FFD000"/>
-                </a:solidFill>
-                <a:latin typeface="Calibri"/>
-              </a:rPr>
-              <a:t>Aclaración</a:t>
+              <a:t>–   </a:t>
+            </a:r>
+            <a:r>
+              <a:rPr sz="1600" b="1" i="0">
+                <a:solidFill>
+                  <a:srgbClr val="333333"/>
+                </a:solidFill>
+                <a:latin typeface="Calibri"/>
+              </a:rPr>
+              <a:t>Entregable:</a:t>
+            </a:r>
+            <a:r>
+              <a:rPr sz="1600" b="0" i="0">
+                <a:solidFill>
+                  <a:srgbClr val="333333"/>
+                </a:solidFill>
+                <a:latin typeface="Calibri"/>
+              </a:rPr>
+              <a:t> Ficha del PI (plantilla) + ER en Mermaid renderizado en ExamLab (PNG para tu carpeta) + 3 reglas Condicion -&gt; Accion</a:t>
             </a:r>
           </a:p>
           <a:p>
             <a:pPr>
-              <a:spcBef>
-                <a:spcPts val="400"/>
-              </a:spcBef>
+              <a:spcAft>
+                <a:spcPts val="800"/>
+              </a:spcAft>
             </a:pPr>
             <a:r>
-              <a:rPr sz="1400" b="0" i="0">
+              <a:rPr sz="1600" b="0" i="0">
                 <a:solidFill>
                   <a:srgbClr val="333333"/>
                 </a:solidFill>
                 <a:latin typeface="Calibri"/>
               </a:rPr>
-              <a:t>Enunciado completo: Clases/Proyecto Integrador/ (VetCare DB).</a:t>
-            </a:r>
-          </a:p>
-        </p:txBody>
-      </p:sp>
-      <p:sp>
-        <p:nvSpPr>
-          <p:cNvPr id="11" name="Rounded Rectangle 10"/>
-          <p:cNvSpPr/>
-          <p:nvPr/>
-        </p:nvSpPr>
-        <p:spPr>
-          <a:xfrm>
-            <a:off x="457200" y="3694176"/>
-            <a:ext cx="11277295" cy="1051560"/>
-          </a:xfrm>
-          <a:prstGeom prst="roundRect">
-            <a:avLst>
-              <a:gd name="adj" fmla="val 12000"/>
-            </a:avLst>
-          </a:prstGeom>
-          <a:solidFill>
-            <a:srgbClr val="FBE4E4"/>
-          </a:solidFill>
-          <a:ln>
-            <a:noFill/>
-          </a:ln>
-        </p:spPr>
-        <p:style>
-          <a:lnRef idx="1">
-            <a:schemeClr val="accent1"/>
-          </a:lnRef>
-          <a:fillRef idx="3">
-            <a:schemeClr val="accent1"/>
-          </a:fillRef>
-          <a:effectRef idx="2">
-            <a:schemeClr val="accent1"/>
-          </a:effectRef>
-          <a:fontRef idx="minor">
-            <a:schemeClr val="lt1"/>
-          </a:fontRef>
-        </p:style>
-        <p:txBody>
-          <a:bodyPr rtlCol="0" anchor="ctr"/>
-          <a:lstStyle/>
-          <a:p>
-            <a:pPr algn="ctr"/>
-          </a:p>
-        </p:txBody>
-      </p:sp>
-      <p:sp>
-        <p:nvSpPr>
-          <p:cNvPr id="12" name="Rectangle 11"/>
-          <p:cNvSpPr/>
-          <p:nvPr/>
-        </p:nvSpPr>
-        <p:spPr>
-          <a:xfrm>
-            <a:off x="457200" y="3694176"/>
-            <a:ext cx="128016" cy="1051560"/>
-          </a:xfrm>
-          <a:prstGeom prst="rect">
-            <a:avLst/>
-          </a:prstGeom>
-          <a:solidFill>
-            <a:srgbClr val="A02030"/>
-          </a:solidFill>
-          <a:ln>
-            <a:noFill/>
-          </a:ln>
-        </p:spPr>
-        <p:style>
-          <a:lnRef idx="1">
-            <a:schemeClr val="accent1"/>
-          </a:lnRef>
-          <a:fillRef idx="3">
-            <a:schemeClr val="accent1"/>
-          </a:fillRef>
-          <a:effectRef idx="2">
-            <a:schemeClr val="accent1"/>
-          </a:effectRef>
-          <a:fontRef idx="minor">
-            <a:schemeClr val="lt1"/>
-          </a:fontRef>
-        </p:style>
-        <p:txBody>
-          <a:bodyPr rtlCol="0" anchor="ctr"/>
-          <a:lstStyle/>
-          <a:p>
-            <a:pPr algn="ctr"/>
-          </a:p>
-        </p:txBody>
-      </p:sp>
-      <p:sp>
-        <p:nvSpPr>
-          <p:cNvPr id="13" name="TextBox 12"/>
-          <p:cNvSpPr txBox="1"/>
-          <p:nvPr/>
-        </p:nvSpPr>
-        <p:spPr>
-          <a:xfrm>
-            <a:off x="777240" y="3831336"/>
-            <a:ext cx="10774375" cy="822959"/>
-          </a:xfrm>
-          <a:prstGeom prst="rect">
-            <a:avLst/>
-          </a:prstGeom>
-          <a:noFill/>
-        </p:spPr>
-        <p:txBody>
-          <a:bodyPr wrap="square">
-            <a:spAutoFit/>
-          </a:bodyPr>
-          <a:lstStyle/>
-          <a:p>
-            <a:r>
-              <a:rPr sz="1200" b="1" i="0">
-                <a:solidFill>
-                  <a:srgbClr val="A02030"/>
-                </a:solidFill>
-                <a:latin typeface="Calibri"/>
-              </a:rPr>
-              <a:t>Atención</a:t>
+              <a:t>–   Evidencia en playground (enlace) o archivo SQL/PNG propio.</a:t>
             </a:r>
           </a:p>
           <a:p>
             <a:pPr>
-              <a:spcBef>
-                <a:spcPts val="400"/>
-              </a:spcBef>
+              <a:spcAft>
+                <a:spcPts val="800"/>
+              </a:spcAft>
             </a:pPr>
             <a:r>
-              <a:rPr sz="1400" b="0" i="0">
+              <a:rPr sz="1600" b="0" i="0">
                 <a:solidFill>
                   <a:srgbClr val="333333"/>
                 </a:solidFill>
                 <a:latin typeface="Calibri"/>
               </a:rPr>
-              <a:t>Taller de la semana en ExamLab (https://uniaj.examlab.workers.dev/): domingo 23:59 (regla del Acuerdo) cuando aplique.</a:t>
-            </a:r>
-          </a:p>
-        </p:txBody>
-      </p:sp>
-      <p:sp>
-        <p:nvSpPr>
-          <p:cNvPr id="14" name="TextBox 13"/>
+              <a:t>–   Actualizar checklist PI (que criterio de rubrica avanzo).</a:t>
+            </a:r>
+          </a:p>
+          <a:p>
+            <a:pPr>
+              <a:spcAft>
+                <a:spcPts val="800"/>
+              </a:spcAft>
+            </a:pPr>
+            <a:r>
+              <a:rPr sz="1600" b="0" i="0">
+                <a:solidFill>
+                  <a:srgbClr val="333333"/>
+                </a:solidFill>
+                <a:latin typeface="Calibri"/>
+              </a:rPr>
+              <a:t>–   </a:t>
+            </a:r>
+            <a:r>
+              <a:rPr sz="1600" b="1" i="0">
+                <a:solidFill>
+                  <a:srgbClr val="333333"/>
+                </a:solidFill>
+                <a:latin typeface="Calibri"/>
+              </a:rPr>
+              <a:t>Entrega en ExamLab</a:t>
+            </a:r>
+            <a:r>
+              <a:rPr sz="1600" b="0" i="0">
+                <a:solidFill>
+                  <a:srgbClr val="333333"/>
+                </a:solidFill>
+                <a:latin typeface="Calibri"/>
+              </a:rPr>
+              <a:t> (https://uniaj.examlab.workers.dev/) — domingo 23:59 cuando aplique taller.</a:t>
+            </a:r>
+          </a:p>
+        </p:txBody>
+      </p:sp>
+      <p:sp>
+        <p:nvSpPr>
+          <p:cNvPr id="6" name="TextBox 5"/>
           <p:cNvSpPr txBox="1"/>
           <p:nvPr/>
         </p:nvSpPr>
@@ -6551,6 +6738,601 @@
         <p:spPr>
           <a:xfrm>
             <a:off x="0" y="0"/>
+            <a:ext cx="12191695" cy="960120"/>
+          </a:xfrm>
+          <a:prstGeom prst="rect">
+            <a:avLst/>
+          </a:prstGeom>
+          <a:solidFill>
+            <a:srgbClr val="095292"/>
+          </a:solidFill>
+          <a:ln>
+            <a:noFill/>
+          </a:ln>
+        </p:spPr>
+        <p:style>
+          <a:lnRef idx="1">
+            <a:schemeClr val="accent1"/>
+          </a:lnRef>
+          <a:fillRef idx="3">
+            <a:schemeClr val="accent1"/>
+          </a:fillRef>
+          <a:effectRef idx="2">
+            <a:schemeClr val="accent1"/>
+          </a:effectRef>
+          <a:fontRef idx="minor">
+            <a:schemeClr val="lt1"/>
+          </a:fontRef>
+        </p:style>
+        <p:txBody>
+          <a:bodyPr rtlCol="0" anchor="ctr"/>
+          <a:lstStyle/>
+          <a:p>
+            <a:pPr algn="ctr"/>
+          </a:p>
+        </p:txBody>
+      </p:sp>
+      <p:sp>
+        <p:nvSpPr>
+          <p:cNvPr id="3" name="Rectangle 2"/>
+          <p:cNvSpPr/>
+          <p:nvPr/>
+        </p:nvSpPr>
+        <p:spPr>
+          <a:xfrm>
+            <a:off x="0" y="960120"/>
+            <a:ext cx="12191695" cy="41148"/>
+          </a:xfrm>
+          <a:prstGeom prst="rect">
+            <a:avLst/>
+          </a:prstGeom>
+          <a:solidFill>
+            <a:srgbClr val="FFD000"/>
+          </a:solidFill>
+          <a:ln>
+            <a:noFill/>
+          </a:ln>
+        </p:spPr>
+        <p:style>
+          <a:lnRef idx="1">
+            <a:schemeClr val="accent1"/>
+          </a:lnRef>
+          <a:fillRef idx="3">
+            <a:schemeClr val="accent1"/>
+          </a:fillRef>
+          <a:effectRef idx="2">
+            <a:schemeClr val="accent1"/>
+          </a:effectRef>
+          <a:fontRef idx="minor">
+            <a:schemeClr val="lt1"/>
+          </a:fontRef>
+        </p:style>
+        <p:txBody>
+          <a:bodyPr rtlCol="0" anchor="ctr"/>
+          <a:lstStyle/>
+          <a:p>
+            <a:pPr algn="ctr"/>
+          </a:p>
+        </p:txBody>
+      </p:sp>
+      <p:sp>
+        <p:nvSpPr>
+          <p:cNvPr id="4" name="TextBox 3"/>
+          <p:cNvSpPr txBox="1"/>
+          <p:nvPr/>
+        </p:nvSpPr>
+        <p:spPr>
+          <a:xfrm>
+            <a:off x="457200" y="164592"/>
+            <a:ext cx="11277295" cy="502920"/>
+          </a:xfrm>
+          <a:prstGeom prst="rect">
+            <a:avLst/>
+          </a:prstGeom>
+          <a:noFill/>
+        </p:spPr>
+        <p:txBody>
+          <a:bodyPr wrap="square">
+            <a:spAutoFit/>
+          </a:bodyPr>
+          <a:lstStyle/>
+          <a:p>
+            <a:r>
+              <a:rPr sz="2600" b="1" i="0">
+                <a:solidFill>
+                  <a:srgbClr val="FFFFFF"/>
+                </a:solidFill>
+                <a:latin typeface="Calibri"/>
+              </a:rPr>
+              <a:t>Para el PI esta semana</a:t>
+            </a:r>
+          </a:p>
+        </p:txBody>
+      </p:sp>
+      <p:sp>
+        <p:nvSpPr>
+          <p:cNvPr id="5" name="Rounded Rectangle 4"/>
+          <p:cNvSpPr/>
+          <p:nvPr/>
+        </p:nvSpPr>
+        <p:spPr>
+          <a:xfrm>
+            <a:off x="457200" y="1261872"/>
+            <a:ext cx="11277295" cy="1051560"/>
+          </a:xfrm>
+          <a:prstGeom prst="roundRect">
+            <a:avLst>
+              <a:gd name="adj" fmla="val 12000"/>
+            </a:avLst>
+          </a:prstGeom>
+          <a:solidFill>
+            <a:srgbClr val="E8F4FA"/>
+          </a:solidFill>
+          <a:ln>
+            <a:noFill/>
+          </a:ln>
+        </p:spPr>
+        <p:style>
+          <a:lnRef idx="1">
+            <a:schemeClr val="accent1"/>
+          </a:lnRef>
+          <a:fillRef idx="3">
+            <a:schemeClr val="accent1"/>
+          </a:fillRef>
+          <a:effectRef idx="2">
+            <a:schemeClr val="accent1"/>
+          </a:effectRef>
+          <a:fontRef idx="minor">
+            <a:schemeClr val="lt1"/>
+          </a:fontRef>
+        </p:style>
+        <p:txBody>
+          <a:bodyPr rtlCol="0" anchor="ctr"/>
+          <a:lstStyle/>
+          <a:p>
+            <a:pPr algn="ctr"/>
+          </a:p>
+        </p:txBody>
+      </p:sp>
+      <p:sp>
+        <p:nvSpPr>
+          <p:cNvPr id="6" name="Rectangle 5"/>
+          <p:cNvSpPr/>
+          <p:nvPr/>
+        </p:nvSpPr>
+        <p:spPr>
+          <a:xfrm>
+            <a:off x="457200" y="1261872"/>
+            <a:ext cx="128016" cy="1051560"/>
+          </a:xfrm>
+          <a:prstGeom prst="rect">
+            <a:avLst/>
+          </a:prstGeom>
+          <a:solidFill>
+            <a:srgbClr val="269CCB"/>
+          </a:solidFill>
+          <a:ln>
+            <a:noFill/>
+          </a:ln>
+        </p:spPr>
+        <p:style>
+          <a:lnRef idx="1">
+            <a:schemeClr val="accent1"/>
+          </a:lnRef>
+          <a:fillRef idx="3">
+            <a:schemeClr val="accent1"/>
+          </a:fillRef>
+          <a:effectRef idx="2">
+            <a:schemeClr val="accent1"/>
+          </a:effectRef>
+          <a:fontRef idx="minor">
+            <a:schemeClr val="lt1"/>
+          </a:fontRef>
+        </p:style>
+        <p:txBody>
+          <a:bodyPr rtlCol="0" anchor="ctr"/>
+          <a:lstStyle/>
+          <a:p>
+            <a:pPr algn="ctr"/>
+          </a:p>
+        </p:txBody>
+      </p:sp>
+      <p:sp>
+        <p:nvSpPr>
+          <p:cNvPr id="7" name="TextBox 6"/>
+          <p:cNvSpPr txBox="1"/>
+          <p:nvPr/>
+        </p:nvSpPr>
+        <p:spPr>
+          <a:xfrm>
+            <a:off x="777240" y="1399031"/>
+            <a:ext cx="10774375" cy="822959"/>
+          </a:xfrm>
+          <a:prstGeom prst="rect">
+            <a:avLst/>
+          </a:prstGeom>
+          <a:noFill/>
+        </p:spPr>
+        <p:txBody>
+          <a:bodyPr wrap="square">
+            <a:spAutoFit/>
+          </a:bodyPr>
+          <a:lstStyle/>
+          <a:p>
+            <a:r>
+              <a:rPr sz="1200" b="1" i="0">
+                <a:solidFill>
+                  <a:srgbClr val="269CCB"/>
+                </a:solidFill>
+                <a:latin typeface="Calibri"/>
+              </a:rPr>
+              <a:t>Info</a:t>
+            </a:r>
+          </a:p>
+          <a:p>
+            <a:pPr>
+              <a:spcBef>
+                <a:spcPts val="400"/>
+              </a:spcBef>
+            </a:pPr>
+            <a:r>
+              <a:rPr sz="1400" b="0" i="0">
+                <a:solidFill>
+                  <a:srgbClr val="333333"/>
+                </a:solidFill>
+                <a:latin typeface="Calibri"/>
+              </a:rPr>
+              <a:t>Hito: Arranque PI: dominio, alcance y borrador ER de VetCare DB</a:t>
+            </a:r>
+          </a:p>
+        </p:txBody>
+      </p:sp>
+      <p:sp>
+        <p:nvSpPr>
+          <p:cNvPr id="8" name="Rounded Rectangle 7"/>
+          <p:cNvSpPr/>
+          <p:nvPr/>
+        </p:nvSpPr>
+        <p:spPr>
+          <a:xfrm>
+            <a:off x="457200" y="2478024"/>
+            <a:ext cx="11277295" cy="1051560"/>
+          </a:xfrm>
+          <a:prstGeom prst="roundRect">
+            <a:avLst>
+              <a:gd name="adj" fmla="val 12000"/>
+            </a:avLst>
+          </a:prstGeom>
+          <a:solidFill>
+            <a:srgbClr val="FFF8E1"/>
+          </a:solidFill>
+          <a:ln>
+            <a:noFill/>
+          </a:ln>
+        </p:spPr>
+        <p:style>
+          <a:lnRef idx="1">
+            <a:schemeClr val="accent1"/>
+          </a:lnRef>
+          <a:fillRef idx="3">
+            <a:schemeClr val="accent1"/>
+          </a:fillRef>
+          <a:effectRef idx="2">
+            <a:schemeClr val="accent1"/>
+          </a:effectRef>
+          <a:fontRef idx="minor">
+            <a:schemeClr val="lt1"/>
+          </a:fontRef>
+        </p:style>
+        <p:txBody>
+          <a:bodyPr rtlCol="0" anchor="ctr"/>
+          <a:lstStyle/>
+          <a:p>
+            <a:pPr algn="ctr"/>
+          </a:p>
+        </p:txBody>
+      </p:sp>
+      <p:sp>
+        <p:nvSpPr>
+          <p:cNvPr id="9" name="Rectangle 8"/>
+          <p:cNvSpPr/>
+          <p:nvPr/>
+        </p:nvSpPr>
+        <p:spPr>
+          <a:xfrm>
+            <a:off x="457200" y="2478024"/>
+            <a:ext cx="128016" cy="1051560"/>
+          </a:xfrm>
+          <a:prstGeom prst="rect">
+            <a:avLst/>
+          </a:prstGeom>
+          <a:solidFill>
+            <a:srgbClr val="FFD000"/>
+          </a:solidFill>
+          <a:ln>
+            <a:noFill/>
+          </a:ln>
+        </p:spPr>
+        <p:style>
+          <a:lnRef idx="1">
+            <a:schemeClr val="accent1"/>
+          </a:lnRef>
+          <a:fillRef idx="3">
+            <a:schemeClr val="accent1"/>
+          </a:fillRef>
+          <a:effectRef idx="2">
+            <a:schemeClr val="accent1"/>
+          </a:effectRef>
+          <a:fontRef idx="minor">
+            <a:schemeClr val="lt1"/>
+          </a:fontRef>
+        </p:style>
+        <p:txBody>
+          <a:bodyPr rtlCol="0" anchor="ctr"/>
+          <a:lstStyle/>
+          <a:p>
+            <a:pPr algn="ctr"/>
+          </a:p>
+        </p:txBody>
+      </p:sp>
+      <p:sp>
+        <p:nvSpPr>
+          <p:cNvPr id="10" name="TextBox 9"/>
+          <p:cNvSpPr txBox="1"/>
+          <p:nvPr/>
+        </p:nvSpPr>
+        <p:spPr>
+          <a:xfrm>
+            <a:off x="777240" y="2615184"/>
+            <a:ext cx="10774375" cy="822959"/>
+          </a:xfrm>
+          <a:prstGeom prst="rect">
+            <a:avLst/>
+          </a:prstGeom>
+          <a:noFill/>
+        </p:spPr>
+        <p:txBody>
+          <a:bodyPr wrap="square">
+            <a:spAutoFit/>
+          </a:bodyPr>
+          <a:lstStyle/>
+          <a:p>
+            <a:r>
+              <a:rPr sz="1200" b="1" i="0">
+                <a:solidFill>
+                  <a:srgbClr val="FFD000"/>
+                </a:solidFill>
+                <a:latin typeface="Calibri"/>
+              </a:rPr>
+              <a:t>Aclaración</a:t>
+            </a:r>
+          </a:p>
+          <a:p>
+            <a:pPr>
+              <a:spcBef>
+                <a:spcPts val="400"/>
+              </a:spcBef>
+            </a:pPr>
+            <a:r>
+              <a:rPr sz="1400" b="0" i="0">
+                <a:solidFill>
+                  <a:srgbClr val="333333"/>
+                </a:solidFill>
+                <a:latin typeface="Calibri"/>
+              </a:rPr>
+              <a:t>Enunciado completo: Clases/Proyecto Integrador/ (VetCare DB).</a:t>
+            </a:r>
+          </a:p>
+        </p:txBody>
+      </p:sp>
+      <p:sp>
+        <p:nvSpPr>
+          <p:cNvPr id="11" name="Rounded Rectangle 10"/>
+          <p:cNvSpPr/>
+          <p:nvPr/>
+        </p:nvSpPr>
+        <p:spPr>
+          <a:xfrm>
+            <a:off x="457200" y="3694176"/>
+            <a:ext cx="11277295" cy="1051560"/>
+          </a:xfrm>
+          <a:prstGeom prst="roundRect">
+            <a:avLst>
+              <a:gd name="adj" fmla="val 12000"/>
+            </a:avLst>
+          </a:prstGeom>
+          <a:solidFill>
+            <a:srgbClr val="FBE4E4"/>
+          </a:solidFill>
+          <a:ln>
+            <a:noFill/>
+          </a:ln>
+        </p:spPr>
+        <p:style>
+          <a:lnRef idx="1">
+            <a:schemeClr val="accent1"/>
+          </a:lnRef>
+          <a:fillRef idx="3">
+            <a:schemeClr val="accent1"/>
+          </a:fillRef>
+          <a:effectRef idx="2">
+            <a:schemeClr val="accent1"/>
+          </a:effectRef>
+          <a:fontRef idx="minor">
+            <a:schemeClr val="lt1"/>
+          </a:fontRef>
+        </p:style>
+        <p:txBody>
+          <a:bodyPr rtlCol="0" anchor="ctr"/>
+          <a:lstStyle/>
+          <a:p>
+            <a:pPr algn="ctr"/>
+          </a:p>
+        </p:txBody>
+      </p:sp>
+      <p:sp>
+        <p:nvSpPr>
+          <p:cNvPr id="12" name="Rectangle 11"/>
+          <p:cNvSpPr/>
+          <p:nvPr/>
+        </p:nvSpPr>
+        <p:spPr>
+          <a:xfrm>
+            <a:off x="457200" y="3694176"/>
+            <a:ext cx="128016" cy="1051560"/>
+          </a:xfrm>
+          <a:prstGeom prst="rect">
+            <a:avLst/>
+          </a:prstGeom>
+          <a:solidFill>
+            <a:srgbClr val="A02030"/>
+          </a:solidFill>
+          <a:ln>
+            <a:noFill/>
+          </a:ln>
+        </p:spPr>
+        <p:style>
+          <a:lnRef idx="1">
+            <a:schemeClr val="accent1"/>
+          </a:lnRef>
+          <a:fillRef idx="3">
+            <a:schemeClr val="accent1"/>
+          </a:fillRef>
+          <a:effectRef idx="2">
+            <a:schemeClr val="accent1"/>
+          </a:effectRef>
+          <a:fontRef idx="minor">
+            <a:schemeClr val="lt1"/>
+          </a:fontRef>
+        </p:style>
+        <p:txBody>
+          <a:bodyPr rtlCol="0" anchor="ctr"/>
+          <a:lstStyle/>
+          <a:p>
+            <a:pPr algn="ctr"/>
+          </a:p>
+        </p:txBody>
+      </p:sp>
+      <p:sp>
+        <p:nvSpPr>
+          <p:cNvPr id="13" name="TextBox 12"/>
+          <p:cNvSpPr txBox="1"/>
+          <p:nvPr/>
+        </p:nvSpPr>
+        <p:spPr>
+          <a:xfrm>
+            <a:off x="777240" y="3831336"/>
+            <a:ext cx="10774375" cy="822959"/>
+          </a:xfrm>
+          <a:prstGeom prst="rect">
+            <a:avLst/>
+          </a:prstGeom>
+          <a:noFill/>
+        </p:spPr>
+        <p:txBody>
+          <a:bodyPr wrap="square">
+            <a:spAutoFit/>
+          </a:bodyPr>
+          <a:lstStyle/>
+          <a:p>
+            <a:r>
+              <a:rPr sz="1200" b="1" i="0">
+                <a:solidFill>
+                  <a:srgbClr val="A02030"/>
+                </a:solidFill>
+                <a:latin typeface="Calibri"/>
+              </a:rPr>
+              <a:t>Atención</a:t>
+            </a:r>
+          </a:p>
+          <a:p>
+            <a:pPr>
+              <a:spcBef>
+                <a:spcPts val="400"/>
+              </a:spcBef>
+            </a:pPr>
+            <a:r>
+              <a:rPr sz="1400" b="0" i="0">
+                <a:solidFill>
+                  <a:srgbClr val="333333"/>
+                </a:solidFill>
+                <a:latin typeface="Calibri"/>
+              </a:rPr>
+              <a:t>Taller de la semana en ExamLab (https://uniaj.examlab.workers.dev/): domingo 23:59 (regla del Acuerdo) cuando aplique.</a:t>
+            </a:r>
+          </a:p>
+        </p:txBody>
+      </p:sp>
+      <p:sp>
+        <p:nvSpPr>
+          <p:cNvPr id="14" name="TextBox 13"/>
+          <p:cNvSpPr txBox="1"/>
+          <p:nvPr/>
+        </p:nvSpPr>
+        <p:spPr>
+          <a:xfrm>
+            <a:off x="11185855" y="6473952"/>
+            <a:ext cx="640080" cy="274320"/>
+          </a:xfrm>
+          <a:prstGeom prst="rect">
+            <a:avLst/>
+          </a:prstGeom>
+          <a:noFill/>
+        </p:spPr>
+        <p:txBody>
+          <a:bodyPr wrap="square">
+            <a:spAutoFit/>
+          </a:bodyPr>
+          <a:lstStyle/>
+          <a:p>
+            <a:pPr algn="r"/>
+            <a:r>
+              <a:rPr sz="1100" b="0" i="0">
+                <a:solidFill>
+                  <a:srgbClr val="666666"/>
+                </a:solidFill>
+                <a:latin typeface="Calibri"/>
+              </a:rPr>
+              <a:t>16</a:t>
+            </a:r>
+          </a:p>
+        </p:txBody>
+      </p:sp>
+    </p:spTree>
+  </p:cSld>
+  <p:clrMapOvr>
+    <a:masterClrMapping/>
+  </p:clrMapOvr>
+</p:sld>
+</file>
+
+<file path=ppt/slides/slide17.xml><?xml version="1.0" encoding="utf-8"?>
+<p:sld xmlns:a="http://schemas.openxmlformats.org/drawingml/2006/main" xmlns:p="http://schemas.openxmlformats.org/presentationml/2006/main" xmlns:r="http://schemas.openxmlformats.org/officeDocument/2006/relationships">
+  <p:cSld>
+    <p:bg>
+      <p:bgPr>
+        <a:solidFill>
+          <a:srgbClr val="FFFFFF"/>
+        </a:solidFill>
+        <a:effectLst/>
+      </p:bgPr>
+    </p:bg>
+    <p:spTree>
+      <p:nvGrpSpPr>
+        <p:cNvPr id="1" name=""/>
+        <p:cNvGrpSpPr/>
+        <p:nvPr/>
+      </p:nvGrpSpPr>
+      <p:grpSpPr/>
+      <p:sp>
+        <p:nvSpPr>
+          <p:cNvPr id="2" name="Rectangle 1"/>
+          <p:cNvSpPr/>
+          <p:nvPr/>
+        </p:nvSpPr>
+        <p:spPr>
+          <a:xfrm>
+            <a:off x="0" y="0"/>
             <a:ext cx="12191695" cy="164592"/>
           </a:xfrm>
           <a:prstGeom prst="rect">
@@ -6692,7 +7474,7 @@
                 </a:solidFill>
                 <a:latin typeface="Calibri"/>
               </a:rPr>
-              <a:t>Entregable: Ficha del proyecto + ER borrador (PNG) + lista de entidades/reglas</a:t>
+              <a:t>Entregable: Ficha del PI (plantilla) + ER en Mermaid renderizado en ExamLab (PNG para tu carpeta) + 3 reglas Condicion -&gt; Accion</a:t>
             </a:r>
           </a:p>
           <a:p>
@@ -7032,7 +7814,7 @@
                 </a:solidFill>
                 <a:latin typeface="Calibri"/>
               </a:rPr>
-              <a:t> Ficha del proyecto + ER borrador (PNG) + lista de entidades/reglas</a:t>
+              <a:t> Ficha del PI (plantilla) + ER en Mermaid renderizado en ExamLab (PNG para tu carpeta) + 3 reglas Condicion -&gt; Accion</a:t>
             </a:r>
           </a:p>
           <a:p>
@@ -8152,7 +8934,7 @@
                 </a:solidFill>
                 <a:latin typeface="Calibri"/>
               </a:rPr>
-              <a:t>–   Modelo entidad-relacion: una tabla = conjunto de entidades del mismo tipo; cada fila es una instancia, cada…</a:t>
+              <a:t>–   Nivel conceptual = entidades y relaciones; nivel fisico = tablas con tipos y longitudes</a:t>
             </a:r>
           </a:p>
           <a:p>
@@ -9662,7 +10444,7 @@
                 </a:solidFill>
                 <a:latin typeface="Calibri"/>
               </a:rPr>
-              <a:t> Boceto ER en draw.io (Dueno-Mascota-Cita) + CREATE TABLE minimo en DB Fiddle.</a:t>
+              <a:t> Boceto ER en draw.io (Dueno-Mascota-Cita) + CREATE TABLE minimo en DB Fiddle, y cierre pasando el boceto a Mermaid con IA para pegarlo renderizado en ExamLab.</a:t>
             </a:r>
           </a:p>
           <a:p>
@@ -10061,8 +10843,8 @@
         </p:blipFill>
         <p:spPr>
           <a:xfrm>
-            <a:off x="1743913" y="1792224"/>
-            <a:ext cx="1051560" cy="1051560"/>
+            <a:off x="1659331" y="1847087"/>
+            <a:ext cx="1220724" cy="1220724"/>
           </a:xfrm>
           <a:prstGeom prst="rect">
             <a:avLst/>
@@ -10077,8 +10859,8 @@
         </p:nvSpPr>
         <p:spPr>
           <a:xfrm>
-            <a:off x="530352" y="2916936"/>
-            <a:ext cx="3478682" cy="502920"/>
+            <a:off x="530352" y="3159251"/>
+            <a:ext cx="3478682" cy="621792"/>
           </a:xfrm>
           <a:prstGeom prst="rect">
             <a:avLst/>
@@ -10265,8 +11047,8 @@
         </p:blipFill>
         <p:spPr>
           <a:xfrm>
-            <a:off x="5570067" y="1792224"/>
-            <a:ext cx="1051560" cy="1051560"/>
+            <a:off x="5485485" y="1847087"/>
+            <a:ext cx="1220724" cy="1220724"/>
           </a:xfrm>
           <a:prstGeom prst="rect">
             <a:avLst/>
@@ -10281,8 +11063,8 @@
         </p:nvSpPr>
         <p:spPr>
           <a:xfrm>
-            <a:off x="4356506" y="2916936"/>
-            <a:ext cx="3478682" cy="502920"/>
+            <a:off x="4356506" y="3159251"/>
+            <a:ext cx="3478682" cy="621792"/>
           </a:xfrm>
           <a:prstGeom prst="rect">
             <a:avLst/>
@@ -10469,8 +11251,8 @@
         </p:blipFill>
         <p:spPr>
           <a:xfrm>
-            <a:off x="9396222" y="1792224"/>
-            <a:ext cx="1051560" cy="1051560"/>
+            <a:off x="9311640" y="1847087"/>
+            <a:ext cx="1220724" cy="1220724"/>
           </a:xfrm>
           <a:prstGeom prst="rect">
             <a:avLst/>
@@ -10485,8 +11267,8 @@
         </p:nvSpPr>
         <p:spPr>
           <a:xfrm>
-            <a:off x="8182660" y="2916936"/>
-            <a:ext cx="3478682" cy="502920"/>
+            <a:off x="8182660" y="3159251"/>
+            <a:ext cx="3478682" cy="621792"/>
           </a:xfrm>
           <a:prstGeom prst="rect">
             <a:avLst/>
@@ -10673,8 +11455,8 @@
         </p:blipFill>
         <p:spPr>
           <a:xfrm>
-            <a:off x="1743913" y="4256532"/>
-            <a:ext cx="1051560" cy="1051560"/>
+            <a:off x="1659331" y="4311396"/>
+            <a:ext cx="1220724" cy="1220724"/>
           </a:xfrm>
           <a:prstGeom prst="rect">
             <a:avLst/>
@@ -10689,8 +11471,8 @@
         </p:nvSpPr>
         <p:spPr>
           <a:xfrm>
-            <a:off x="530352" y="5381244"/>
-            <a:ext cx="3478682" cy="502920"/>
+            <a:off x="530352" y="5623560"/>
+            <a:ext cx="3478682" cy="621792"/>
           </a:xfrm>
           <a:prstGeom prst="rect">
             <a:avLst/>
@@ -10732,7 +11514,415 @@
       </p:sp>
       <p:sp>
         <p:nvSpPr>
-          <p:cNvPr id="26" name="TextBox 25"/>
+          <p:cNvPr id="26" name="Rounded Rectangle 25"/>
+          <p:cNvSpPr/>
+          <p:nvPr/>
+        </p:nvSpPr>
+        <p:spPr>
+          <a:xfrm>
+            <a:off x="4283354" y="4055364"/>
+            <a:ext cx="3624986" cy="2299716"/>
+          </a:xfrm>
+          <a:prstGeom prst="roundRect">
+            <a:avLst>
+              <a:gd name="adj" fmla="val 12000"/>
+            </a:avLst>
+          </a:prstGeom>
+          <a:solidFill>
+            <a:srgbClr val="F2F2F2"/>
+          </a:solidFill>
+          <a:ln>
+            <a:noFill/>
+          </a:ln>
+        </p:spPr>
+        <p:style>
+          <a:lnRef idx="1">
+            <a:schemeClr val="accent1"/>
+          </a:lnRef>
+          <a:fillRef idx="3">
+            <a:schemeClr val="accent1"/>
+          </a:fillRef>
+          <a:effectRef idx="2">
+            <a:schemeClr val="accent1"/>
+          </a:effectRef>
+          <a:fontRef idx="minor">
+            <a:schemeClr val="lt1"/>
+          </a:fontRef>
+        </p:style>
+        <p:txBody>
+          <a:bodyPr rtlCol="0" anchor="ctr"/>
+          <a:lstStyle/>
+          <a:p>
+            <a:pPr algn="ctr"/>
+          </a:p>
+        </p:txBody>
+      </p:sp>
+      <p:sp>
+        <p:nvSpPr>
+          <p:cNvPr id="27" name="Rectangle 26"/>
+          <p:cNvSpPr/>
+          <p:nvPr/>
+        </p:nvSpPr>
+        <p:spPr>
+          <a:xfrm>
+            <a:off x="4283354" y="4055364"/>
+            <a:ext cx="3624986" cy="64008"/>
+          </a:xfrm>
+          <a:prstGeom prst="rect">
+            <a:avLst/>
+          </a:prstGeom>
+          <a:solidFill>
+            <a:srgbClr val="095292"/>
+          </a:solidFill>
+          <a:ln>
+            <a:noFill/>
+          </a:ln>
+        </p:spPr>
+        <p:style>
+          <a:lnRef idx="1">
+            <a:schemeClr val="accent1"/>
+          </a:lnRef>
+          <a:fillRef idx="3">
+            <a:schemeClr val="accent1"/>
+          </a:fillRef>
+          <a:effectRef idx="2">
+            <a:schemeClr val="accent1"/>
+          </a:effectRef>
+          <a:fontRef idx="minor">
+            <a:schemeClr val="lt1"/>
+          </a:fontRef>
+        </p:style>
+        <p:txBody>
+          <a:bodyPr rtlCol="0" anchor="ctr"/>
+          <a:lstStyle/>
+          <a:p>
+            <a:pPr algn="ctr"/>
+          </a:p>
+        </p:txBody>
+      </p:sp>
+      <p:sp>
+        <p:nvSpPr>
+          <p:cNvPr id="28" name="Rectangle 27"/>
+          <p:cNvSpPr/>
+          <p:nvPr/>
+        </p:nvSpPr>
+        <p:spPr>
+          <a:xfrm>
+            <a:off x="4283354" y="4119372"/>
+            <a:ext cx="3624986" cy="27432"/>
+          </a:xfrm>
+          <a:prstGeom prst="rect">
+            <a:avLst/>
+          </a:prstGeom>
+          <a:solidFill>
+            <a:srgbClr val="FFD000"/>
+          </a:solidFill>
+          <a:ln>
+            <a:noFill/>
+          </a:ln>
+        </p:spPr>
+        <p:style>
+          <a:lnRef idx="1">
+            <a:schemeClr val="accent1"/>
+          </a:lnRef>
+          <a:fillRef idx="3">
+            <a:schemeClr val="accent1"/>
+          </a:fillRef>
+          <a:effectRef idx="2">
+            <a:schemeClr val="accent1"/>
+          </a:effectRef>
+          <a:fontRef idx="minor">
+            <a:schemeClr val="lt1"/>
+          </a:fontRef>
+        </p:style>
+        <p:txBody>
+          <a:bodyPr rtlCol="0" anchor="ctr"/>
+          <a:lstStyle/>
+          <a:p>
+            <a:pPr algn="ctr"/>
+          </a:p>
+        </p:txBody>
+      </p:sp>
+      <p:pic>
+        <p:nvPicPr>
+          <p:cNvPr id="29" name="Picture 28" descr="mermaid.png"/>
+          <p:cNvPicPr>
+            <a:picLocks noChangeAspect="1"/>
+          </p:cNvPicPr>
+          <p:nvPr/>
+        </p:nvPicPr>
+        <p:blipFill>
+          <a:blip r:embed="rId6"/>
+          <a:stretch>
+            <a:fillRect/>
+          </a:stretch>
+        </p:blipFill>
+        <p:spPr>
+          <a:xfrm>
+            <a:off x="5485485" y="4311396"/>
+            <a:ext cx="1220724" cy="1220724"/>
+          </a:xfrm>
+          <a:prstGeom prst="rect">
+            <a:avLst/>
+          </a:prstGeom>
+        </p:spPr>
+      </p:pic>
+      <p:sp>
+        <p:nvSpPr>
+          <p:cNvPr id="30" name="TextBox 29"/>
+          <p:cNvSpPr txBox="1"/>
+          <p:nvPr/>
+        </p:nvSpPr>
+        <p:spPr>
+          <a:xfrm>
+            <a:off x="4356506" y="5623560"/>
+            <a:ext cx="3478682" cy="621792"/>
+          </a:xfrm>
+          <a:prstGeom prst="rect">
+            <a:avLst/>
+          </a:prstGeom>
+          <a:noFill/>
+        </p:spPr>
+        <p:txBody>
+          <a:bodyPr wrap="square" anchor="t"/>
+          <a:lstStyle/>
+          <a:p>
+            <a:pPr algn="ctr"/>
+            <a:r>
+              <a:rPr sz="1300" b="1" i="0">
+                <a:solidFill>
+                  <a:srgbClr val="095292"/>
+                </a:solidFill>
+                <a:latin typeface="Calibri"/>
+              </a:rPr>
+              <a:t>Mermaid</a:t>
+            </a:r>
+          </a:p>
+          <a:p>
+            <a:pPr algn="ctr">
+              <a:spcBef>
+                <a:spcPts val="200"/>
+              </a:spcBef>
+            </a:pPr>
+            <a:r>
+              <a:rPr sz="1000" b="0" i="0">
+                <a:solidFill>
+                  <a:srgbClr val="666666"/>
+                </a:solidFill>
+                <a:latin typeface="Calibri"/>
+              </a:rPr>
+              <a:t>Codigo del ER</a:t>
+            </a:r>
+          </a:p>
+        </p:txBody>
+      </p:sp>
+      <p:sp>
+        <p:nvSpPr>
+          <p:cNvPr id="31" name="Rounded Rectangle 30"/>
+          <p:cNvSpPr/>
+          <p:nvPr/>
+        </p:nvSpPr>
+        <p:spPr>
+          <a:xfrm>
+            <a:off x="8109508" y="4055364"/>
+            <a:ext cx="3624986" cy="2299716"/>
+          </a:xfrm>
+          <a:prstGeom prst="roundRect">
+            <a:avLst>
+              <a:gd name="adj" fmla="val 12000"/>
+            </a:avLst>
+          </a:prstGeom>
+          <a:solidFill>
+            <a:srgbClr val="F2F2F2"/>
+          </a:solidFill>
+          <a:ln>
+            <a:noFill/>
+          </a:ln>
+        </p:spPr>
+        <p:style>
+          <a:lnRef idx="1">
+            <a:schemeClr val="accent1"/>
+          </a:lnRef>
+          <a:fillRef idx="3">
+            <a:schemeClr val="accent1"/>
+          </a:fillRef>
+          <a:effectRef idx="2">
+            <a:schemeClr val="accent1"/>
+          </a:effectRef>
+          <a:fontRef idx="minor">
+            <a:schemeClr val="lt1"/>
+          </a:fontRef>
+        </p:style>
+        <p:txBody>
+          <a:bodyPr rtlCol="0" anchor="ctr"/>
+          <a:lstStyle/>
+          <a:p>
+            <a:pPr algn="ctr"/>
+          </a:p>
+        </p:txBody>
+      </p:sp>
+      <p:sp>
+        <p:nvSpPr>
+          <p:cNvPr id="32" name="Rectangle 31"/>
+          <p:cNvSpPr/>
+          <p:nvPr/>
+        </p:nvSpPr>
+        <p:spPr>
+          <a:xfrm>
+            <a:off x="8109508" y="4055364"/>
+            <a:ext cx="3624986" cy="64008"/>
+          </a:xfrm>
+          <a:prstGeom prst="rect">
+            <a:avLst/>
+          </a:prstGeom>
+          <a:solidFill>
+            <a:srgbClr val="095292"/>
+          </a:solidFill>
+          <a:ln>
+            <a:noFill/>
+          </a:ln>
+        </p:spPr>
+        <p:style>
+          <a:lnRef idx="1">
+            <a:schemeClr val="accent1"/>
+          </a:lnRef>
+          <a:fillRef idx="3">
+            <a:schemeClr val="accent1"/>
+          </a:fillRef>
+          <a:effectRef idx="2">
+            <a:schemeClr val="accent1"/>
+          </a:effectRef>
+          <a:fontRef idx="minor">
+            <a:schemeClr val="lt1"/>
+          </a:fontRef>
+        </p:style>
+        <p:txBody>
+          <a:bodyPr rtlCol="0" anchor="ctr"/>
+          <a:lstStyle/>
+          <a:p>
+            <a:pPr algn="ctr"/>
+          </a:p>
+        </p:txBody>
+      </p:sp>
+      <p:sp>
+        <p:nvSpPr>
+          <p:cNvPr id="33" name="Rectangle 32"/>
+          <p:cNvSpPr/>
+          <p:nvPr/>
+        </p:nvSpPr>
+        <p:spPr>
+          <a:xfrm>
+            <a:off x="8109508" y="4119372"/>
+            <a:ext cx="3624986" cy="27432"/>
+          </a:xfrm>
+          <a:prstGeom prst="rect">
+            <a:avLst/>
+          </a:prstGeom>
+          <a:solidFill>
+            <a:srgbClr val="FFD000"/>
+          </a:solidFill>
+          <a:ln>
+            <a:noFill/>
+          </a:ln>
+        </p:spPr>
+        <p:style>
+          <a:lnRef idx="1">
+            <a:schemeClr val="accent1"/>
+          </a:lnRef>
+          <a:fillRef idx="3">
+            <a:schemeClr val="accent1"/>
+          </a:fillRef>
+          <a:effectRef idx="2">
+            <a:schemeClr val="accent1"/>
+          </a:effectRef>
+          <a:fontRef idx="minor">
+            <a:schemeClr val="lt1"/>
+          </a:fontRef>
+        </p:style>
+        <p:txBody>
+          <a:bodyPr rtlCol="0" anchor="ctr"/>
+          <a:lstStyle/>
+          <a:p>
+            <a:pPr algn="ctr"/>
+          </a:p>
+        </p:txBody>
+      </p:sp>
+      <p:pic>
+        <p:nvPicPr>
+          <p:cNvPr id="34" name="Picture 33" descr="examlab.png"/>
+          <p:cNvPicPr>
+            <a:picLocks noChangeAspect="1"/>
+          </p:cNvPicPr>
+          <p:nvPr/>
+        </p:nvPicPr>
+        <p:blipFill>
+          <a:blip r:embed="rId7"/>
+          <a:stretch>
+            <a:fillRect/>
+          </a:stretch>
+        </p:blipFill>
+        <p:spPr>
+          <a:xfrm>
+            <a:off x="9311640" y="4311396"/>
+            <a:ext cx="1220724" cy="1220724"/>
+          </a:xfrm>
+          <a:prstGeom prst="rect">
+            <a:avLst/>
+          </a:prstGeom>
+        </p:spPr>
+      </p:pic>
+      <p:sp>
+        <p:nvSpPr>
+          <p:cNvPr id="35" name="TextBox 34"/>
+          <p:cNvSpPr txBox="1"/>
+          <p:nvPr/>
+        </p:nvSpPr>
+        <p:spPr>
+          <a:xfrm>
+            <a:off x="8182660" y="5623560"/>
+            <a:ext cx="3478682" cy="621792"/>
+          </a:xfrm>
+          <a:prstGeom prst="rect">
+            <a:avLst/>
+          </a:prstGeom>
+          <a:noFill/>
+        </p:spPr>
+        <p:txBody>
+          <a:bodyPr wrap="square" anchor="t"/>
+          <a:lstStyle/>
+          <a:p>
+            <a:pPr algn="ctr"/>
+            <a:r>
+              <a:rPr sz="1300" b="1" i="0">
+                <a:solidFill>
+                  <a:srgbClr val="095292"/>
+                </a:solidFill>
+                <a:latin typeface="Calibri"/>
+              </a:rPr>
+              <a:t>ExamLab</a:t>
+            </a:r>
+          </a:p>
+          <a:p>
+            <a:pPr algn="ctr">
+              <a:spcBef>
+                <a:spcPts val="200"/>
+              </a:spcBef>
+            </a:pPr>
+            <a:r>
+              <a:rPr sz="1000" b="0" i="0">
+                <a:solidFill>
+                  <a:srgbClr val="666666"/>
+                </a:solidFill>
+                <a:latin typeface="Calibri"/>
+              </a:rPr>
+              <a:t>Donde se entrega</a:t>
+            </a:r>
+          </a:p>
+        </p:txBody>
+      </p:sp>
+      <p:sp>
+        <p:nvSpPr>
+          <p:cNvPr id="36" name="TextBox 35"/>
           <p:cNvSpPr txBox="1"/>
           <p:nvPr/>
         </p:nvSpPr>
@@ -10800,7 +11990,7 @@
         <p:spPr>
           <a:xfrm>
             <a:off x="0" y="0"/>
-            <a:ext cx="12191695" cy="960120"/>
+            <a:ext cx="12191695" cy="1170432"/>
           </a:xfrm>
           <a:prstGeom prst="rect">
             <a:avLst/>
@@ -10842,7 +12032,7 @@
         </p:nvSpPr>
         <p:spPr>
           <a:xfrm>
-            <a:off x="0" y="960120"/>
+            <a:off x="0" y="1170432"/>
             <a:ext cx="12191695" cy="41148"/>
           </a:xfrm>
           <a:prstGeom prst="rect">
@@ -10886,7 +12076,7 @@
         <p:spPr>
           <a:xfrm>
             <a:off x="457200" y="164592"/>
-            <a:ext cx="11277295" cy="502920"/>
+            <a:ext cx="11277295" cy="384048"/>
           </a:xfrm>
           <a:prstGeom prst="rect">
             <a:avLst/>
@@ -10906,7 +12096,7 @@
                 </a:solidFill>
                 <a:latin typeface="Calibri"/>
               </a:rPr>
-              <a:t>Taller PI VetCare — contexto / por que importa</a:t>
+              <a:t>Del boceto a ExamLab (diagrama)</a:t>
             </a:r>
           </a:p>
         </p:txBody>
@@ -10919,8 +12109,8 @@
         </p:nvSpPr>
         <p:spPr>
           <a:xfrm>
-            <a:off x="457200" y="1170432"/>
-            <a:ext cx="11277295" cy="5230368"/>
+            <a:off x="457200" y="566928"/>
+            <a:ext cx="11277295" cy="411480"/>
           </a:xfrm>
           <a:prstGeom prst="rect">
             <a:avLst/>
@@ -10933,76 +12123,705 @@
           </a:bodyPr>
           <a:lstStyle/>
           <a:p>
+            <a:r>
+              <a:rPr sz="1400" b="0" i="0">
+                <a:solidFill>
+                  <a:srgbClr val="B8D8EE"/>
+                </a:solidFill>
+                <a:latin typeface="Calibri"/>
+              </a:rPr>
+              <a:t>El diagrama se entrega como codigo Mermaid dentro de ExamLab, no como imagen</a:t>
+            </a:r>
+          </a:p>
+        </p:txBody>
+      </p:sp>
+      <p:sp>
+        <p:nvSpPr>
+          <p:cNvPr id="6" name="Rounded Rectangle 5"/>
+          <p:cNvSpPr/>
+          <p:nvPr/>
+        </p:nvSpPr>
+        <p:spPr>
+          <a:xfrm>
+            <a:off x="457200" y="1659636"/>
+            <a:ext cx="11277295" cy="1051560"/>
+          </a:xfrm>
+          <a:prstGeom prst="roundRect">
+            <a:avLst>
+              <a:gd name="adj" fmla="val 12000"/>
+            </a:avLst>
+          </a:prstGeom>
+          <a:solidFill>
+            <a:srgbClr val="F2F2F2"/>
+          </a:solidFill>
+          <a:ln>
+            <a:noFill/>
+          </a:ln>
+        </p:spPr>
+        <p:style>
+          <a:lnRef idx="1">
+            <a:schemeClr val="accent1"/>
+          </a:lnRef>
+          <a:fillRef idx="3">
+            <a:schemeClr val="accent1"/>
+          </a:fillRef>
+          <a:effectRef idx="2">
+            <a:schemeClr val="accent1"/>
+          </a:effectRef>
+          <a:fontRef idx="minor">
+            <a:schemeClr val="lt1"/>
+          </a:fontRef>
+        </p:style>
+        <p:txBody>
+          <a:bodyPr rtlCol="0" anchor="ctr"/>
+          <a:lstStyle/>
+          <a:p>
+            <a:pPr algn="ctr"/>
+          </a:p>
+        </p:txBody>
+      </p:sp>
+      <p:sp>
+        <p:nvSpPr>
+          <p:cNvPr id="7" name="Rounded Rectangle 6"/>
+          <p:cNvSpPr/>
+          <p:nvPr/>
+        </p:nvSpPr>
+        <p:spPr>
+          <a:xfrm>
+            <a:off x="594360" y="1965960"/>
+            <a:ext cx="438912" cy="438912"/>
+          </a:xfrm>
+          <a:prstGeom prst="roundRect">
+            <a:avLst>
+              <a:gd name="adj" fmla="val 12000"/>
+            </a:avLst>
+          </a:prstGeom>
+          <a:solidFill>
+            <a:srgbClr val="095292"/>
+          </a:solidFill>
+          <a:ln>
+            <a:noFill/>
+          </a:ln>
+        </p:spPr>
+        <p:style>
+          <a:lnRef idx="1">
+            <a:schemeClr val="accent1"/>
+          </a:lnRef>
+          <a:fillRef idx="3">
+            <a:schemeClr val="accent1"/>
+          </a:fillRef>
+          <a:effectRef idx="2">
+            <a:schemeClr val="accent1"/>
+          </a:effectRef>
+          <a:fontRef idx="minor">
+            <a:schemeClr val="lt1"/>
+          </a:fontRef>
+        </p:style>
+        <p:txBody>
+          <a:bodyPr rtlCol="0" anchor="ctr"/>
+          <a:lstStyle/>
+          <a:p>
+            <a:pPr algn="ctr"/>
+          </a:p>
+        </p:txBody>
+      </p:sp>
+      <p:sp>
+        <p:nvSpPr>
+          <p:cNvPr id="8" name="TextBox 7"/>
+          <p:cNvSpPr txBox="1"/>
+          <p:nvPr/>
+        </p:nvSpPr>
+        <p:spPr>
+          <a:xfrm>
+            <a:off x="594360" y="1965960"/>
+            <a:ext cx="438912" cy="438912"/>
+          </a:xfrm>
+          <a:prstGeom prst="rect">
+            <a:avLst/>
+          </a:prstGeom>
+          <a:noFill/>
+        </p:spPr>
+        <p:txBody>
+          <a:bodyPr wrap="square" anchor="ctr"/>
+          <a:lstStyle/>
+          <a:p>
+            <a:pPr algn="ctr"/>
+            <a:r>
+              <a:rPr sz="1600" b="1" i="0">
+                <a:solidFill>
+                  <a:srgbClr val="FFFFFF"/>
+                </a:solidFill>
+                <a:latin typeface="Calibri"/>
+              </a:rPr>
+              <a:t>1</a:t>
+            </a:r>
+          </a:p>
+        </p:txBody>
+      </p:sp>
+      <p:sp>
+        <p:nvSpPr>
+          <p:cNvPr id="9" name="TextBox 8"/>
+          <p:cNvSpPr txBox="1"/>
+          <p:nvPr/>
+        </p:nvSpPr>
+        <p:spPr>
+          <a:xfrm>
+            <a:off x="1188720" y="1751076"/>
+            <a:ext cx="10271455" cy="886968"/>
+          </a:xfrm>
+          <a:prstGeom prst="rect">
+            <a:avLst/>
+          </a:prstGeom>
+          <a:noFill/>
+        </p:spPr>
+        <p:txBody>
+          <a:bodyPr wrap="square" anchor="ctr"/>
+          <a:lstStyle/>
+          <a:p>
+            <a:r>
+              <a:rPr sz="1500" b="1" i="0">
+                <a:solidFill>
+                  <a:srgbClr val="095292"/>
+                </a:solidFill>
+                <a:latin typeface="Calibri"/>
+              </a:rPr>
+              <a:t>Disena visual</a:t>
+            </a:r>
+          </a:p>
+          <a:p>
             <a:pPr>
-              <a:spcAft>
-                <a:spcPts val="800"/>
-              </a:spcAft>
+              <a:spcBef>
+                <a:spcPts val="200"/>
+              </a:spcBef>
             </a:pPr>
             <a:r>
-              <a:rPr sz="1600" b="0" i="0">
+              <a:rPr sz="1300" b="0" i="0">
                 <a:solidFill>
                   <a:srgbClr val="333333"/>
                 </a:solidFill>
                 <a:latin typeface="Calibri"/>
               </a:rPr>
-              <a:t>–   </a:t>
-            </a:r>
+              <a:t>Dibuja el diagrama como quieras en Excalidraw o draw.io: es mas rapido arrastrar cajas que escribir codigo, y ahi es donde piensas el modelo.</a:t>
+            </a:r>
+          </a:p>
+        </p:txBody>
+      </p:sp>
+      <p:sp>
+        <p:nvSpPr>
+          <p:cNvPr id="10" name="Rounded Rectangle 9"/>
+          <p:cNvSpPr/>
+          <p:nvPr/>
+        </p:nvSpPr>
+        <p:spPr>
+          <a:xfrm>
+            <a:off x="457200" y="2802636"/>
+            <a:ext cx="11277295" cy="1051560"/>
+          </a:xfrm>
+          <a:prstGeom prst="roundRect">
+            <a:avLst>
+              <a:gd name="adj" fmla="val 12000"/>
+            </a:avLst>
+          </a:prstGeom>
+          <a:solidFill>
+            <a:srgbClr val="E8F4FA"/>
+          </a:solidFill>
+          <a:ln>
+            <a:noFill/>
+          </a:ln>
+        </p:spPr>
+        <p:style>
+          <a:lnRef idx="1">
+            <a:schemeClr val="accent1"/>
+          </a:lnRef>
+          <a:fillRef idx="3">
+            <a:schemeClr val="accent1"/>
+          </a:fillRef>
+          <a:effectRef idx="2">
+            <a:schemeClr val="accent1"/>
+          </a:effectRef>
+          <a:fontRef idx="minor">
+            <a:schemeClr val="lt1"/>
+          </a:fontRef>
+        </p:style>
+        <p:txBody>
+          <a:bodyPr rtlCol="0" anchor="ctr"/>
+          <a:lstStyle/>
+          <a:p>
+            <a:pPr algn="ctr"/>
+          </a:p>
+        </p:txBody>
+      </p:sp>
+      <p:sp>
+        <p:nvSpPr>
+          <p:cNvPr id="11" name="Rounded Rectangle 10"/>
+          <p:cNvSpPr/>
+          <p:nvPr/>
+        </p:nvSpPr>
+        <p:spPr>
+          <a:xfrm>
+            <a:off x="594360" y="3108960"/>
+            <a:ext cx="438912" cy="438912"/>
+          </a:xfrm>
+          <a:prstGeom prst="roundRect">
+            <a:avLst>
+              <a:gd name="adj" fmla="val 12000"/>
+            </a:avLst>
+          </a:prstGeom>
+          <a:solidFill>
+            <a:srgbClr val="095292"/>
+          </a:solidFill>
+          <a:ln>
+            <a:noFill/>
+          </a:ln>
+        </p:spPr>
+        <p:style>
+          <a:lnRef idx="1">
+            <a:schemeClr val="accent1"/>
+          </a:lnRef>
+          <a:fillRef idx="3">
+            <a:schemeClr val="accent1"/>
+          </a:fillRef>
+          <a:effectRef idx="2">
+            <a:schemeClr val="accent1"/>
+          </a:effectRef>
+          <a:fontRef idx="minor">
+            <a:schemeClr val="lt1"/>
+          </a:fontRef>
+        </p:style>
+        <p:txBody>
+          <a:bodyPr rtlCol="0" anchor="ctr"/>
+          <a:lstStyle/>
+          <a:p>
+            <a:pPr algn="ctr"/>
+          </a:p>
+        </p:txBody>
+      </p:sp>
+      <p:sp>
+        <p:nvSpPr>
+          <p:cNvPr id="12" name="TextBox 11"/>
+          <p:cNvSpPr txBox="1"/>
+          <p:nvPr/>
+        </p:nvSpPr>
+        <p:spPr>
+          <a:xfrm>
+            <a:off x="594360" y="3108960"/>
+            <a:ext cx="438912" cy="438912"/>
+          </a:xfrm>
+          <a:prstGeom prst="rect">
+            <a:avLst/>
+          </a:prstGeom>
+          <a:noFill/>
+        </p:spPr>
+        <p:txBody>
+          <a:bodyPr wrap="square" anchor="ctr"/>
+          <a:lstStyle/>
+          <a:p>
+            <a:pPr algn="ctr"/>
             <a:r>
               <a:rPr sz="1600" b="1" i="0">
                 <a:solidFill>
+                  <a:srgbClr val="FFFFFF"/>
+                </a:solidFill>
+                <a:latin typeface="Calibri"/>
+              </a:rPr>
+              <a:t>2</a:t>
+            </a:r>
+          </a:p>
+        </p:txBody>
+      </p:sp>
+      <p:sp>
+        <p:nvSpPr>
+          <p:cNvPr id="13" name="TextBox 12"/>
+          <p:cNvSpPr txBox="1"/>
+          <p:nvPr/>
+        </p:nvSpPr>
+        <p:spPr>
+          <a:xfrm>
+            <a:off x="1188720" y="2894076"/>
+            <a:ext cx="10271455" cy="886968"/>
+          </a:xfrm>
+          <a:prstGeom prst="rect">
+            <a:avLst/>
+          </a:prstGeom>
+          <a:noFill/>
+        </p:spPr>
+        <p:txBody>
+          <a:bodyPr wrap="square" anchor="ctr"/>
+          <a:lstStyle/>
+          <a:p>
+            <a:r>
+              <a:rPr sz="1500" b="1" i="0">
+                <a:solidFill>
+                  <a:srgbClr val="095292"/>
+                </a:solidFill>
+                <a:latin typeface="Calibri"/>
+              </a:rPr>
+              <a:t>Traduce con IA</a:t>
+            </a:r>
+          </a:p>
+          <a:p>
+            <a:pPr>
+              <a:spcBef>
+                <a:spcPts val="200"/>
+              </a:spcBef>
+            </a:pPr>
+            <a:r>
+              <a:rPr sz="1300" b="0" i="0">
+                <a:solidFill>
                   <a:srgbClr val="333333"/>
                 </a:solidFill>
                 <a:latin typeface="Calibri"/>
               </a:rPr>
-              <a:t>Por qué importa al PI VetCare:</a:t>
-            </a:r>
-            <a:r>
-              <a:rPr sz="1600" b="0" i="0">
+              <a:t>Copia o describe tu boceto a una IA y pidele el codigo Mermaid: «convierte este diagrama a Mermaid usando erDiagram». Revisa el resultado: la IA acierta la sintaxis, no tu modelo.</a:t>
+            </a:r>
+          </a:p>
+        </p:txBody>
+      </p:sp>
+      <p:sp>
+        <p:nvSpPr>
+          <p:cNvPr id="14" name="Rounded Rectangle 13"/>
+          <p:cNvSpPr/>
+          <p:nvPr/>
+        </p:nvSpPr>
+        <p:spPr>
+          <a:xfrm>
+            <a:off x="457200" y="3945636"/>
+            <a:ext cx="11277295" cy="1051560"/>
+          </a:xfrm>
+          <a:prstGeom prst="roundRect">
+            <a:avLst>
+              <a:gd name="adj" fmla="val 12000"/>
+            </a:avLst>
+          </a:prstGeom>
+          <a:solidFill>
+            <a:srgbClr val="F2F2F2"/>
+          </a:solidFill>
+          <a:ln>
+            <a:noFill/>
+          </a:ln>
+        </p:spPr>
+        <p:style>
+          <a:lnRef idx="1">
+            <a:schemeClr val="accent1"/>
+          </a:lnRef>
+          <a:fillRef idx="3">
+            <a:schemeClr val="accent1"/>
+          </a:fillRef>
+          <a:effectRef idx="2">
+            <a:schemeClr val="accent1"/>
+          </a:effectRef>
+          <a:fontRef idx="minor">
+            <a:schemeClr val="lt1"/>
+          </a:fontRef>
+        </p:style>
+        <p:txBody>
+          <a:bodyPr rtlCol="0" anchor="ctr"/>
+          <a:lstStyle/>
+          <a:p>
+            <a:pPr algn="ctr"/>
+          </a:p>
+        </p:txBody>
+      </p:sp>
+      <p:sp>
+        <p:nvSpPr>
+          <p:cNvPr id="15" name="Rounded Rectangle 14"/>
+          <p:cNvSpPr/>
+          <p:nvPr/>
+        </p:nvSpPr>
+        <p:spPr>
+          <a:xfrm>
+            <a:off x="594360" y="4251960"/>
+            <a:ext cx="438912" cy="438912"/>
+          </a:xfrm>
+          <a:prstGeom prst="roundRect">
+            <a:avLst>
+              <a:gd name="adj" fmla="val 12000"/>
+            </a:avLst>
+          </a:prstGeom>
+          <a:solidFill>
+            <a:srgbClr val="095292"/>
+          </a:solidFill>
+          <a:ln>
+            <a:noFill/>
+          </a:ln>
+        </p:spPr>
+        <p:style>
+          <a:lnRef idx="1">
+            <a:schemeClr val="accent1"/>
+          </a:lnRef>
+          <a:fillRef idx="3">
+            <a:schemeClr val="accent1"/>
+          </a:fillRef>
+          <a:effectRef idx="2">
+            <a:schemeClr val="accent1"/>
+          </a:effectRef>
+          <a:fontRef idx="minor">
+            <a:schemeClr val="lt1"/>
+          </a:fontRef>
+        </p:style>
+        <p:txBody>
+          <a:bodyPr rtlCol="0" anchor="ctr"/>
+          <a:lstStyle/>
+          <a:p>
+            <a:pPr algn="ctr"/>
+          </a:p>
+        </p:txBody>
+      </p:sp>
+      <p:sp>
+        <p:nvSpPr>
+          <p:cNvPr id="16" name="TextBox 15"/>
+          <p:cNvSpPr txBox="1"/>
+          <p:nvPr/>
+        </p:nvSpPr>
+        <p:spPr>
+          <a:xfrm>
+            <a:off x="594360" y="4251960"/>
+            <a:ext cx="438912" cy="438912"/>
+          </a:xfrm>
+          <a:prstGeom prst="rect">
+            <a:avLst/>
+          </a:prstGeom>
+          <a:noFill/>
+        </p:spPr>
+        <p:txBody>
+          <a:bodyPr wrap="square" anchor="ctr"/>
+          <a:lstStyle/>
+          <a:p>
+            <a:pPr algn="ctr"/>
+            <a:r>
+              <a:rPr sz="1600" b="1" i="0">
+                <a:solidFill>
+                  <a:srgbClr val="FFFFFF"/>
+                </a:solidFill>
+                <a:latin typeface="Calibri"/>
+              </a:rPr>
+              <a:t>3</a:t>
+            </a:r>
+          </a:p>
+        </p:txBody>
+      </p:sp>
+      <p:sp>
+        <p:nvSpPr>
+          <p:cNvPr id="17" name="TextBox 16"/>
+          <p:cNvSpPr txBox="1"/>
+          <p:nvPr/>
+        </p:nvSpPr>
+        <p:spPr>
+          <a:xfrm>
+            <a:off x="1188720" y="4037076"/>
+            <a:ext cx="10271455" cy="886968"/>
+          </a:xfrm>
+          <a:prstGeom prst="rect">
+            <a:avLst/>
+          </a:prstGeom>
+          <a:noFill/>
+        </p:spPr>
+        <p:txBody>
+          <a:bodyPr wrap="square" anchor="ctr"/>
+          <a:lstStyle/>
+          <a:p>
+            <a:r>
+              <a:rPr sz="1500" b="1" i="0">
+                <a:solidFill>
+                  <a:srgbClr val="095292"/>
+                </a:solidFill>
+                <a:latin typeface="Calibri"/>
+              </a:rPr>
+              <a:t>Pega y renderiza en ExamLab</a:t>
+            </a:r>
+          </a:p>
+          <a:p>
+            <a:pPr>
+              <a:spcBef>
+                <a:spcPts val="200"/>
+              </a:spcBef>
+            </a:pPr>
+            <a:r>
+              <a:rPr sz="1300" b="0" i="0">
                 <a:solidFill>
                   <a:srgbClr val="333333"/>
                 </a:solidFill>
                 <a:latin typeface="Calibri"/>
               </a:rPr>
-              <a:t> sin ER/alcance no hay base para procs ni seguridad.</a:t>
+              <a:t>Pega ese codigo en la caja de texto de la pregunta y mira como lo dibuja la plataforma. Si no renderiza, corrige ahi mismo: lo que se califica es el diagrama renderizado dentro de ExamLab.</a:t>
+            </a:r>
+          </a:p>
+        </p:txBody>
+      </p:sp>
+      <p:sp>
+        <p:nvSpPr>
+          <p:cNvPr id="18" name="Rounded Rectangle 17"/>
+          <p:cNvSpPr/>
+          <p:nvPr/>
+        </p:nvSpPr>
+        <p:spPr>
+          <a:xfrm>
+            <a:off x="457200" y="5088636"/>
+            <a:ext cx="11277295" cy="1051560"/>
+          </a:xfrm>
+          <a:prstGeom prst="roundRect">
+            <a:avLst>
+              <a:gd name="adj" fmla="val 12000"/>
+            </a:avLst>
+          </a:prstGeom>
+          <a:solidFill>
+            <a:srgbClr val="E8F4FA"/>
+          </a:solidFill>
+          <a:ln>
+            <a:noFill/>
+          </a:ln>
+        </p:spPr>
+        <p:style>
+          <a:lnRef idx="1">
+            <a:schemeClr val="accent1"/>
+          </a:lnRef>
+          <a:fillRef idx="3">
+            <a:schemeClr val="accent1"/>
+          </a:fillRef>
+          <a:effectRef idx="2">
+            <a:schemeClr val="accent1"/>
+          </a:effectRef>
+          <a:fontRef idx="minor">
+            <a:schemeClr val="lt1"/>
+          </a:fontRef>
+        </p:style>
+        <p:txBody>
+          <a:bodyPr rtlCol="0" anchor="ctr"/>
+          <a:lstStyle/>
+          <a:p>
+            <a:pPr algn="ctr"/>
+          </a:p>
+        </p:txBody>
+      </p:sp>
+      <p:sp>
+        <p:nvSpPr>
+          <p:cNvPr id="19" name="Rounded Rectangle 18"/>
+          <p:cNvSpPr/>
+          <p:nvPr/>
+        </p:nvSpPr>
+        <p:spPr>
+          <a:xfrm>
+            <a:off x="594360" y="5394960"/>
+            <a:ext cx="438912" cy="438912"/>
+          </a:xfrm>
+          <a:prstGeom prst="roundRect">
+            <a:avLst>
+              <a:gd name="adj" fmla="val 12000"/>
+            </a:avLst>
+          </a:prstGeom>
+          <a:solidFill>
+            <a:srgbClr val="095292"/>
+          </a:solidFill>
+          <a:ln>
+            <a:noFill/>
+          </a:ln>
+        </p:spPr>
+        <p:style>
+          <a:lnRef idx="1">
+            <a:schemeClr val="accent1"/>
+          </a:lnRef>
+          <a:fillRef idx="3">
+            <a:schemeClr val="accent1"/>
+          </a:fillRef>
+          <a:effectRef idx="2">
+            <a:schemeClr val="accent1"/>
+          </a:effectRef>
+          <a:fontRef idx="minor">
+            <a:schemeClr val="lt1"/>
+          </a:fontRef>
+        </p:style>
+        <p:txBody>
+          <a:bodyPr rtlCol="0" anchor="ctr"/>
+          <a:lstStyle/>
+          <a:p>
+            <a:pPr algn="ctr"/>
+          </a:p>
+        </p:txBody>
+      </p:sp>
+      <p:sp>
+        <p:nvSpPr>
+          <p:cNvPr id="20" name="TextBox 19"/>
+          <p:cNvSpPr txBox="1"/>
+          <p:nvPr/>
+        </p:nvSpPr>
+        <p:spPr>
+          <a:xfrm>
+            <a:off x="594360" y="5394960"/>
+            <a:ext cx="438912" cy="438912"/>
+          </a:xfrm>
+          <a:prstGeom prst="rect">
+            <a:avLst/>
+          </a:prstGeom>
+          <a:noFill/>
+        </p:spPr>
+        <p:txBody>
+          <a:bodyPr wrap="square" anchor="ctr"/>
+          <a:lstStyle/>
+          <a:p>
+            <a:pPr algn="ctr"/>
+            <a:r>
+              <a:rPr sz="1600" b="1" i="0">
+                <a:solidFill>
+                  <a:srgbClr val="FFFFFF"/>
+                </a:solidFill>
+                <a:latin typeface="Calibri"/>
+              </a:rPr>
+              <a:t>4</a:t>
+            </a:r>
+          </a:p>
+        </p:txBody>
+      </p:sp>
+      <p:sp>
+        <p:nvSpPr>
+          <p:cNvPr id="21" name="TextBox 20"/>
+          <p:cNvSpPr txBox="1"/>
+          <p:nvPr/>
+        </p:nvSpPr>
+        <p:spPr>
+          <a:xfrm>
+            <a:off x="1188720" y="5180076"/>
+            <a:ext cx="10271455" cy="886968"/>
+          </a:xfrm>
+          <a:prstGeom prst="rect">
+            <a:avLst/>
+          </a:prstGeom>
+          <a:noFill/>
+        </p:spPr>
+        <p:txBody>
+          <a:bodyPr wrap="square" anchor="ctr"/>
+          <a:lstStyle/>
+          <a:p>
+            <a:r>
+              <a:rPr sz="1500" b="1" i="0">
+                <a:solidFill>
+                  <a:srgbClr val="095292"/>
+                </a:solidFill>
+                <a:latin typeface="Calibri"/>
+              </a:rPr>
+              <a:t>Guarda el PNG para tu PI</a:t>
             </a:r>
           </a:p>
           <a:p>
             <a:pPr>
-              <a:spcAft>
-                <a:spcPts val="800"/>
-              </a:spcAft>
+              <a:spcBef>
+                <a:spcPts val="200"/>
+              </a:spcBef>
             </a:pPr>
             <a:r>
-              <a:rPr sz="1600" b="0" i="0">
+              <a:rPr sz="1300" b="0" i="0">
                 <a:solidFill>
                   <a:srgbClr val="333333"/>
                 </a:solidFill>
                 <a:latin typeface="Calibri"/>
               </a:rPr>
-              <a:t>–   Hoy cierras dominio + entidades mínimas + reglas de negocio propias.</a:t>
-            </a:r>
-          </a:p>
-          <a:p>
-            <a:pPr>
-              <a:spcAft>
-                <a:spcPts val="800"/>
-              </a:spcAft>
-            </a:pPr>
-            <a:r>
-              <a:rPr sz="1600" b="0" i="0">
-                <a:solidFill>
-                  <a:srgbClr val="333333"/>
-                </a:solidFill>
-                <a:latin typeface="Calibri"/>
-              </a:rPr>
-              <a:t>–   El DDL demo (Codigo/) es semilla; tu ER manda.</a:t>
-            </a:r>
-          </a:p>
-        </p:txBody>
-      </p:sp>
-      <p:sp>
-        <p:nvSpPr>
-          <p:cNvPr id="6" name="TextBox 5"/>
+              <a:t>Exporta tambien la imagen a la carpeta de tu Proyecto Integrador. Esa copia es para tu informe; no reemplaza la respuesta en la plataforma.</a:t>
+            </a:r>
+          </a:p>
+        </p:txBody>
+      </p:sp>
+      <p:sp>
+        <p:nvSpPr>
+          <p:cNvPr id="22" name="TextBox 21"/>
           <p:cNvSpPr txBox="1"/>
           <p:nvPr/>
         </p:nvSpPr>

--- a/Bases de Datos II/Clases/Clase 1 - Revision BD I y arranque VetCare/Presentacion.pptx
+++ b/Bases de Datos II/Clases/Clase 1 - Revision BD I y arranque VetCare/Presentacion.pptx
@@ -9862,7 +9862,7 @@
               </a:spcAft>
             </a:pPr>
             <a:r>
-              <a:rPr sz="1500" b="0" i="0">
+              <a:rPr sz="1400" b="0" i="0">
                 <a:solidFill>
                   <a:srgbClr val="333333"/>
                 </a:solidFill>
@@ -9871,7 +9871,7 @@
               <a:t>–   </a:t>
             </a:r>
             <a:r>
-              <a:rPr sz="1500" b="1" i="0">
+              <a:rPr sz="1400" b="1" i="0">
                 <a:solidFill>
                   <a:srgbClr val="333333"/>
                 </a:solidFill>
@@ -9880,13 +9880,67 @@
               <a:t>Clínica Veterinaria «Huellitas»</a:t>
             </a:r>
             <a:r>
-              <a:rPr sz="1500" b="0" i="0">
+              <a:rPr sz="1400" b="0" i="0">
                 <a:solidFill>
                   <a:srgbClr val="333333"/>
                 </a:solidFill>
                 <a:latin typeface="Calibri"/>
               </a:rPr>
-              <a:t> lleva su gestión en papel y quiere un sistema. Tres personas lo van a usar:</a:t>
+              <a:t> (Cali): unas </a:t>
+            </a:r>
+            <a:r>
+              <a:rPr sz="1400" b="1" i="0">
+                <a:solidFill>
+                  <a:srgbClr val="333333"/>
+                </a:solidFill>
+                <a:latin typeface="Calibri"/>
+              </a:rPr>
+              <a:t>150 citas al día</a:t>
+            </a:r>
+            <a:r>
+              <a:rPr sz="1400" b="0" i="0">
+                <a:solidFill>
+                  <a:srgbClr val="333333"/>
+                </a:solidFill>
+                <a:latin typeface="Calibri"/>
+              </a:rPr>
+              <a:t>, </a:t>
+            </a:r>
+            <a:r>
+              <a:rPr sz="1400" b="1" i="0">
+                <a:solidFill>
+                  <a:srgbClr val="333333"/>
+                </a:solidFill>
+                <a:latin typeface="Calibri"/>
+              </a:rPr>
+              <a:t>16 veterinarios</a:t>
+            </a:r>
+            <a:r>
+              <a:rPr sz="1400" b="0" i="0">
+                <a:solidFill>
+                  <a:srgbClr val="333333"/>
+                </a:solidFill>
+                <a:latin typeface="Calibri"/>
+              </a:rPr>
+              <a:t>, ~5.000 mascotas de ~2.000 dueños — y todo en </a:t>
+            </a:r>
+            <a:r>
+              <a:rPr sz="1400" b="1" i="0">
+                <a:solidFill>
+                  <a:srgbClr val="333333"/>
+                </a:solidFill>
+                <a:latin typeface="Calibri"/>
+              </a:rPr>
+              <a:t>carpetas de papel</a:t>
+            </a:r>
+            <a:r>
+              <a:rPr sz="1400" b="0" i="0">
+                <a:solidFill>
+                  <a:srgbClr val="333333"/>
+                </a:solidFill>
+                <a:latin typeface="Calibri"/>
+              </a:rPr>
+              <a:t>.</a:t>
             </a:r>
           </a:p>
           <a:p>
@@ -9896,31 +9950,13 @@
               </a:spcAft>
             </a:pPr>
             <a:r>
-              <a:rPr sz="1500" b="0" i="0">
+              <a:rPr sz="1400" b="0" i="0">
                 <a:solidFill>
                   <a:srgbClr val="333333"/>
                 </a:solidFill>
                 <a:latin typeface="Calibri"/>
               </a:rPr>
-              <a:t>–   </a:t>
-            </a:r>
-            <a:r>
-              <a:rPr sz="1500" b="1" i="0">
-                <a:solidFill>
-                  <a:srgbClr val="333333"/>
-                </a:solidFill>
-                <a:latin typeface="Calibri"/>
-              </a:rPr>
-              <a:t>Dueño de la clínica:</a:t>
-            </a:r>
-            <a:r>
-              <a:rPr sz="1500" b="0" i="0">
-                <a:solidFill>
-                  <a:srgbClr val="333333"/>
-                </a:solidFill>
-                <a:latin typeface="Calibri"/>
-              </a:rPr>
-              <a:t> quiere métricas del negocio.</a:t>
+              <a:t>–   Duele en tres puntos: se extravían fichas, buscar un historial genera filas en la sala de espera, y no hay métricas.</a:t>
             </a:r>
           </a:p>
           <a:p>
@@ -9930,31 +9966,67 @@
               </a:spcAft>
             </a:pPr>
             <a:r>
-              <a:rPr sz="1500" b="0" i="0">
+              <a:rPr sz="1400" b="0" i="0">
                 <a:solidFill>
                   <a:srgbClr val="333333"/>
                 </a:solidFill>
                 <a:latin typeface="Calibri"/>
               </a:rPr>
-              <a:t>–   </a:t>
-            </a:r>
-            <a:r>
-              <a:rPr sz="1500" b="1" i="0">
+              <a:t>–   Tres personas van a usar el sistema, y esperan cosas distintas: </a:t>
+            </a:r>
+            <a:r>
+              <a:rPr sz="1400" b="1" i="0">
                 <a:solidFill>
                   <a:srgbClr val="333333"/>
                 </a:solidFill>
                 <a:latin typeface="Calibri"/>
               </a:rPr>
-              <a:t>Recepcionista:</a:t>
-            </a:r>
-            <a:r>
-              <a:rPr sz="1500" b="0" i="0">
+              <a:t>el dueño</a:t>
+            </a:r>
+            <a:r>
+              <a:rPr sz="1400" b="0" i="0">
                 <a:solidFill>
                   <a:srgbClr val="333333"/>
                 </a:solidFill>
                 <a:latin typeface="Calibri"/>
               </a:rPr>
-              <a:t> quiere agendar rápido y con pocos clics.</a:t>
+              <a:t> métricas, </a:t>
+            </a:r>
+            <a:r>
+              <a:rPr sz="1400" b="1" i="0">
+                <a:solidFill>
+                  <a:srgbClr val="333333"/>
+                </a:solidFill>
+                <a:latin typeface="Calibri"/>
+              </a:rPr>
+              <a:t>la recepcionista</a:t>
+            </a:r>
+            <a:r>
+              <a:rPr sz="1400" b="0" i="0">
+                <a:solidFill>
+                  <a:srgbClr val="333333"/>
+                </a:solidFill>
+                <a:latin typeface="Calibri"/>
+              </a:rPr>
+              <a:t> agendar rápido, </a:t>
+            </a:r>
+            <a:r>
+              <a:rPr sz="1400" b="1" i="0">
+                <a:solidFill>
+                  <a:srgbClr val="333333"/>
+                </a:solidFill>
+                <a:latin typeface="Calibri"/>
+              </a:rPr>
+              <a:t>el veterinario</a:t>
+            </a:r>
+            <a:r>
+              <a:rPr sz="1400" b="0" i="0">
+                <a:solidFill>
+                  <a:srgbClr val="333333"/>
+                </a:solidFill>
+                <a:latin typeface="Calibri"/>
+              </a:rPr>
+              <a:t> el historial a la mano.</a:t>
             </a:r>
           </a:p>
           <a:p>
@@ -9964,31 +10036,31 @@
               </a:spcAft>
             </a:pPr>
             <a:r>
-              <a:rPr sz="1500" b="0" i="0">
+              <a:rPr sz="1400" b="0" i="0">
                 <a:solidFill>
                   <a:srgbClr val="333333"/>
                 </a:solidFill>
                 <a:latin typeface="Calibri"/>
               </a:rPr>
-              <a:t>–   </a:t>
-            </a:r>
-            <a:r>
-              <a:rPr sz="1500" b="1" i="0">
+              <a:t>–   Sus intereses </a:t>
+            </a:r>
+            <a:r>
+              <a:rPr sz="1400" b="1" i="0">
                 <a:solidFill>
                   <a:srgbClr val="333333"/>
                 </a:solidFill>
                 <a:latin typeface="Calibri"/>
               </a:rPr>
-              <a:t>Veterinario:</a:t>
-            </a:r>
-            <a:r>
-              <a:rPr sz="1500" b="0" i="0">
+              <a:t>entran en conflicto</a:t>
+            </a:r>
+            <a:r>
+              <a:rPr sz="1400" b="0" i="0">
                 <a:solidFill>
                   <a:srgbClr val="333333"/>
                 </a:solidFill>
                 <a:latin typeface="Calibri"/>
               </a:rPr>
-              <a:t> quiere el historial del paciente a la mano durante la consulta.</a:t>
+              <a:t>: más datos dan mejores métricas, pero hacen más lento el agendamiento. Ahí están las decisiones de diseño del semestre.</a:t>
             </a:r>
           </a:p>
           <a:p>
@@ -9998,31 +10070,31 @@
               </a:spcAft>
             </a:pPr>
             <a:r>
-              <a:rPr sz="1500" b="0" i="0">
+              <a:rPr sz="1400" b="0" i="0">
                 <a:solidFill>
                   <a:srgbClr val="333333"/>
                 </a:solidFill>
                 <a:latin typeface="Calibri"/>
               </a:rPr>
-              <a:t>–   Sus intereses </a:t>
-            </a:r>
-            <a:r>
-              <a:rPr sz="1500" b="1" i="0">
+              <a:t>–   </a:t>
+            </a:r>
+            <a:r>
+              <a:rPr sz="1400" b="1" i="0">
                 <a:solidFill>
                   <a:srgbClr val="333333"/>
                 </a:solidFill>
                 <a:latin typeface="Calibri"/>
               </a:rPr>
-              <a:t>entran en conflicto</a:t>
-            </a:r>
-            <a:r>
-              <a:rPr sz="1500" b="0" i="0">
+              <a:t>Caso completo:</a:t>
+            </a:r>
+            <a:r>
+              <a:rPr sz="1400" b="0" i="0">
                 <a:solidFill>
                   <a:srgbClr val="333333"/>
                 </a:solidFill>
                 <a:latin typeface="Calibri"/>
               </a:rPr>
-              <a:t>: más datos dan mejores métricas, pero hacen más lento el agendamiento. Ahí están las decisiones de diseño del semestre.</a:t>
+              <a:t> anexo «Caso de estudio Clínica Huellitas» en Clases/Proyecto Integrador — 8 entidades, 3 reglas y el elenco de nombres.</a:t>
             </a:r>
           </a:p>
         </p:txBody>

--- a/Bases de Datos II/Clases/Clase 1 - Revision BD I y arranque VetCare/Presentacion.pptx
+++ b/Bases de Datos II/Clases/Clase 1 - Revision BD I y arranque VetCare/Presentacion.pptx
@@ -7513,7 +7513,23 @@
                 </a:solidFill>
                 <a:latin typeface="Calibri"/>
               </a:rPr>
-              <a:t>–   Evidencia en playground (enlace) o archivo SQL/PNG propio.</a:t>
+              <a:t>–   Evidencia: el SQL y su salida quedan guardados en cada pregunta de ExamLab.</a:t>
+            </a:r>
+          </a:p>
+          <a:p>
+            <a:pPr>
+              <a:spcAft>
+                <a:spcPts val="800"/>
+              </a:spcAft>
+            </a:pPr>
+            <a:r>
+              <a:rPr sz="1600" b="0" i="0">
+                <a:solidFill>
+                  <a:srgbClr val="333333"/>
+                </a:solidFill>
+                <a:latin typeface="Calibri"/>
+              </a:rPr>
+              <a:t>–   Conserva copia en tu carpeta del PI (los .sql que pide el entregable).</a:t>
             </a:r>
           </a:p>
           <a:p>
@@ -11009,7 +11025,7 @@
         </p:nvSpPr>
         <p:spPr>
           <a:xfrm>
-            <a:off x="7360919" y="3547872"/>
+            <a:off x="8293607" y="3547872"/>
             <a:ext cx="1645920" cy="320040"/>
           </a:xfrm>
           <a:prstGeom prst="rect">
@@ -11023,7 +11039,7 @@
           </a:bodyPr>
           <a:lstStyle/>
           <a:p>
-            <a:pPr algn="ctr"/>
+            <a:pPr algn="l"/>
             <a:r>
               <a:rPr sz="1000" b="0" i="1">
                 <a:solidFill>

--- a/Bases de Datos II/Clases/Clase 1 - Revision BD I y arranque VetCare/Presentacion.pptx
+++ b/Bases de Datos II/Clases/Clase 1 - Revision BD I y arranque VetCare/Presentacion.pptx
@@ -4555,7 +4555,7 @@
               </a:spcAft>
             </a:pPr>
             <a:r>
-              <a:rPr sz="1600" b="0" i="0">
+              <a:rPr sz="2000" b="0" i="0">
                 <a:solidFill>
                   <a:srgbClr val="333333"/>
                 </a:solidFill>
@@ -4564,7 +4564,7 @@
               <a:t>–   </a:t>
             </a:r>
             <a:r>
-              <a:rPr sz="1600" b="1" i="0">
+              <a:rPr sz="2000" b="1" i="0">
                 <a:solidFill>
                   <a:srgbClr val="333333"/>
                 </a:solidFill>
@@ -4573,7 +4573,7 @@
               <a:t>Por qué importa al PI VetCare:</a:t>
             </a:r>
             <a:r>
-              <a:rPr sz="1600" b="0" i="0">
+              <a:rPr sz="2000" b="0" i="0">
                 <a:solidFill>
                   <a:srgbClr val="333333"/>
                 </a:solidFill>
@@ -4589,7 +4589,7 @@
               </a:spcAft>
             </a:pPr>
             <a:r>
-              <a:rPr sz="1600" b="0" i="0">
+              <a:rPr sz="2000" b="0" i="0">
                 <a:solidFill>
                   <a:srgbClr val="333333"/>
                 </a:solidFill>
@@ -4605,7 +4605,7 @@
               </a:spcAft>
             </a:pPr>
             <a:r>
-              <a:rPr sz="1600" b="0" i="0">
+              <a:rPr sz="2000" b="0" i="0">
                 <a:solidFill>
                   <a:srgbClr val="333333"/>
                 </a:solidFill>
@@ -4825,7 +4825,7 @@
               </a:spcAft>
             </a:pPr>
             <a:r>
-              <a:rPr sz="1500" b="0" i="0">
+              <a:rPr sz="2000" b="0" i="0">
                 <a:solidFill>
                   <a:srgbClr val="333333"/>
                 </a:solidFill>
@@ -4834,7 +4834,7 @@
               <a:t>–   </a:t>
             </a:r>
             <a:r>
-              <a:rPr sz="1500" b="1" i="0">
+              <a:rPr sz="2000" b="1" i="0">
                 <a:solidFill>
                   <a:srgbClr val="333333"/>
                 </a:solidFill>
@@ -4843,7 +4843,7 @@
               <a:t>Objetivo:</a:t>
             </a:r>
             <a:r>
-              <a:rPr sz="1500" b="0" i="0">
+              <a:rPr sz="2000" b="0" i="0">
                 <a:solidFill>
                   <a:srgbClr val="333333"/>
                 </a:solidFill>
@@ -4859,7 +4859,7 @@
               </a:spcAft>
             </a:pPr>
             <a:r>
-              <a:rPr sz="1500" b="0" i="0">
+              <a:rPr sz="2000" b="0" i="0">
                 <a:solidFill>
                   <a:srgbClr val="333333"/>
                 </a:solidFill>
@@ -4868,7 +4868,7 @@
               <a:t>–   </a:t>
             </a:r>
             <a:r>
-              <a:rPr sz="1500" b="1" i="0">
+              <a:rPr sz="2000" b="1" i="0">
                 <a:solidFill>
                   <a:srgbClr val="333333"/>
                 </a:solidFill>
@@ -4877,7 +4877,7 @@
               <a:t>Exito:</a:t>
             </a:r>
             <a:r>
-              <a:rPr sz="1500" b="0" i="0">
+              <a:rPr sz="2000" b="0" i="0">
                 <a:solidFill>
                   <a:srgbClr val="333333"/>
                 </a:solidFill>
@@ -4893,7 +4893,7 @@
               </a:spcAft>
             </a:pPr>
             <a:r>
-              <a:rPr sz="1500" b="0" i="0">
+              <a:rPr sz="2000" b="0" i="0">
                 <a:solidFill>
                   <a:srgbClr val="333333"/>
                 </a:solidFill>
@@ -4902,7 +4902,7 @@
               <a:t>–   </a:t>
             </a:r>
             <a:r>
-              <a:rPr sz="1500" b="1" i="0">
+              <a:rPr sz="2000" b="1" i="0">
                 <a:solidFill>
                   <a:srgbClr val="333333"/>
                 </a:solidFill>
@@ -4911,7 +4911,7 @@
               <a:t>Exito:</a:t>
             </a:r>
             <a:r>
-              <a:rPr sz="1500" b="0" i="0">
+              <a:rPr sz="2000" b="0" i="0">
                 <a:solidFill>
                   <a:srgbClr val="333333"/>
                 </a:solidFill>
@@ -4927,7 +4927,7 @@
               </a:spcAft>
             </a:pPr>
             <a:r>
-              <a:rPr sz="1500" b="0" i="0">
+              <a:rPr sz="2000" b="0" i="0">
                 <a:solidFill>
                   <a:srgbClr val="333333"/>
                 </a:solidFill>
@@ -4936,7 +4936,7 @@
               <a:t>–   </a:t>
             </a:r>
             <a:r>
-              <a:rPr sz="1500" b="1" i="0">
+              <a:rPr sz="2000" b="1" i="0">
                 <a:solidFill>
                   <a:srgbClr val="333333"/>
                 </a:solidFill>
@@ -4945,7 +4945,7 @@
               <a:t>Exito:</a:t>
             </a:r>
             <a:r>
-              <a:rPr sz="1500" b="0" i="0">
+              <a:rPr sz="2000" b="0" i="0">
                 <a:solidFill>
                   <a:srgbClr val="333333"/>
                 </a:solidFill>
@@ -4961,7 +4961,7 @@
               </a:spcAft>
             </a:pPr>
             <a:r>
-              <a:rPr sz="1500" b="0" i="0">
+              <a:rPr sz="2000" b="0" i="0">
                 <a:solidFill>
                   <a:srgbClr val="333333"/>
                 </a:solidFill>
@@ -4970,7 +4970,7 @@
               <a:t>–   </a:t>
             </a:r>
             <a:r>
-              <a:rPr sz="1500" b="1" i="0">
+              <a:rPr sz="2000" b="1" i="0">
                 <a:solidFill>
                   <a:srgbClr val="333333"/>
                 </a:solidFill>
@@ -4979,7 +4979,7 @@
               <a:t>Exito:</a:t>
             </a:r>
             <a:r>
-              <a:rPr sz="1500" b="0" i="0">
+              <a:rPr sz="2000" b="0" i="0">
                 <a:solidFill>
                   <a:srgbClr val="333333"/>
                 </a:solidFill>
@@ -4995,7 +4995,7 @@
               </a:spcAft>
             </a:pPr>
             <a:r>
-              <a:rPr sz="1500" b="0" i="0">
+              <a:rPr sz="2000" b="0" i="0">
                 <a:solidFill>
                   <a:srgbClr val="333333"/>
                 </a:solidFill>
@@ -5004,7 +5004,7 @@
               <a:t>–   </a:t>
             </a:r>
             <a:r>
-              <a:rPr sz="1500" b="1" i="0">
+              <a:rPr sz="2000" b="1" i="0">
                 <a:solidFill>
                   <a:srgbClr val="333333"/>
                 </a:solidFill>
@@ -5013,7 +5013,7 @@
               <a:t>Exito:</a:t>
             </a:r>
             <a:r>
-              <a:rPr sz="1500" b="0" i="0">
+              <a:rPr sz="2000" b="0" i="0">
                 <a:solidFill>
                   <a:srgbClr val="333333"/>
                 </a:solidFill>
@@ -5233,7 +5233,7 @@
               </a:spcAft>
             </a:pPr>
             <a:r>
-              <a:rPr sz="1600" b="0" i="0">
+              <a:rPr sz="2000" b="0" i="0">
                 <a:solidFill>
                   <a:srgbClr val="333333"/>
                 </a:solidFill>
@@ -5249,7 +5249,7 @@
               </a:spcAft>
             </a:pPr>
             <a:r>
-              <a:rPr sz="1600" b="0" i="0">
+              <a:rPr sz="2000" b="0" i="0">
                 <a:solidFill>
                   <a:srgbClr val="333333"/>
                 </a:solidFill>
@@ -5265,7 +5265,7 @@
               </a:spcAft>
             </a:pPr>
             <a:r>
-              <a:rPr sz="1600" b="0" i="0">
+              <a:rPr sz="2000" b="0" i="0">
                 <a:solidFill>
                   <a:srgbClr val="333333"/>
                 </a:solidFill>
@@ -5281,7 +5281,7 @@
               </a:spcAft>
             </a:pPr>
             <a:r>
-              <a:rPr sz="1600" b="0" i="0">
+              <a:rPr sz="2000" b="0" i="0">
                 <a:solidFill>
                   <a:srgbClr val="333333"/>
                 </a:solidFill>
@@ -7473,7 +7473,7 @@
               </a:spcAft>
             </a:pPr>
             <a:r>
-              <a:rPr sz="1600" b="0" i="0">
+              <a:rPr sz="2000" b="0" i="0">
                 <a:solidFill>
                   <a:srgbClr val="333333"/>
                 </a:solidFill>
@@ -7482,7 +7482,7 @@
               <a:t>–   </a:t>
             </a:r>
             <a:r>
-              <a:rPr sz="1600" b="1" i="0">
+              <a:rPr sz="2000" b="1" i="0">
                 <a:solidFill>
                   <a:srgbClr val="333333"/>
                 </a:solidFill>
@@ -7491,7 +7491,7 @@
               <a:t>Entregable:</a:t>
             </a:r>
             <a:r>
-              <a:rPr sz="1600" b="0" i="0">
+              <a:rPr sz="2000" b="0" i="0">
                 <a:solidFill>
                   <a:srgbClr val="333333"/>
                 </a:solidFill>
@@ -7507,7 +7507,7 @@
               </a:spcAft>
             </a:pPr>
             <a:r>
-              <a:rPr sz="1600" b="0" i="0">
+              <a:rPr sz="2000" b="0" i="0">
                 <a:solidFill>
                   <a:srgbClr val="333333"/>
                 </a:solidFill>
@@ -7523,7 +7523,7 @@
               </a:spcAft>
             </a:pPr>
             <a:r>
-              <a:rPr sz="1600" b="0" i="0">
+              <a:rPr sz="2000" b="0" i="0">
                 <a:solidFill>
                   <a:srgbClr val="333333"/>
                 </a:solidFill>
@@ -7539,7 +7539,7 @@
               </a:spcAft>
             </a:pPr>
             <a:r>
-              <a:rPr sz="1600" b="0" i="0">
+              <a:rPr sz="2000" b="0" i="0">
                 <a:solidFill>
                   <a:srgbClr val="333333"/>
                 </a:solidFill>
@@ -7555,7 +7555,7 @@
               </a:spcAft>
             </a:pPr>
             <a:r>
-              <a:rPr sz="1600" b="0" i="0">
+              <a:rPr sz="2000" b="0" i="0">
                 <a:solidFill>
                   <a:srgbClr val="333333"/>
                 </a:solidFill>
@@ -7564,7 +7564,7 @@
               <a:t>–   </a:t>
             </a:r>
             <a:r>
-              <a:rPr sz="1600" b="1" i="0">
+              <a:rPr sz="2000" b="1" i="0">
                 <a:solidFill>
                   <a:srgbClr val="333333"/>
                 </a:solidFill>
@@ -7573,7 +7573,7 @@
               <a:t>Entrega en ExamLab</a:t>
             </a:r>
             <a:r>
-              <a:rPr sz="1600" b="0" i="0">
+              <a:rPr sz="2000" b="0" i="0">
                 <a:solidFill>
                   <a:srgbClr val="333333"/>
                 </a:solidFill>
@@ -8620,7 +8620,7 @@
               </a:spcAft>
             </a:pPr>
             <a:r>
-              <a:rPr sz="1600" b="0" i="0">
+              <a:rPr sz="2000" b="0" i="0">
                 <a:solidFill>
                   <a:srgbClr val="333333"/>
                 </a:solidFill>
@@ -8629,7 +8629,7 @@
               <a:t>–   </a:t>
             </a:r>
             <a:r>
-              <a:rPr sz="1600" b="1" i="0">
+              <a:rPr sz="2000" b="1" i="0">
                 <a:solidFill>
                   <a:srgbClr val="333333"/>
                 </a:solidFill>
@@ -8638,7 +8638,7 @@
               <a:t>Hoy avanzamos el PI en:</a:t>
             </a:r>
             <a:r>
-              <a:rPr sz="1600" b="0" i="0">
+              <a:rPr sz="2000" b="0" i="0">
                 <a:solidFill>
                   <a:srgbClr val="333333"/>
                 </a:solidFill>
@@ -8654,7 +8654,7 @@
               </a:spcAft>
             </a:pPr>
             <a:r>
-              <a:rPr sz="1600" b="0" i="0">
+              <a:rPr sz="2000" b="0" i="0">
                 <a:solidFill>
                   <a:srgbClr val="333333"/>
                 </a:solidFill>
@@ -8663,7 +8663,7 @@
               <a:t>–   Herramienta: </a:t>
             </a:r>
             <a:r>
-              <a:rPr sz="1600" b="1" i="0">
+              <a:rPr sz="2000" b="1" i="0">
                 <a:solidFill>
                   <a:srgbClr val="333333"/>
                 </a:solidFill>
@@ -8672,7 +8672,7 @@
               <a:t>draw.io + DB Fiddle</a:t>
             </a:r>
             <a:r>
-              <a:rPr sz="1600" b="0" i="0">
+              <a:rPr sz="2000" b="0" i="0">
                 <a:solidFill>
                   <a:srgbClr val="333333"/>
                 </a:solidFill>
@@ -8681,7 +8681,7 @@
               <a:t> · Bloque </a:t>
             </a:r>
             <a:r>
-              <a:rPr sz="1600" b="1" i="0">
+              <a:rPr sz="2000" b="1" i="0">
                 <a:solidFill>
                   <a:srgbClr val="333333"/>
                 </a:solidFill>
@@ -8690,7 +8690,7 @@
               <a:t>120 min</a:t>
             </a:r>
             <a:r>
-              <a:rPr sz="1600" b="0" i="0">
+              <a:rPr sz="2000" b="0" i="0">
                 <a:solidFill>
                   <a:srgbClr val="333333"/>
                 </a:solidFill>
@@ -8706,7 +8706,7 @@
               </a:spcAft>
             </a:pPr>
             <a:r>
-              <a:rPr sz="1600" b="0" i="0">
+              <a:rPr sz="2000" b="0" i="0">
                 <a:solidFill>
                   <a:srgbClr val="333333"/>
                 </a:solidFill>
@@ -8715,7 +8715,7 @@
               <a:t>–   </a:t>
             </a:r>
             <a:r>
-              <a:rPr sz="1600" b="1" i="0">
+              <a:rPr sz="2000" b="1" i="0">
                 <a:solidFill>
                   <a:srgbClr val="333333"/>
                 </a:solidFill>
@@ -8724,7 +8724,7 @@
               <a:t>Entregable de hoy:</a:t>
             </a:r>
             <a:r>
-              <a:rPr sz="1600" b="0" i="0">
+              <a:rPr sz="2000" b="0" i="0">
                 <a:solidFill>
                   <a:srgbClr val="333333"/>
                 </a:solidFill>
@@ -8740,7 +8740,7 @@
               </a:spcAft>
             </a:pPr>
             <a:r>
-              <a:rPr sz="1600" b="0" i="0">
+              <a:rPr sz="2000" b="0" i="0">
                 <a:solidFill>
                   <a:srgbClr val="333333"/>
                 </a:solidFill>
@@ -8756,7 +8756,7 @@
               </a:spcAft>
             </a:pPr>
             <a:r>
-              <a:rPr sz="1600" b="0" i="0">
+              <a:rPr sz="2000" b="0" i="0">
                 <a:solidFill>
                   <a:srgbClr val="333333"/>
                 </a:solidFill>
@@ -8772,7 +8772,7 @@
               </a:spcAft>
             </a:pPr>
             <a:r>
-              <a:rPr sz="1600" b="0" i="0">
+              <a:rPr sz="2000" b="0" i="0">
                 <a:solidFill>
                   <a:srgbClr val="333333"/>
                 </a:solidFill>
@@ -9096,7 +9096,7 @@
         <p:spPr>
           <a:xfrm>
             <a:off x="502920" y="2587752"/>
-            <a:ext cx="2164019" cy="2560320"/>
+            <a:ext cx="2164019" cy="3310128"/>
           </a:xfrm>
           <a:prstGeom prst="rect">
             <a:avLst/>
@@ -9211,7 +9211,7 @@
         <p:spPr>
           <a:xfrm>
             <a:off x="2758379" y="2587752"/>
-            <a:ext cx="2164019" cy="2560320"/>
+            <a:ext cx="2164019" cy="3310128"/>
           </a:xfrm>
           <a:prstGeom prst="rect">
             <a:avLst/>
@@ -9326,7 +9326,7 @@
         <p:spPr>
           <a:xfrm>
             <a:off x="5013838" y="2587752"/>
-            <a:ext cx="2164019" cy="2560320"/>
+            <a:ext cx="2164019" cy="3310128"/>
           </a:xfrm>
           <a:prstGeom prst="rect">
             <a:avLst/>
@@ -9441,7 +9441,7 @@
         <p:spPr>
           <a:xfrm>
             <a:off x="7269297" y="2587752"/>
-            <a:ext cx="2164019" cy="2560320"/>
+            <a:ext cx="2164019" cy="3310128"/>
           </a:xfrm>
           <a:prstGeom prst="rect">
             <a:avLst/>
@@ -9556,7 +9556,7 @@
         <p:spPr>
           <a:xfrm>
             <a:off x="9524756" y="2587752"/>
-            <a:ext cx="2164019" cy="2560320"/>
+            <a:ext cx="2164019" cy="3310128"/>
           </a:xfrm>
           <a:prstGeom prst="rect">
             <a:avLst/>
@@ -9590,8 +9590,8 @@
         </p:nvSpPr>
         <p:spPr>
           <a:xfrm>
-            <a:off x="457200" y="5943600"/>
-            <a:ext cx="11277295" cy="365760"/>
+            <a:off x="457200" y="5806440"/>
+            <a:ext cx="11277295" cy="640080"/>
           </a:xfrm>
           <a:prstGeom prst="rect">
             <a:avLst/>
@@ -9878,7 +9878,7 @@
               </a:spcAft>
             </a:pPr>
             <a:r>
-              <a:rPr sz="1400" b="0" i="0">
+              <a:rPr sz="2000" b="0" i="0">
                 <a:solidFill>
                   <a:srgbClr val="333333"/>
                 </a:solidFill>
@@ -9887,7 +9887,7 @@
               <a:t>–   </a:t>
             </a:r>
             <a:r>
-              <a:rPr sz="1400" b="1" i="0">
+              <a:rPr sz="2000" b="1" i="0">
                 <a:solidFill>
                   <a:srgbClr val="333333"/>
                 </a:solidFill>
@@ -9896,7 +9896,7 @@
               <a:t>Clínica Veterinaria «Huellitas»</a:t>
             </a:r>
             <a:r>
-              <a:rPr sz="1400" b="0" i="0">
+              <a:rPr sz="2000" b="0" i="0">
                 <a:solidFill>
                   <a:srgbClr val="333333"/>
                 </a:solidFill>
@@ -9905,7 +9905,7 @@
               <a:t> (Cali): unas </a:t>
             </a:r>
             <a:r>
-              <a:rPr sz="1400" b="1" i="0">
+              <a:rPr sz="2000" b="1" i="0">
                 <a:solidFill>
                   <a:srgbClr val="333333"/>
                 </a:solidFill>
@@ -9914,7 +9914,7 @@
               <a:t>150 citas al día</a:t>
             </a:r>
             <a:r>
-              <a:rPr sz="1400" b="0" i="0">
+              <a:rPr sz="2000" b="0" i="0">
                 <a:solidFill>
                   <a:srgbClr val="333333"/>
                 </a:solidFill>
@@ -9923,7 +9923,7 @@
               <a:t>, </a:t>
             </a:r>
             <a:r>
-              <a:rPr sz="1400" b="1" i="0">
+              <a:rPr sz="2000" b="1" i="0">
                 <a:solidFill>
                   <a:srgbClr val="333333"/>
                 </a:solidFill>
@@ -9932,7 +9932,7 @@
               <a:t>16 veterinarios</a:t>
             </a:r>
             <a:r>
-              <a:rPr sz="1400" b="0" i="0">
+              <a:rPr sz="2000" b="0" i="0">
                 <a:solidFill>
                   <a:srgbClr val="333333"/>
                 </a:solidFill>
@@ -9941,7 +9941,7 @@
               <a:t>, ~5.000 mascotas de ~2.000 dueños — y todo en </a:t>
             </a:r>
             <a:r>
-              <a:rPr sz="1400" b="1" i="0">
+              <a:rPr sz="2000" b="1" i="0">
                 <a:solidFill>
                   <a:srgbClr val="333333"/>
                 </a:solidFill>
@@ -9950,7 +9950,7 @@
               <a:t>carpetas de papel</a:t>
             </a:r>
             <a:r>
-              <a:rPr sz="1400" b="0" i="0">
+              <a:rPr sz="2000" b="0" i="0">
                 <a:solidFill>
                   <a:srgbClr val="333333"/>
                 </a:solidFill>
@@ -9966,7 +9966,7 @@
               </a:spcAft>
             </a:pPr>
             <a:r>
-              <a:rPr sz="1400" b="0" i="0">
+              <a:rPr sz="2000" b="0" i="0">
                 <a:solidFill>
                   <a:srgbClr val="333333"/>
                 </a:solidFill>
@@ -9982,7 +9982,7 @@
               </a:spcAft>
             </a:pPr>
             <a:r>
-              <a:rPr sz="1400" b="0" i="0">
+              <a:rPr sz="2000" b="0" i="0">
                 <a:solidFill>
                   <a:srgbClr val="333333"/>
                 </a:solidFill>
@@ -9991,7 +9991,7 @@
               <a:t>–   Tres personas van a usar el sistema, y esperan cosas distintas: </a:t>
             </a:r>
             <a:r>
-              <a:rPr sz="1400" b="1" i="0">
+              <a:rPr sz="2000" b="1" i="0">
                 <a:solidFill>
                   <a:srgbClr val="333333"/>
                 </a:solidFill>
@@ -10000,7 +10000,7 @@
               <a:t>el dueño</a:t>
             </a:r>
             <a:r>
-              <a:rPr sz="1400" b="0" i="0">
+              <a:rPr sz="2000" b="0" i="0">
                 <a:solidFill>
                   <a:srgbClr val="333333"/>
                 </a:solidFill>
@@ -10009,7 +10009,7 @@
               <a:t> métricas, </a:t>
             </a:r>
             <a:r>
-              <a:rPr sz="1400" b="1" i="0">
+              <a:rPr sz="2000" b="1" i="0">
                 <a:solidFill>
                   <a:srgbClr val="333333"/>
                 </a:solidFill>
@@ -10018,7 +10018,7 @@
               <a:t>la recepcionista</a:t>
             </a:r>
             <a:r>
-              <a:rPr sz="1400" b="0" i="0">
+              <a:rPr sz="2000" b="0" i="0">
                 <a:solidFill>
                   <a:srgbClr val="333333"/>
                 </a:solidFill>
@@ -10027,7 +10027,7 @@
               <a:t> agendar rápido, </a:t>
             </a:r>
             <a:r>
-              <a:rPr sz="1400" b="1" i="0">
+              <a:rPr sz="2000" b="1" i="0">
                 <a:solidFill>
                   <a:srgbClr val="333333"/>
                 </a:solidFill>
@@ -10036,7 +10036,7 @@
               <a:t>el veterinario</a:t>
             </a:r>
             <a:r>
-              <a:rPr sz="1400" b="0" i="0">
+              <a:rPr sz="2000" b="0" i="0">
                 <a:solidFill>
                   <a:srgbClr val="333333"/>
                 </a:solidFill>
@@ -10052,7 +10052,7 @@
               </a:spcAft>
             </a:pPr>
             <a:r>
-              <a:rPr sz="1400" b="0" i="0">
+              <a:rPr sz="2000" b="0" i="0">
                 <a:solidFill>
                   <a:srgbClr val="333333"/>
                 </a:solidFill>
@@ -10061,7 +10061,7 @@
               <a:t>–   Sus intereses </a:t>
             </a:r>
             <a:r>
-              <a:rPr sz="1400" b="1" i="0">
+              <a:rPr sz="2000" b="1" i="0">
                 <a:solidFill>
                   <a:srgbClr val="333333"/>
                 </a:solidFill>
@@ -10070,7 +10070,7 @@
               <a:t>entran en conflicto</a:t>
             </a:r>
             <a:r>
-              <a:rPr sz="1400" b="0" i="0">
+              <a:rPr sz="2000" b="0" i="0">
                 <a:solidFill>
                   <a:srgbClr val="333333"/>
                 </a:solidFill>
@@ -10086,7 +10086,7 @@
               </a:spcAft>
             </a:pPr>
             <a:r>
-              <a:rPr sz="1400" b="0" i="0">
+              <a:rPr sz="2000" b="0" i="0">
                 <a:solidFill>
                   <a:srgbClr val="333333"/>
                 </a:solidFill>
@@ -10095,7 +10095,7 @@
               <a:t>–   </a:t>
             </a:r>
             <a:r>
-              <a:rPr sz="1400" b="1" i="0">
+              <a:rPr sz="2000" b="1" i="0">
                 <a:solidFill>
                   <a:srgbClr val="333333"/>
                 </a:solidFill>
@@ -10104,7 +10104,7 @@
               <a:t>Caso completo:</a:t>
             </a:r>
             <a:r>
-              <a:rPr sz="1400" b="0" i="0">
+              <a:rPr sz="2000" b="0" i="0">
                 <a:solidFill>
                   <a:srgbClr val="333333"/>
                 </a:solidFill>
@@ -10324,7 +10324,7 @@
               </a:spcAft>
             </a:pPr>
             <a:r>
-              <a:rPr sz="1500" b="0" i="0">
+              <a:rPr sz="2000" b="0" i="0">
                 <a:solidFill>
                   <a:srgbClr val="333333"/>
                 </a:solidFill>
@@ -10340,7 +10340,7 @@
               </a:spcAft>
             </a:pPr>
             <a:r>
-              <a:rPr sz="1500" b="0" i="0">
+              <a:rPr sz="2000" b="0" i="0">
                 <a:solidFill>
                   <a:srgbClr val="333333"/>
                 </a:solidFill>
@@ -10356,7 +10356,7 @@
               </a:spcAft>
             </a:pPr>
             <a:r>
-              <a:rPr sz="1500" b="0" i="0">
+              <a:rPr sz="2000" b="0" i="0">
                 <a:solidFill>
                   <a:srgbClr val="333333"/>
                 </a:solidFill>
@@ -10372,7 +10372,7 @@
               </a:spcAft>
             </a:pPr>
             <a:r>
-              <a:rPr sz="1500" b="0" i="0">
+              <a:rPr sz="2000" b="0" i="0">
                 <a:solidFill>
                   <a:srgbClr val="333333"/>
                 </a:solidFill>
@@ -10388,7 +10388,7 @@
               </a:spcAft>
             </a:pPr>
             <a:r>
-              <a:rPr sz="1500" b="0" i="0">
+              <a:rPr sz="2000" b="0" i="0">
                 <a:solidFill>
                   <a:srgbClr val="333333"/>
                 </a:solidFill>
@@ -11782,7 +11782,7 @@
               </a:spcAft>
             </a:pPr>
             <a:r>
-              <a:rPr sz="1600" b="0" i="0">
+              <a:rPr sz="2000" b="0" i="0">
                 <a:solidFill>
                   <a:srgbClr val="333333"/>
                 </a:solidFill>
@@ -11791,7 +11791,7 @@
               <a:t>–   </a:t>
             </a:r>
             <a:r>
-              <a:rPr sz="1600" b="1" i="0">
+              <a:rPr sz="2000" b="1" i="0">
                 <a:solidFill>
                   <a:srgbClr val="333333"/>
                 </a:solidFill>
@@ -11800,7 +11800,7 @@
               <a:t>Herramienta:</a:t>
             </a:r>
             <a:r>
-              <a:rPr sz="1600" b="0" i="0">
+              <a:rPr sz="2000" b="0" i="0">
                 <a:solidFill>
                   <a:srgbClr val="333333"/>
                 </a:solidFill>
@@ -11816,7 +11816,7 @@
               </a:spcAft>
             </a:pPr>
             <a:r>
-              <a:rPr sz="1600" b="0" i="0">
+              <a:rPr sz="2000" b="0" i="0">
                 <a:solidFill>
                   <a:srgbClr val="333333"/>
                 </a:solidFill>
@@ -11825,7 +11825,7 @@
               <a:t>–   </a:t>
             </a:r>
             <a:r>
-              <a:rPr sz="1600" b="1" i="0">
+              <a:rPr sz="2000" b="1" i="0">
                 <a:solidFill>
                   <a:srgbClr val="333333"/>
                 </a:solidFill>
@@ -11834,7 +11834,7 @@
               <a:t>Demo:</a:t>
             </a:r>
             <a:r>
-              <a:rPr sz="1600" b="0" i="0">
+              <a:rPr sz="2000" b="0" i="0">
                 <a:solidFill>
                   <a:srgbClr val="333333"/>
                 </a:solidFill>
@@ -11850,7 +11850,7 @@
               </a:spcAft>
             </a:pPr>
             <a:r>
-              <a:rPr sz="1600" b="0" i="0">
+              <a:rPr sz="2000" b="0" i="0">
                 <a:solidFill>
                   <a:srgbClr val="333333"/>
                 </a:solidFill>
@@ -11866,7 +11866,7 @@
               </a:spcAft>
             </a:pPr>
             <a:r>
-              <a:rPr sz="1600" b="0" i="0">
+              <a:rPr sz="2000" b="0" i="0">
                 <a:solidFill>
                   <a:srgbClr val="333333"/>
                 </a:solidFill>

--- a/Bases de Datos II/Clases/Clase 1 - Revision BD I y arranque VetCare/Presentacion.pptx
+++ b/Bases de Datos II/Clases/Clase 1 - Revision BD I y arranque VetCare/Presentacion.pptx
@@ -3623,7 +3623,7 @@
                 </a:solidFill>
                 <a:latin typeface="Calibri"/>
               </a:rPr>
-              <a:t>Del boceto a ExamLab (diagrama)</a:t>
+              <a:t>Del boceto a la plataforma del curso (diagrama)</a:t>
             </a:r>
           </a:p>
         </p:txBody>
@@ -3657,7 +3657,7 @@
                 </a:solidFill>
                 <a:latin typeface="Calibri"/>
               </a:rPr>
-              <a:t>El diagrama se entrega como codigo Mermaid dentro de ExamLab, no como imagen</a:t>
+              <a:t>El diagrama se entrega como codigo Mermaid dentro de la plataforma del curso, no como imagen</a:t>
             </a:r>
           </a:p>
         </p:txBody>
@@ -4154,7 +4154,7 @@
                 </a:solidFill>
                 <a:latin typeface="Calibri"/>
               </a:rPr>
-              <a:t>Pega y renderiza en ExamLab</a:t>
+              <a:t>Pega y renderiza en la plataforma del curso</a:t>
             </a:r>
           </a:p>
           <a:p>
@@ -4170,7 +4170,7 @@
                 </a:solidFill>
                 <a:latin typeface="Calibri"/>
               </a:rPr>
-              <a:t>Pega ese codigo en la caja de texto de la pregunta y mira como lo dibuja la plataforma. Si no renderiza, corrige ahi mismo: lo que se califica es el diagrama renderizado dentro de ExamLab.</a:t>
+              <a:t>Pega ese codigo en la caja de texto de la pregunta y mira como lo dibuja la plataforma. Si no renderiza, corrige ahi mismo: lo que se califica es el diagrama renderizado dentro de la plataforma del curso.</a:t>
             </a:r>
           </a:p>
         </p:txBody>
@@ -5019,7 +5019,7 @@
                 </a:solidFill>
                 <a:latin typeface="Calibri"/>
               </a:rPr>
-              <a:t> Entrega domingo 23:59.</a:t>
+              <a:t> Entrega en la fecha que indique el docente.</a:t>
             </a:r>
           </a:p>
         </p:txBody>
@@ -5271,7 +5271,7 @@
                 </a:solidFill>
                 <a:latin typeface="Calibri"/>
               </a:rPr>
-              <a:t>–   Diagrama: boceto visual en Excalidraw o draw.io → código Mermaid (erDiagram) → ExamLab.</a:t>
+              <a:t>–   Diagrama: boceto visual en Excalidraw o draw.io → código Mermaid (erDiagram) → la plataforma del curso.</a:t>
             </a:r>
           </a:p>
           <a:p>
@@ -5933,7 +5933,7 @@
                 </a:solidFill>
                 <a:latin typeface="Calibri"/>
               </a:rPr>
-              <a:t>Dibujar el ER borrador en Excalidraw o draw.io, pasarlo a Mermaid (erDiagram) con ayuda de una IA y pegarlo renderizado en ExamLab.</a:t>
+              <a:t>Dibujar el ER borrador en Excalidraw o draw.io, pasarlo a Mermaid (erDiagram) con ayuda de una IA y pegarlo renderizado en la plataforma del curso.</a:t>
             </a:r>
           </a:p>
         </p:txBody>
@@ -6764,7 +6764,7 @@
                 </a:solidFill>
                 <a:latin typeface="Calibri"/>
               </a:rPr>
-              <a:t>□ El Mermaid renderiza dentro de ExamLab (no basta el PNG)?</a:t>
+              <a:t>□ El Mermaid renderiza dentro de la plataforma del curso (no basta el PNG)?</a:t>
             </a:r>
           </a:p>
         </p:txBody>
@@ -7497,7 +7497,7 @@
                 </a:solidFill>
                 <a:latin typeface="Calibri"/>
               </a:rPr>
-              <a:t> Ficha del PI (plantilla) + ER en Mermaid renderizado en ExamLab (PNG para tu carpeta) + 3 reglas Condicion -&gt; Accion</a:t>
+              <a:t> Ficha del PI (plantilla) + ER en Mermaid renderizado en la plataforma del curso (PNG para tu carpeta) + 3 reglas Condicion -&gt; Accion</a:t>
             </a:r>
           </a:p>
           <a:p>
@@ -7513,7 +7513,7 @@
                 </a:solidFill>
                 <a:latin typeface="Calibri"/>
               </a:rPr>
-              <a:t>–   Evidencia: el SQL y su salida quedan guardados en cada pregunta de ExamLab.</a:t>
+              <a:t>–   Evidencia: el SQL y su salida quedan guardados en cada pregunta de la plataforma del curso.</a:t>
             </a:r>
           </a:p>
           <a:p>
@@ -7570,7 +7570,7 @@
                 </a:solidFill>
                 <a:latin typeface="Calibri"/>
               </a:rPr>
-              <a:t>Entrega en ExamLab</a:t>
+              <a:t>Entrega en la plataforma del curso</a:t>
             </a:r>
             <a:r>
               <a:rPr sz="2000" b="0" i="0">
@@ -7579,7 +7579,7 @@
                 </a:solidFill>
                 <a:latin typeface="Calibri"/>
               </a:rPr>
-              <a:t> (https://uniaj.examlab.workers.dev/) — domingo 23:59 cuando aplique taller.</a:t>
+              <a:t> — en la fecha que indique el docente.</a:t>
             </a:r>
           </a:p>
         </p:txBody>
@@ -8174,7 +8174,7 @@
                 </a:solidFill>
                 <a:latin typeface="Calibri"/>
               </a:rPr>
-              <a:t>Taller de la semana en ExamLab (https://uniaj.examlab.workers.dev/): domingo 23:59 (regla del Acuerdo) cuando aplique.</a:t>
+              <a:t>Si el docente asigna taller esta semana, él indica el canal y la fecha.</a:t>
             </a:r>
           </a:p>
         </p:txBody>
@@ -8390,7 +8390,7 @@
                 </a:solidFill>
                 <a:latin typeface="Calibri"/>
               </a:rPr>
-              <a:t>Entregable: Ficha del PI (plantilla) + ER en Mermaid renderizado en ExamLab (PNG para tu carpeta) + 3 reglas Condicion -&gt; Accion</a:t>
+              <a:t>Entregable: Ficha del PI (plantilla) + ER en Mermaid renderizado en la plataforma del curso (PNG para tu carpeta) + 3 reglas Condicion -&gt; Accion</a:t>
             </a:r>
           </a:p>
           <a:p>
@@ -8730,7 +8730,7 @@
                 </a:solidFill>
                 <a:latin typeface="Calibri"/>
               </a:rPr>
-              <a:t> Ficha del PI (plantilla) + ER en Mermaid renderizado en ExamLab (PNG para tu carpeta) + 3 reglas Condicion -&gt; Accion</a:t>
+              <a:t> Ficha del PI (plantilla) + ER en Mermaid renderizado en la plataforma del curso (PNG para tu carpeta) + 3 reglas Condicion -&gt; Accion</a:t>
             </a:r>
           </a:p>
           <a:p>
@@ -10905,7 +10905,7 @@
                 </a:solidFill>
                 <a:latin typeface="Calibri"/>
               </a:rPr>
-              <a:t>1 : N</a:t>
+              <a:t>1: N</a:t>
             </a:r>
           </a:p>
         </p:txBody>
@@ -10976,7 +10976,7 @@
                 </a:solidFill>
                 <a:latin typeface="Calibri"/>
               </a:rPr>
-              <a:t>1 : N</a:t>
+              <a:t>1: N</a:t>
             </a:r>
           </a:p>
         </p:txBody>
@@ -11047,7 +11047,7 @@
                 </a:solidFill>
                 <a:latin typeface="Calibri"/>
               </a:rPr>
-              <a:t>1 : N</a:t>
+              <a:t>1: N</a:t>
             </a:r>
           </a:p>
         </p:txBody>
@@ -11840,7 +11840,7 @@
                 </a:solidFill>
                 <a:latin typeface="Calibri"/>
               </a:rPr>
-              <a:t> Boceto ER en draw.io (Dueno-Mascota-Cita) + CREATE TABLE minimo en DB Fiddle, y cierre pasando el boceto a Mermaid con IA para pegarlo renderizado en ExamLab.</a:t>
+              <a:t> Boceto ER en draw.io (Dueno-Mascota-Cita) + CREATE TABLE minimo en DB Fiddle, y cierre pasando el boceto a Mermaid con IA para pegarlo renderizado en la plataforma del curso.</a:t>
             </a:r>
           </a:p>
           <a:p>
@@ -13295,7 +13295,7 @@
                 </a:solidFill>
                 <a:latin typeface="Calibri"/>
               </a:rPr>
-              <a:t>ExamLab</a:t>
+              <a:t>la plataforma del curso</a:t>
             </a:r>
           </a:p>
           <a:p>
